--- a/_implementation-notes/evening-series/FotH Evening Session 22 Slides DRAFT v1.pptx
+++ b/_implementation-notes/evening-series/FotH Evening Session 22 Slides DRAFT v1.pptx
@@ -10,6 +10,7 @@
   <p:sldIdLst>
     <p:sldId id="256" r:id="rId2"/>
     <p:sldId id="325" r:id="rId267"/>
+    <p:sldId id="546" r:id="rId22"/>
     <p:sldId id="326" r:id="rId268"/>
     <p:sldId id="509" r:id="rId269"/>
     <p:sldId id="510" r:id="rId270"/>
@@ -18,7 +19,8 @@
     <p:sldId id="513" r:id="rId273"/>
     <p:sldId id="514" r:id="rId274"/>
     <p:sldId id="515" r:id="rId275"/>
-    <p:sldId id="545" r:id="rId276"/>
+    <p:sldId id="547" r:id="rId23"/>
+    <p:sldId id="548" r:id="rId24"/>
     <p:sldId id="516" r:id="rId277"/>
     <p:sldId id="517" r:id="rId278"/>
   </p:sldIdLst>
@@ -750,6 +752,214 @@
 </p:notes>
 </file>
 
+<file path=ppt/notesSlides/notesSlide14.xml><?xml version="1.0" encoding="utf-8"?>
+<p:notes xmlns:a="http://schemas.openxmlformats.org/drawingml/2006/main" xmlns:p="http://schemas.openxmlformats.org/presentationml/2006/main" xmlns:r="http://schemas.openxmlformats.org/officeDocument/2006/relationships">
+  <p:cSld>
+    <p:spTree>
+      <p:nvGrpSpPr>
+        <p:cNvPr id="1" name=""/>
+        <p:cNvGrpSpPr/>
+        <p:nvPr/>
+      </p:nvGrpSpPr>
+      <p:grpSpPr>
+        <a:xfrm>
+          <a:off x="0" y="0"/>
+          <a:ext cx="0" cy="0"/>
+          <a:chOff x="0" y="0"/>
+          <a:chExt cx="0" cy="0"/>
+        </a:xfrm>
+      </p:grpSpPr>
+      <p:sp>
+        <p:nvSpPr>
+          <p:cNvPr id="2" name="Notes Placeholder 1"/>
+          <p:cNvSpPr>
+            <a:spLocks noGrp="1"/>
+          </p:cNvSpPr>
+          <p:nvPr>
+            <p:ph type="body" idx="1"/>
+          </p:nvPr>
+        </p:nvSpPr>
+        <p:spPr/>
+        <p:txBody>
+          <a:bodyPr/>
+          <a:lstStyle/>
+          <a:p>
+            <a:r>
+              <a:t>S22 · WELCOME · LEAD: CONTAINER HOLDER · GROUNDING — every session opens on this map</a:t>
+            </a:r>
+          </a:p>
+          <a:p>
+            <a:r>
+              <a:t>BEATS:</a:t>
+            </a:r>
+          </a:p>
+          <a:p>
+            <a:r>
+              <a:t>1. Locate tonight on the map, plainly: Session 22 commissions what the map has built — all four Connects, carried by the Companions. Each connection makes the next one real (Matt. 22:37–40).</a:t>
+            </a:r>
+          </a:p>
+          <a:p>
+            <a:r>
+              <a:t>2. The four boxes are one journey — each connection makes the next one real — rooted in the two great commandments: love God, love neighbor (Matt 22:37–40).</a:t>
+            </a:r>
+          </a:p>
+          <a:p>
+            <a:r>
+              <a:t>3. This is also the 'where we are on the map' minute the welcome owes any newcomer.</a:t>
+            </a:r>
+          </a:p>
+          <a:p>
+            <a:r>
+              <a:t>CUES: Two minutes at most; then tonight's road.</a:t>
+            </a:r>
+          </a:p>
+        </p:txBody>
+      </p:sp>
+    </p:spTree>
+  </p:cSld>
+  <p:clrMapOvr>
+    <a:masterClrMapping/>
+  </p:clrMapOvr>
+</p:notes>
+</file>
+
+<file path=ppt/notesSlides/notesSlide15.xml><?xml version="1.0" encoding="utf-8"?>
+<p:notes xmlns:a="http://schemas.openxmlformats.org/drawingml/2006/main" xmlns:p="http://schemas.openxmlformats.org/presentationml/2006/main" xmlns:r="http://schemas.openxmlformats.org/officeDocument/2006/relationships">
+  <p:cSld>
+    <p:spTree>
+      <p:nvGrpSpPr>
+        <p:cNvPr id="1" name=""/>
+        <p:cNvGrpSpPr/>
+        <p:nvPr/>
+      </p:nvGrpSpPr>
+      <p:grpSpPr>
+        <a:xfrm>
+          <a:off x="0" y="0"/>
+          <a:ext cx="0" cy="0"/>
+          <a:chOff x="0" y="0"/>
+          <a:chExt cx="0" cy="0"/>
+        </a:xfrm>
+      </p:grpSpPr>
+      <p:sp>
+        <p:nvSpPr>
+          <p:cNvPr id="2" name="Notes Placeholder 1"/>
+          <p:cNvSpPr>
+            <a:spLocks noGrp="1"/>
+          </p:cNvSpPr>
+          <p:nvPr>
+            <p:ph type="body" idx="1"/>
+          </p:nvPr>
+        </p:nvSpPr>
+        <p:spPr/>
+        <p:txBody>
+          <a:bodyPr/>
+          <a:lstStyle/>
+          <a:p>
+            <a:r>
+              <a:t>S22 · COMMISSIONING · LEAD: CONTENT PRESENTER</a:t>
+            </a:r>
+          </a:p>
+          <a:p>
+            <a:r>
+              <a:t>BEATS:</a:t>
+            </a:r>
+          </a:p>
+          <a:p>
+            <a:r>
+              <a:t>1. The sheet on the screen is the sheet in their hands — walk it, don't read it.</a:t>
+            </a:r>
+          </a:p>
+          <a:p>
+            <a:r>
+              <a:t>2. The standing rhythm first: the morning question, the evening journal line — one box per day on the week-grids.</a:t>
+            </a:r>
+          </a:p>
+          <a:p>
+            <a:r>
+              <a:t>3. A missed box is never a failure — it is an invitation to return.</a:t>
+            </a:r>
+          </a:p>
+          <a:p>
+            <a:r>
+              <a:t>CUES: The four parts are the next slide.</a:t>
+            </a:r>
+          </a:p>
+        </p:txBody>
+      </p:sp>
+    </p:spTree>
+  </p:cSld>
+  <p:clrMapOvr>
+    <a:masterClrMapping/>
+  </p:clrMapOvr>
+</p:notes>
+</file>
+
+<file path=ppt/notesSlides/notesSlide16.xml><?xml version="1.0" encoding="utf-8"?>
+<p:notes xmlns:a="http://schemas.openxmlformats.org/drawingml/2006/main" xmlns:p="http://schemas.openxmlformats.org/presentationml/2006/main" xmlns:r="http://schemas.openxmlformats.org/officeDocument/2006/relationships">
+  <p:cSld>
+    <p:spTree>
+      <p:nvGrpSpPr>
+        <p:cNvPr id="1" name=""/>
+        <p:cNvGrpSpPr/>
+        <p:nvPr/>
+      </p:nvGrpSpPr>
+      <p:grpSpPr>
+        <a:xfrm>
+          <a:off x="0" y="0"/>
+          <a:ext cx="0" cy="0"/>
+          <a:chOff x="0" y="0"/>
+          <a:chExt cx="0" cy="0"/>
+        </a:xfrm>
+      </p:grpSpPr>
+      <p:sp>
+        <p:nvSpPr>
+          <p:cNvPr id="2" name="Notes Placeholder 1"/>
+          <p:cNvSpPr>
+            <a:spLocks noGrp="1"/>
+          </p:cNvSpPr>
+          <p:nvPr>
+            <p:ph type="body" idx="1"/>
+          </p:nvPr>
+        </p:nvSpPr>
+        <p:spPr/>
+        <p:txBody>
+          <a:bodyPr/>
+          <a:lstStyle/>
+          <a:p>
+            <a:r>
+              <a:t>S22 · COMMISSIONING · LEAD: CONTENT PRESENTER</a:t>
+            </a:r>
+          </a:p>
+          <a:p>
+            <a:r>
+              <a:t>BEATS:</a:t>
+            </a:r>
+          </a:p>
+          <a:p>
+            <a:r>
+              <a:t>1. The four parts, in order: the homework practice, week one; the end-of-week-one check-in; the homework practice, week two; one sentence of preparation.</a:t>
+            </a:r>
+          </a:p>
+          <a:p>
+            <a:r>
+              <a:t>2. Check-in partners are named aloud before leaving this slide — the sheet has the line to write the name.</a:t>
+            </a:r>
+          </a:p>
+          <a:p>
+            <a:r>
+              <a:t>GUARD: The sheet-walk, not a re-teach.</a:t>
+            </a:r>
+          </a:p>
+        </p:txBody>
+      </p:sp>
+    </p:spTree>
+  </p:cSld>
+  <p:clrMapOvr>
+    <a:masterClrMapping/>
+  </p:clrMapOvr>
+</p:notes>
+</file>
+
 <file path=ppt/notesSlides/notesSlide264.xml><?xml version="1.0" encoding="utf-8"?>
 <p:notes xmlns:a="http://schemas.openxmlformats.org/drawingml/2006/main" xmlns:r="http://schemas.openxmlformats.org/officeDocument/2006/relationships" xmlns:p="http://schemas.openxmlformats.org/presentationml/2006/main">
   <p:cSld>
@@ -913,38 +1123,37 @@
           <a:lstStyle/>
           <a:p>
             <a:r>
-              <a:rPr lang="en-US" sz="1200"/>
               <a:t>S22 · 7:00–7:08 · LEAD: CONTAINER HOLDER CIRCLE</a:t>
             </a:r>
           </a:p>
           <a:p>
             <a:r>
-              <a:rPr lang="en-US" sz="1200"/>
               <a:t>BEATS:</a:t>
             </a:r>
           </a:p>
           <a:p>
             <a:r>
-              <a:rPr lang="en-US" sz="1200"/>
               <a:t>1. Five minutes total — the small budget is the point; the night is handed over fast.</a:t>
             </a:r>
           </a:p>
           <a:p>
             <a:r>
-              <a:rPr lang="en-US" sz="1200"/>
               <a:t>2. Say the distinction plainly: a graduation sends you out of a room; today opens a door further in — FC1 means a serving place in this body, beginning, not finishing.</a:t>
             </a:r>
           </a:p>
           <a:p>
             <a:r>
-              <a:rPr lang="en-US" sz="1200"/>
               <a:t>3. Name the four movements so the room can follow the architecture — and flag the last one: the Lab date before anyone leaves is the proof today is a beginning.</a:t>
             </a:r>
           </a:p>
           <a:p>
             <a:r>
-              <a:rPr lang="en-US" sz="1200"/>
               <a:t>4. Close: 'Seniors, the room is yours' — lean in one more time, because true things deserve witnesses.</a:t>
+            </a:r>
+          </a:p>
+          <a:p>
+            <a:r>
+              <a:t>PAIR LEAD: name the leading pair in the welcome — two leaders hold tonight, and the room will see the evening handed back and forth between them; that is the design. The pair practices the session together beforehand.</a:t>
             </a:r>
           </a:p>
         </p:txBody>
@@ -1425,77 +1634,6 @@
             <a:r>
               <a:rPr lang="en-US" sz="1200"/>
               <a:t>4. One sentence to the younger teens: in a year or two, some of you will stand where these seniors stand — watch how they begin. No promises, no selection talk; just the door left visibly open.</a:t>
-            </a:r>
-          </a:p>
-        </p:txBody>
-      </p:sp>
-    </p:spTree>
-  </p:cSld>
-  <p:clrMapOvr>
-    <a:masterClrMapping/>
-  </p:clrMapOvr>
-</p:notes>
-</file>
-
-<file path=ppt/notesSlides/notesSlide273.xml><?xml version="1.0" encoding="utf-8"?>
-<p:notes xmlns:a="http://schemas.openxmlformats.org/drawingml/2006/main" xmlns:r="http://schemas.openxmlformats.org/officeDocument/2006/relationships" xmlns:p="http://schemas.openxmlformats.org/presentationml/2006/main">
-  <p:cSld>
-    <p:spTree>
-      <p:nvGrpSpPr>
-        <p:cNvPr id="1" name=""/>
-        <p:cNvGrpSpPr/>
-        <p:nvPr/>
-      </p:nvGrpSpPr>
-      <p:grpSpPr>
-        <a:xfrm>
-          <a:off x="0" y="0"/>
-          <a:ext cx="0" cy="0"/>
-          <a:chOff x="0" y="0"/>
-          <a:chExt cx="0" cy="0"/>
-        </a:xfrm>
-      </p:grpSpPr>
-      <p:sp>
-        <p:nvSpPr>
-          <p:cNvPr id="2" name="Notes Placeholder 1"/>
-          <p:cNvSpPr>
-            <a:spLocks noGrp="1"/>
-          </p:cNvSpPr>
-          <p:nvPr>
-            <p:ph type="body" idx="1"/>
-          </p:nvPr>
-        </p:nvSpPr>
-        <p:spPr/>
-        <p:txBody>
-          <a:bodyPr/>
-          <a:lstStyle/>
-          <a:p>
-            <a:r>
-              <a:rPr lang="en-US" sz="1200"/>
-              <a:t>S22 · 8:10–8:13 · LEAD: CONTENT PRESENTER CIRCLE</a:t>
-            </a:r>
-          </a:p>
-          <a:p>
-            <a:r>
-              <a:rPr lang="en-US" sz="1200"/>
-              <a:t>BEATS:</a:t>
-            </a:r>
-          </a:p>
-          <a:p>
-            <a:r>
-              <a:rPr lang="en-US" sz="1200"/>
-              <a:t>1. Check-off card H22.4: the morning question and the session journal note continue from the Rhythm Card, through the interlude.</a:t>
-            </a:r>
-          </a:p>
-          <a:p>
-            <a:r>
-              <a:rPr lang="en-US" sz="1200"/>
-              <a:t>2. One-time boxes: the weekly person; one Family Conversation Card at home; the monthly clearing time — and for the new FC1s, the vital-signs observation written down and carried to Lab 1.</a:t>
-            </a:r>
-          </a:p>
-          <a:p>
-            <a:r>
-              <a:rPr lang="en-US" sz="1200"/>
-              <a:t>3. Keep beginning again — the room goes with you now.</a:t>
             </a:r>
           </a:p>
         </p:txBody>
@@ -4855,7 +4993,1423 @@
 </p:sld>
 </file>
 
-<file path=ppt/slides/slide266.xml><?xml version="1.0" encoding="utf-8"?>
+<file path=ppt/slides/slide10.xml><?xml version="1.0" encoding="utf-8"?>
+<p:sld xmlns:a="http://schemas.openxmlformats.org/drawingml/2006/main" xmlns:r="http://schemas.openxmlformats.org/officeDocument/2006/relationships" xmlns:p="http://schemas.openxmlformats.org/presentationml/2006/main">
+  <p:cSld>
+    <p:spTree>
+      <p:nvGrpSpPr>
+        <p:cNvPr id="1" name=""/>
+        <p:cNvGrpSpPr/>
+        <p:nvPr/>
+      </p:nvGrpSpPr>
+      <p:grpSpPr>
+        <a:xfrm>
+          <a:off x="0" y="0"/>
+          <a:ext cx="0" cy="0"/>
+          <a:chOff x="0" y="0"/>
+          <a:chExt cx="0" cy="0"/>
+        </a:xfrm>
+      </p:grpSpPr>
+      <p:sp>
+        <p:nvSpPr>
+          <p:cNvPr id="2" name="Rectangle 1"/>
+          <p:cNvSpPr/>
+          <p:nvPr/>
+        </p:nvSpPr>
+        <p:spPr>
+          <a:xfrm>
+            <a:off x="0" y="0"/>
+            <a:ext cx="12191695" cy="6858000"/>
+          </a:xfrm>
+          <a:prstGeom prst="rect">
+            <a:avLst/>
+          </a:prstGeom>
+          <a:solidFill>
+            <a:srgbClr val="FFFFFF"/>
+          </a:solidFill>
+          <a:ln>
+            <a:noFill/>
+          </a:ln>
+        </p:spPr>
+        <p:txBody>
+          <a:bodyPr/>
+          <a:lstStyle/>
+          <a:p>
+            <a:endParaRPr/>
+          </a:p>
+        </p:txBody>
+      </p:sp>
+      <p:sp>
+        <p:nvSpPr>
+          <p:cNvPr id="3" name="TextBox 2"/>
+          <p:cNvSpPr txBox="1"/>
+          <p:nvPr/>
+        </p:nvSpPr>
+        <p:spPr>
+          <a:xfrm>
+            <a:off x="822960" y="502920"/>
+            <a:ext cx="10515600" cy="822960"/>
+          </a:xfrm>
+          <a:prstGeom prst="rect">
+            <a:avLst/>
+          </a:prstGeom>
+          <a:noFill/>
+        </p:spPr>
+        <p:txBody>
+          <a:bodyPr wrap="square">
+            <a:spAutoFit/>
+          </a:bodyPr>
+          <a:lstStyle/>
+          <a:p>
+            <a:pPr algn="l">
+              <a:spcAft>
+                <a:spcPts val="600"/>
+              </a:spcAft>
+            </a:pPr>
+            <a:r>
+              <a:rPr sz="2800" b="1" i="0">
+                <a:solidFill>
+                  <a:srgbClr val="2C5F2D"/>
+                </a:solidFill>
+                <a:latin typeface="Cambria"/>
+              </a:rPr>
+              <a:t>The First Lab Scheduled</a:t>
+            </a:r>
+          </a:p>
+        </p:txBody>
+      </p:sp>
+      <p:sp>
+        <p:nvSpPr>
+          <p:cNvPr id="4" name="TextBox 4"/>
+          <p:cNvSpPr txBox="1"/>
+          <p:nvPr/>
+        </p:nvSpPr>
+        <p:spPr>
+          <a:xfrm>
+            <a:off x="822960" y="1554480"/>
+            <a:ext cx="10515600" cy="4892040"/>
+          </a:xfrm>
+          <a:prstGeom prst="rect">
+            <a:avLst/>
+          </a:prstGeom>
+          <a:noFill/>
+        </p:spPr>
+        <p:txBody>
+          <a:bodyPr wrap="square" lIns="91440" tIns="91440" rIns="91440" bIns="91440"/>
+          <a:lstStyle/>
+          <a:p>
+            <a:pPr marL="274320" indent="-274320">
+              <a:spcAft>
+                <a:spcPts val="900"/>
+              </a:spcAft>
+            </a:pPr>
+            <a:r>
+              <a:rPr sz="2800" b="1" i="0">
+                <a:solidFill>
+                  <a:srgbClr val="97BC62"/>
+                </a:solidFill>
+                <a:latin typeface="Calibri"/>
+              </a:rPr>
+              <a:t>•  </a:t>
+            </a:r>
+            <a:r>
+              <a:rPr sz="2800" b="0" i="0">
+                <a:solidFill>
+                  <a:srgbClr val="222B22"/>
+                </a:solidFill>
+                <a:latin typeface="Calibri"/>
+              </a:rPr>
+              <a:t>Before anyone reaches for a coat — one piece of business, on purpose, in front of everyone</a:t>
+            </a:r>
+          </a:p>
+          <a:p>
+            <a:pPr marL="274320" indent="-274320">
+              <a:spcAft>
+                <a:spcPts val="900"/>
+              </a:spcAft>
+            </a:pPr>
+            <a:r>
+              <a:rPr sz="2800" b="1" i="0">
+                <a:solidFill>
+                  <a:srgbClr val="97BC62"/>
+                </a:solidFill>
+                <a:latin typeface="Calibri"/>
+              </a:rPr>
+              <a:t>•  </a:t>
+            </a:r>
+            <a:r>
+              <a:rPr sz="2800" b="0" i="0">
+                <a:solidFill>
+                  <a:srgbClr val="222B22"/>
+                </a:solidFill>
+                <a:latin typeface="Calibri"/>
+              </a:rPr>
+              <a:t>The first Leader Lab of the spring serving cycle: [day], [date], [time], [place]. Write it down now.</a:t>
+            </a:r>
+          </a:p>
+          <a:p>
+            <a:pPr marL="274320" indent="-274320">
+              <a:spcAft>
+                <a:spcPts val="900"/>
+              </a:spcAft>
+            </a:pPr>
+            <a:r>
+              <a:rPr sz="2800" b="1" i="0">
+                <a:solidFill>
+                  <a:srgbClr val="97BC62"/>
+                </a:solidFill>
+                <a:latin typeface="Calibri"/>
+              </a:rPr>
+              <a:t>•  </a:t>
+            </a:r>
+            <a:r>
+              <a:rPr sz="2800" b="0" i="0">
+                <a:solidFill>
+                  <a:srgbClr val="222B22"/>
+                </a:solidFill>
+                <a:latin typeface="Calibri"/>
+              </a:rPr>
+              <a:t>The Lab 1 assignment is already set: bring one vital-signs observation from this room, tonight</a:t>
+            </a:r>
+          </a:p>
+          <a:p>
+            <a:pPr marL="274320" indent="-274320">
+              <a:spcAft>
+                <a:spcPts val="900"/>
+              </a:spcAft>
+            </a:pPr>
+            <a:r>
+              <a:rPr sz="2800" b="1" i="0">
+                <a:solidFill>
+                  <a:srgbClr val="97BC62"/>
+                </a:solidFill>
+                <a:latin typeface="Calibri"/>
+              </a:rPr>
+              <a:t>•  </a:t>
+            </a:r>
+            <a:r>
+              <a:rPr sz="2800" b="0" i="0">
+                <a:solidFill>
+                  <a:srgbClr val="222B22"/>
+                </a:solidFill>
+                <a:latin typeface="Calibri"/>
+              </a:rPr>
+              <a:t>“Anyone can hold a beautiful ceremony. The proof that tonight was a gate and not a ceremony is a date on a calendar.” The exit is an entrance.</a:t>
+            </a:r>
+          </a:p>
+        </p:txBody>
+      </p:sp>
+      <p:sp>
+        <p:nvSpPr>
+          <p:cNvPr id="90" name="SlideNum"/>
+          <p:cNvSpPr txBox="1"/>
+          <p:nvPr/>
+        </p:nvSpPr>
+        <p:spPr>
+          <a:xfrm>
+            <a:off x="11384280" y="6446520"/>
+            <a:ext cx="640080" cy="292608"/>
+          </a:xfrm>
+          <a:prstGeom prst="rect">
+            <a:avLst/>
+          </a:prstGeom>
+          <a:noFill/>
+        </p:spPr>
+        <p:txBody>
+          <a:bodyPr wrap="none" lIns="0" tIns="0" rIns="45720" bIns="0" anchor="ctr"/>
+          <a:lstStyle/>
+          <a:p>
+            <a:pPr algn="r"/>
+            <a:r>
+              <a:t>274</a:t>
+            </a:r>
+            <a:endParaRPr sz="1000" b="1">
+              <a:solidFill>
+                <a:srgbClr val="7A8A6E"/>
+              </a:solidFill>
+              <a:latin typeface="Calibri"/>
+            </a:endParaRPr>
+          </a:p>
+        </p:txBody>
+      </p:sp>
+    </p:spTree>
+  </p:cSld>
+  <p:clrMapOvr>
+    <a:masterClrMapping/>
+  </p:clrMapOvr>
+</p:sld>
+</file>
+
+<file path=ppt/slides/slide12.xml><?xml version="1.0" encoding="utf-8"?>
+<p:sld xmlns:a="http://schemas.openxmlformats.org/drawingml/2006/main" xmlns:r="http://schemas.openxmlformats.org/officeDocument/2006/relationships" xmlns:p="http://schemas.openxmlformats.org/presentationml/2006/main">
+  <p:cSld>
+    <p:spTree>
+      <p:nvGrpSpPr>
+        <p:cNvPr id="1" name=""/>
+        <p:cNvGrpSpPr/>
+        <p:nvPr/>
+      </p:nvGrpSpPr>
+      <p:grpSpPr>
+        <a:xfrm>
+          <a:off x="0" y="0"/>
+          <a:ext cx="0" cy="0"/>
+          <a:chOff x="0" y="0"/>
+          <a:chExt cx="0" cy="0"/>
+        </a:xfrm>
+      </p:grpSpPr>
+      <p:sp>
+        <p:nvSpPr>
+          <p:cNvPr id="2" name="Rectangle 1"/>
+          <p:cNvSpPr/>
+          <p:nvPr/>
+        </p:nvSpPr>
+        <p:spPr>
+          <a:xfrm>
+            <a:off x="0" y="0"/>
+            <a:ext cx="12191695" cy="6858000"/>
+          </a:xfrm>
+          <a:prstGeom prst="rect">
+            <a:avLst/>
+          </a:prstGeom>
+          <a:solidFill>
+            <a:srgbClr val="FFFFFF"/>
+          </a:solidFill>
+          <a:ln>
+            <a:noFill/>
+          </a:ln>
+        </p:spPr>
+        <p:txBody>
+          <a:bodyPr/>
+          <a:lstStyle/>
+          <a:p>
+            <a:endParaRPr/>
+          </a:p>
+        </p:txBody>
+      </p:sp>
+      <p:sp>
+        <p:nvSpPr>
+          <p:cNvPr id="3" name="TextBox 2"/>
+          <p:cNvSpPr txBox="1"/>
+          <p:nvPr/>
+        </p:nvSpPr>
+        <p:spPr>
+          <a:xfrm>
+            <a:off x="822960" y="502920"/>
+            <a:ext cx="10515600" cy="822960"/>
+          </a:xfrm>
+          <a:prstGeom prst="rect">
+            <a:avLst/>
+          </a:prstGeom>
+          <a:noFill/>
+        </p:spPr>
+        <p:txBody>
+          <a:bodyPr wrap="square">
+            <a:spAutoFit/>
+          </a:bodyPr>
+          <a:lstStyle/>
+          <a:p>
+            <a:pPr algn="l">
+              <a:spcAft>
+                <a:spcPts val="600"/>
+              </a:spcAft>
+            </a:pPr>
+            <a:r>
+              <a:rPr sz="2800" b="1" i="0">
+                <a:solidFill>
+                  <a:srgbClr val="2C5F2D"/>
+                </a:solidFill>
+                <a:latin typeface="Cambria"/>
+              </a:rPr>
+              <a:t>The Leader Feedback Round</a:t>
+            </a:r>
+          </a:p>
+        </p:txBody>
+      </p:sp>
+      <p:sp>
+        <p:nvSpPr>
+          <p:cNvPr id="4" name="TextBox 4"/>
+          <p:cNvSpPr txBox="1"/>
+          <p:nvPr/>
+        </p:nvSpPr>
+        <p:spPr>
+          <a:xfrm>
+            <a:off x="822960" y="1554480"/>
+            <a:ext cx="6675120" cy="4892040"/>
+          </a:xfrm>
+          <a:prstGeom prst="rect">
+            <a:avLst/>
+          </a:prstGeom>
+          <a:noFill/>
+        </p:spPr>
+        <p:txBody>
+          <a:bodyPr wrap="square" lIns="91440" tIns="91440" rIns="91440" bIns="91440"/>
+          <a:lstStyle/>
+          <a:p>
+            <a:pPr marL="274320" indent="-274320">
+              <a:spcAft>
+                <a:spcPts val="900"/>
+              </a:spcAft>
+            </a:pPr>
+            <a:r>
+              <a:rPr sz="2800" b="1" i="0">
+                <a:solidFill>
+                  <a:srgbClr val="97BC62"/>
+                </a:solidFill>
+                <a:latin typeface="Calibri"/>
+              </a:rPr>
+              <a:t>•  </a:t>
+            </a:r>
+            <a:r>
+              <a:rPr sz="2800" b="0" i="0">
+                <a:solidFill>
+                  <a:srgbClr val="222B22"/>
+                </a:solidFill>
+                <a:latin typeface="Calibri"/>
+              </a:rPr>
+              <a:t>Two rounds, same as every session — the container holder first, then the content presenter: three things each</a:t>
+            </a:r>
+          </a:p>
+          <a:p>
+            <a:pPr marL="685800" indent="-274320">
+              <a:spcAft>
+                <a:spcPts val="700"/>
+              </a:spcAft>
+            </a:pPr>
+            <a:r>
+              <a:rPr sz="2000" b="1" i="0">
+                <a:solidFill>
+                  <a:srgbClr val="97BC62"/>
+                </a:solidFill>
+                <a:latin typeface="Calibri"/>
+              </a:rPr>
+              <a:t>–  </a:t>
+            </a:r>
+            <a:r>
+              <a:rPr sz="2000" b="0" i="1">
+                <a:solidFill>
+                  <a:srgbClr val="222B22"/>
+                </a:solidFill>
+                <a:latin typeface="Calibri"/>
+              </a:rPr>
+              <a:t>“What I think went well tonight: ______”</a:t>
+            </a:r>
+          </a:p>
+          <a:p>
+            <a:pPr marL="685800" indent="-274320">
+              <a:spcAft>
+                <a:spcPts val="700"/>
+              </a:spcAft>
+            </a:pPr>
+            <a:r>
+              <a:rPr sz="2000" b="1" i="0">
+                <a:solidFill>
+                  <a:srgbClr val="97BC62"/>
+                </a:solidFill>
+                <a:latin typeface="Calibri"/>
+              </a:rPr>
+              <a:t>–  </a:t>
+            </a:r>
+            <a:r>
+              <a:rPr sz="2000" b="0" i="1">
+                <a:solidFill>
+                  <a:srgbClr val="222B22"/>
+                </a:solidFill>
+                <a:latin typeface="Calibri"/>
+              </a:rPr>
+              <a:t>“What I’d do differently next time: ______”</a:t>
+            </a:r>
+          </a:p>
+          <a:p>
+            <a:pPr marL="685800" indent="-274320">
+              <a:spcAft>
+                <a:spcPts val="700"/>
+              </a:spcAft>
+            </a:pPr>
+            <a:r>
+              <a:rPr sz="2000" b="1" i="0">
+                <a:solidFill>
+                  <a:srgbClr val="97BC62"/>
+                </a:solidFill>
+                <a:latin typeface="Calibri"/>
+              </a:rPr>
+              <a:t>–  </a:t>
+            </a:r>
+            <a:r>
+              <a:rPr sz="2000" b="0" i="1">
+                <a:solidFill>
+                  <a:srgbClr val="222B22"/>
+                </a:solidFill>
+                <a:latin typeface="Calibri"/>
+              </a:rPr>
+              <a:t>“If I were to teach tonight’s process to someone, I would tell them: ______”</a:t>
+            </a:r>
+          </a:p>
+          <a:p>
+            <a:pPr marL="274320" indent="-274320">
+              <a:spcAft>
+                <a:spcPts val="900"/>
+              </a:spcAft>
+            </a:pPr>
+            <a:r>
+              <a:rPr sz="2800" b="1" i="0">
+                <a:solidFill>
+                  <a:srgbClr val="97BC62"/>
+                </a:solidFill>
+                <a:latin typeface="Calibri"/>
+              </a:rPr>
+              <a:t>•  </a:t>
+            </a:r>
+            <a:r>
+              <a:rPr sz="2800" b="0" i="0">
+                <a:solidFill>
+                  <a:srgbClr val="222B22"/>
+                </a:solidFill>
+                <a:latin typeface="Calibri"/>
+              </a:rPr>
+              <a:t>Then the room — the same two questions about tonight</a:t>
+            </a:r>
+          </a:p>
+          <a:p>
+            <a:pPr marL="274320" indent="-274320">
+              <a:spcAft>
+                <a:spcPts val="900"/>
+              </a:spcAft>
+            </a:pPr>
+            <a:r>
+              <a:rPr sz="2800" b="1" i="0">
+                <a:solidFill>
+                  <a:srgbClr val="97BC62"/>
+                </a:solidFill>
+                <a:latin typeface="Calibri"/>
+              </a:rPr>
+              <a:t>•  </a:t>
+            </a:r>
+            <a:r>
+              <a:rPr sz="2800" b="0" i="0">
+                <a:solidFill>
+                  <a:srgbClr val="222B22"/>
+                </a:solidFill>
+                <a:latin typeface="Calibri"/>
+              </a:rPr>
+              <a:t>The leaders receive without defending — “thank you” is the whole response</a:t>
+            </a:r>
+          </a:p>
+        </p:txBody>
+      </p:sp>
+      <p:sp>
+        <p:nvSpPr>
+          <p:cNvPr id="90" name="SlideNum"/>
+          <p:cNvSpPr txBox="1"/>
+          <p:nvPr/>
+        </p:nvSpPr>
+        <p:spPr>
+          <a:xfrm>
+            <a:off x="11384280" y="6446520"/>
+            <a:ext cx="640080" cy="292608"/>
+          </a:xfrm>
+          <a:prstGeom prst="rect">
+            <a:avLst/>
+          </a:prstGeom>
+          <a:noFill/>
+        </p:spPr>
+        <p:txBody>
+          <a:bodyPr wrap="none" lIns="0" tIns="0" rIns="45720" bIns="0" anchor="ctr"/>
+          <a:lstStyle/>
+          <a:p>
+            <a:pPr algn="r"/>
+            <a:r>
+              <a:t>276</a:t>
+            </a:r>
+            <a:endParaRPr sz="1000" b="1">
+              <a:solidFill>
+                <a:srgbClr val="7A8A6E"/>
+              </a:solidFill>
+              <a:latin typeface="Calibri"/>
+            </a:endParaRPr>
+          </a:p>
+        </p:txBody>
+      </p:sp>
+      <p:pic>
+        <p:nvPicPr>
+          <p:cNvPr id="33" name="Picture 33" descr="compass on the trail - the weekly bearing check"/>
+          <p:cNvPicPr>
+            <a:picLocks noChangeAspect="1"/>
+          </p:cNvPicPr>
+          <p:nvPr/>
+        </p:nvPicPr>
+        <p:blipFill>
+          <a:blip r:embed="rId3"/>
+          <a:stretch>
+            <a:fillRect/>
+          </a:stretch>
+        </p:blipFill>
+        <p:spPr>
+          <a:xfrm>
+            <a:off x="8106160" y="1463040"/>
+            <a:ext cx="3259831" cy="4892040"/>
+          </a:xfrm>
+          <a:prstGeom prst="rect">
+            <a:avLst/>
+          </a:prstGeom>
+          <a:ln w="76200">
+            <a:solidFill>
+              <a:srgbClr val="FFFFFF"/>
+            </a:solidFill>
+          </a:ln>
+          <a:effectLst>
+            <a:outerShdw blurRad="63500" dist="25400" dir="5400000" rotWithShape="0">
+              <a:srgbClr val="000000">
+                <a:alpha val="35000"/>
+              </a:srgbClr>
+            </a:outerShdw>
+          </a:effectLst>
+        </p:spPr>
+      </p:pic>
+    </p:spTree>
+  </p:cSld>
+  <p:clrMapOvr>
+    <a:masterClrMapping/>
+  </p:clrMapOvr>
+</p:sld>
+</file>
+
+<file path=ppt/slides/slide13.xml><?xml version="1.0" encoding="utf-8"?>
+<p:sld xmlns:a="http://schemas.openxmlformats.org/drawingml/2006/main" xmlns:r="http://schemas.openxmlformats.org/officeDocument/2006/relationships" xmlns:p="http://schemas.openxmlformats.org/presentationml/2006/main">
+  <p:cSld>
+    <p:spTree>
+      <p:nvGrpSpPr>
+        <p:cNvPr id="1" name=""/>
+        <p:cNvGrpSpPr/>
+        <p:nvPr/>
+      </p:nvGrpSpPr>
+      <p:grpSpPr>
+        <a:xfrm>
+          <a:off x="0" y="0"/>
+          <a:ext cx="0" cy="0"/>
+          <a:chOff x="0" y="0"/>
+          <a:chExt cx="0" cy="0"/>
+        </a:xfrm>
+      </p:grpSpPr>
+      <p:sp>
+        <p:nvSpPr>
+          <p:cNvPr id="2" name="Rectangle 1"/>
+          <p:cNvSpPr/>
+          <p:nvPr/>
+        </p:nvSpPr>
+        <p:spPr>
+          <a:xfrm>
+            <a:off x="0" y="0"/>
+            <a:ext cx="12191695" cy="6858000"/>
+          </a:xfrm>
+          <a:prstGeom prst="rect">
+            <a:avLst/>
+          </a:prstGeom>
+          <a:solidFill>
+            <a:srgbClr val="FFFFFF"/>
+          </a:solidFill>
+          <a:ln>
+            <a:noFill/>
+          </a:ln>
+        </p:spPr>
+        <p:txBody>
+          <a:bodyPr/>
+          <a:lstStyle/>
+          <a:p>
+            <a:endParaRPr/>
+          </a:p>
+        </p:txBody>
+      </p:sp>
+      <p:sp>
+        <p:nvSpPr>
+          <p:cNvPr id="3" name="TextBox 2"/>
+          <p:cNvSpPr txBox="1"/>
+          <p:nvPr/>
+        </p:nvSpPr>
+        <p:spPr>
+          <a:xfrm>
+            <a:off x="822960" y="502920"/>
+            <a:ext cx="10515600" cy="822960"/>
+          </a:xfrm>
+          <a:prstGeom prst="rect">
+            <a:avLst/>
+          </a:prstGeom>
+          <a:noFill/>
+        </p:spPr>
+        <p:txBody>
+          <a:bodyPr wrap="square">
+            <a:spAutoFit/>
+          </a:bodyPr>
+          <a:lstStyle/>
+          <a:p>
+            <a:pPr algn="l">
+              <a:spcAft>
+                <a:spcPts val="600"/>
+              </a:spcAft>
+            </a:pPr>
+            <a:r>
+              <a:rPr sz="2800" b="1" i="0">
+                <a:solidFill>
+                  <a:srgbClr val="2C5F2D"/>
+                </a:solidFill>
+                <a:latin typeface="Cambria"/>
+              </a:rPr>
+              <a:t>The Final Rep — the Container Closed</a:t>
+            </a:r>
+          </a:p>
+        </p:txBody>
+      </p:sp>
+      <p:sp>
+        <p:nvSpPr>
+          <p:cNvPr id="4" name="TextBox 4"/>
+          <p:cNvSpPr txBox="1"/>
+          <p:nvPr/>
+        </p:nvSpPr>
+        <p:spPr>
+          <a:xfrm>
+            <a:off x="822960" y="1554480"/>
+            <a:ext cx="10515600" cy="4892040"/>
+          </a:xfrm>
+          <a:prstGeom prst="rect">
+            <a:avLst/>
+          </a:prstGeom>
+          <a:noFill/>
+        </p:spPr>
+        <p:txBody>
+          <a:bodyPr wrap="square" lIns="91440" tIns="91440" rIns="91440" bIns="91440"/>
+          <a:lstStyle/>
+          <a:p>
+            <a:pPr marL="274320" indent="-274320">
+              <a:spcAft>
+                <a:spcPts val="900"/>
+              </a:spcAft>
+            </a:pPr>
+            <a:r>
+              <a:rPr sz="2800" b="1" i="0">
+                <a:solidFill>
+                  <a:srgbClr val="97BC62"/>
+                </a:solidFill>
+                <a:latin typeface="Calibri"/>
+              </a:rPr>
+              <a:t>•  </a:t>
+            </a:r>
+            <a:r>
+              <a:rPr sz="2800" b="0" i="0">
+                <a:solidFill>
+                  <a:srgbClr val="222B22"/>
+                </a:solidFill>
+                <a:latin typeface="Calibri"/>
+              </a:rPr>
+              <a:t>The reserved senior closes the container from memory — the standing circle, the one-word landing, the one thing, the one practice, the blessing round, the closing prayer and sending</a:t>
+            </a:r>
+          </a:p>
+          <a:p>
+            <a:pPr marL="274320" indent="-274320">
+              <a:spcAft>
+                <a:spcPts val="900"/>
+              </a:spcAft>
+            </a:pPr>
+            <a:r>
+              <a:rPr sz="2800" b="1" i="0">
+                <a:solidFill>
+                  <a:srgbClr val="97BC62"/>
+                </a:solidFill>
+                <a:latin typeface="Calibri"/>
+              </a:rPr>
+              <a:t>•  </a:t>
+            </a:r>
+            <a:r>
+              <a:rPr sz="2800" b="0" i="0">
+                <a:solidFill>
+                  <a:srgbClr val="222B22"/>
+                </a:solidFill>
+                <a:latin typeface="Calibri"/>
+              </a:rPr>
+              <a:t>The rite that opened in a senior’s voice ends in a senior’s voice — the last words of Getting Started are spoken by the generation it raised</a:t>
+            </a:r>
+          </a:p>
+          <a:p>
+            <a:pPr marL="274320" indent="-274320">
+              <a:spcAft>
+                <a:spcPts val="900"/>
+              </a:spcAft>
+            </a:pPr>
+            <a:r>
+              <a:rPr sz="2800" b="1" i="0">
+                <a:solidFill>
+                  <a:srgbClr val="97BC62"/>
+                </a:solidFill>
+                <a:latin typeface="Calibri"/>
+              </a:rPr>
+              <a:t>•  </a:t>
+            </a:r>
+            <a:r>
+              <a:rPr sz="2800" b="0" i="0">
+                <a:solidFill>
+                  <a:srgbClr val="222B22"/>
+                </a:solidFill>
+                <a:latin typeface="Calibri"/>
+              </a:rPr>
+              <a:t>If the senior sends the room, the room is sent — nothing is added after</a:t>
+            </a:r>
+          </a:p>
+          <a:p>
+            <a:pPr marL="274320" indent="-274320">
+              <a:spcAft>
+                <a:spcPts val="900"/>
+              </a:spcAft>
+            </a:pPr>
+            <a:r>
+              <a:rPr sz="2800" b="1" i="0">
+                <a:solidFill>
+                  <a:srgbClr val="97BC62"/>
+                </a:solidFill>
+                <a:latin typeface="Calibri"/>
+              </a:rPr>
+              <a:t>•  </a:t>
+            </a:r>
+            <a:r>
+              <a:rPr sz="2800" b="0" i="0">
+                <a:solidFill>
+                  <a:srgbClr val="222B22"/>
+                </a:solidFill>
+                <a:latin typeface="Calibri"/>
+              </a:rPr>
+              <a:t>After: the signing — everyone signs each new FC1’s keepsake, the way you sign a Bible flyleaf. Then dessert. Stay.</a:t>
+            </a:r>
+          </a:p>
+        </p:txBody>
+      </p:sp>
+      <p:sp>
+        <p:nvSpPr>
+          <p:cNvPr id="90" name="SlideNum"/>
+          <p:cNvSpPr txBox="1"/>
+          <p:nvPr/>
+        </p:nvSpPr>
+        <p:spPr>
+          <a:xfrm>
+            <a:off x="11384280" y="6446520"/>
+            <a:ext cx="640080" cy="292608"/>
+          </a:xfrm>
+          <a:prstGeom prst="rect">
+            <a:avLst/>
+          </a:prstGeom>
+          <a:noFill/>
+        </p:spPr>
+        <p:txBody>
+          <a:bodyPr wrap="none" lIns="0" tIns="0" rIns="45720" bIns="0" anchor="ctr"/>
+          <a:lstStyle/>
+          <a:p>
+            <a:pPr algn="r"/>
+            <a:r>
+              <a:t>277</a:t>
+            </a:r>
+            <a:endParaRPr sz="1000" b="1">
+              <a:solidFill>
+                <a:srgbClr val="7A8A6E"/>
+              </a:solidFill>
+              <a:latin typeface="Calibri"/>
+            </a:endParaRPr>
+          </a:p>
+        </p:txBody>
+      </p:sp>
+    </p:spTree>
+  </p:cSld>
+  <p:clrMapOvr>
+    <a:masterClrMapping/>
+  </p:clrMapOvr>
+</p:sld>
+</file>
+
+<file path=ppt/slides/slide14.xml><?xml version="1.0" encoding="utf-8"?>
+<p:sld xmlns:a="http://schemas.openxmlformats.org/drawingml/2006/main" xmlns:p="http://schemas.openxmlformats.org/presentationml/2006/main" xmlns:r="http://schemas.openxmlformats.org/officeDocument/2006/relationships">
+  <p:cSld>
+    <p:spTree>
+      <p:nvGrpSpPr>
+        <p:cNvPr id="1" name=""/>
+        <p:cNvGrpSpPr/>
+        <p:nvPr/>
+      </p:nvGrpSpPr>
+      <p:grpSpPr/>
+      <p:sp>
+        <p:nvSpPr>
+          <p:cNvPr id="2" name="Rectangle 1"/>
+          <p:cNvSpPr/>
+          <p:nvPr/>
+        </p:nvSpPr>
+        <p:spPr>
+          <a:xfrm>
+            <a:off x="0" y="0"/>
+            <a:ext cx="12192000" cy="6858000"/>
+          </a:xfrm>
+          <a:prstGeom prst="rect">
+            <a:avLst/>
+          </a:prstGeom>
+          <a:solidFill>
+            <a:srgbClr val="FFFFFF"/>
+          </a:solidFill>
+          <a:ln>
+            <a:noFill/>
+          </a:ln>
+          <a:effectLst/>
+        </p:spPr>
+        <p:style>
+          <a:lnRef idx="1">
+            <a:schemeClr val="accent1"/>
+          </a:lnRef>
+          <a:fillRef idx="3">
+            <a:schemeClr val="accent1"/>
+          </a:fillRef>
+          <a:effectRef idx="2">
+            <a:schemeClr val="accent1"/>
+          </a:effectRef>
+          <a:fontRef idx="minor">
+            <a:schemeClr val="lt1"/>
+          </a:fontRef>
+        </p:style>
+        <p:txBody>
+          <a:bodyPr rtlCol="0" anchor="ctr"/>
+          <a:lstStyle/>
+          <a:p>
+            <a:pPr algn="ctr"/>
+          </a:p>
+        </p:txBody>
+      </p:sp>
+      <p:sp>
+        <p:nvSpPr>
+          <p:cNvPr id="3" name="TextBox 2"/>
+          <p:cNvSpPr txBox="1"/>
+          <p:nvPr/>
+        </p:nvSpPr>
+        <p:spPr>
+          <a:xfrm>
+            <a:off x="822960" y="502920"/>
+            <a:ext cx="10515600" cy="822960"/>
+          </a:xfrm>
+          <a:prstGeom prst="rect">
+            <a:avLst/>
+          </a:prstGeom>
+          <a:noFill/>
+        </p:spPr>
+        <p:txBody>
+          <a:bodyPr wrap="square">
+            <a:spAutoFit/>
+          </a:bodyPr>
+          <a:lstStyle/>
+          <a:p>
+            <a:r>
+              <a:rPr sz="2800" b="1">
+                <a:solidFill>
+                  <a:srgbClr val="2C5F2D"/>
+                </a:solidFill>
+                <a:latin typeface="Cambria"/>
+              </a:rPr>
+              <a:t>Where We Are — the Four Connects</a:t>
+            </a:r>
+          </a:p>
+        </p:txBody>
+      </p:sp>
+      <p:pic>
+        <p:nvPicPr>
+          <p:cNvPr id="4" name="Picture 3" descr="four-connects.png"/>
+          <p:cNvPicPr>
+            <a:picLocks noChangeAspect="1"/>
+          </p:cNvPicPr>
+          <p:nvPr/>
+        </p:nvPicPr>
+        <p:blipFill>
+          <a:blip r:embed="rId2"/>
+          <a:stretch>
+            <a:fillRect/>
+          </a:stretch>
+        </p:blipFill>
+        <p:spPr>
+          <a:xfrm>
+            <a:off x="932688" y="1645920"/>
+            <a:ext cx="10332720" cy="3708663"/>
+          </a:xfrm>
+          <a:prstGeom prst="rect">
+            <a:avLst/>
+          </a:prstGeom>
+        </p:spPr>
+      </p:pic>
+      <p:sp>
+        <p:nvSpPr>
+          <p:cNvPr id="5" name="TextBox 4"/>
+          <p:cNvSpPr txBox="1"/>
+          <p:nvPr/>
+        </p:nvSpPr>
+        <p:spPr>
+          <a:xfrm>
+            <a:off x="822960" y="5623560"/>
+            <a:ext cx="10515600" cy="914400"/>
+          </a:xfrm>
+          <a:prstGeom prst="rect">
+            <a:avLst/>
+          </a:prstGeom>
+          <a:noFill/>
+        </p:spPr>
+        <p:txBody>
+          <a:bodyPr wrap="square">
+            <a:spAutoFit/>
+          </a:bodyPr>
+          <a:lstStyle/>
+          <a:p>
+            <a:r>
+              <a:rPr sz="1800" b="0">
+                <a:solidFill>
+                  <a:srgbClr val="222B22"/>
+                </a:solidFill>
+                <a:latin typeface="Calibri"/>
+              </a:rPr>
+              <a:t>Session 22 commissions what the map has built — </a:t>
+            </a:r>
+            <a:r>
+              <a:rPr sz="1800" b="1">
+                <a:solidFill>
+                  <a:srgbClr val="2C5F2D"/>
+                </a:solidFill>
+                <a:latin typeface="Calibri"/>
+              </a:rPr>
+              <a:t>all four Connects</a:t>
+            </a:r>
+            <a:r>
+              <a:rPr sz="1800" b="0">
+                <a:solidFill>
+                  <a:srgbClr val="222B22"/>
+                </a:solidFill>
+                <a:latin typeface="Calibri"/>
+              </a:rPr>
+              <a:t>, carried by the Companions. Each connection makes the next one real (Matt. 22:37–40).</a:t>
+            </a:r>
+          </a:p>
+        </p:txBody>
+      </p:sp>
+      <p:sp>
+        <p:nvSpPr>
+          <p:cNvPr id="90" name="SlideNum"/>
+          <p:cNvSpPr txBox="1"/>
+          <p:nvPr/>
+        </p:nvSpPr>
+        <p:spPr>
+          <a:xfrm>
+            <a:off x="11384280" y="6446520"/>
+            <a:ext cx="640080" cy="292608"/>
+          </a:xfrm>
+          <a:prstGeom prst="rect">
+            <a:avLst/>
+          </a:prstGeom>
+          <a:noFill/>
+        </p:spPr>
+        <p:txBody>
+          <a:bodyPr wrap="none" lIns="0" tIns="0" rIns="45720" bIns="0" anchor="ctr"/>
+          <a:lstStyle/>
+          <a:p>
+            <a:pPr algn="r"/>
+            <a:r>
+              <a:t>266a</a:t>
+            </a:r>
+            <a:endParaRPr sz="1000" b="1">
+              <a:solidFill>
+                <a:srgbClr val="7A8A6E"/>
+              </a:solidFill>
+              <a:latin typeface="Calibri"/>
+            </a:endParaRPr>
+          </a:p>
+        </p:txBody>
+      </p:sp>
+    </p:spTree>
+  </p:cSld>
+  <p:clrMapOvr>
+    <a:masterClrMapping/>
+  </p:clrMapOvr>
+</p:sld>
+</file>
+
+<file path=ppt/slides/slide15.xml><?xml version="1.0" encoding="utf-8"?>
+<p:sld xmlns:a="http://schemas.openxmlformats.org/drawingml/2006/main" xmlns:p="http://schemas.openxmlformats.org/presentationml/2006/main" xmlns:r="http://schemas.openxmlformats.org/officeDocument/2006/relationships">
+  <p:cSld>
+    <p:spTree>
+      <p:nvGrpSpPr>
+        <p:cNvPr id="1" name=""/>
+        <p:cNvGrpSpPr/>
+        <p:nvPr/>
+      </p:nvGrpSpPr>
+      <p:grpSpPr/>
+      <p:sp>
+        <p:nvSpPr>
+          <p:cNvPr id="2" name="Rectangle 1"/>
+          <p:cNvSpPr/>
+          <p:nvPr/>
+        </p:nvSpPr>
+        <p:spPr>
+          <a:xfrm>
+            <a:off x="0" y="0"/>
+            <a:ext cx="12192000" cy="6858000"/>
+          </a:xfrm>
+          <a:prstGeom prst="rect">
+            <a:avLst/>
+          </a:prstGeom>
+          <a:solidFill>
+            <a:srgbClr val="FFFFFF"/>
+          </a:solidFill>
+          <a:ln>
+            <a:noFill/>
+          </a:ln>
+          <a:effectLst/>
+        </p:spPr>
+        <p:style>
+          <a:lnRef idx="1">
+            <a:schemeClr val="accent1"/>
+          </a:lnRef>
+          <a:fillRef idx="3">
+            <a:schemeClr val="accent1"/>
+          </a:fillRef>
+          <a:effectRef idx="2">
+            <a:schemeClr val="accent1"/>
+          </a:effectRef>
+          <a:fontRef idx="minor">
+            <a:schemeClr val="lt1"/>
+          </a:fontRef>
+        </p:style>
+        <p:txBody>
+          <a:bodyPr rtlCol="0" anchor="ctr"/>
+          <a:lstStyle/>
+          <a:p>
+            <a:pPr algn="ctr"/>
+          </a:p>
+        </p:txBody>
+      </p:sp>
+      <p:sp>
+        <p:nvSpPr>
+          <p:cNvPr id="3" name="TextBox 2"/>
+          <p:cNvSpPr txBox="1"/>
+          <p:nvPr/>
+        </p:nvSpPr>
+        <p:spPr>
+          <a:xfrm>
+            <a:off x="822960" y="502920"/>
+            <a:ext cx="10515600" cy="822960"/>
+          </a:xfrm>
+          <a:prstGeom prst="rect">
+            <a:avLst/>
+          </a:prstGeom>
+          <a:noFill/>
+        </p:spPr>
+        <p:txBody>
+          <a:bodyPr wrap="square">
+            <a:spAutoFit/>
+          </a:bodyPr>
+          <a:lstStyle/>
+          <a:p>
+            <a:r>
+              <a:rPr sz="2800" b="1">
+                <a:solidFill>
+                  <a:srgbClr val="2C5F2D"/>
+                </a:solidFill>
+                <a:latin typeface="Cambria"/>
+              </a:rPr>
+              <a:t>The Take-Home Sheet — the Daily Rhythm</a:t>
+            </a:r>
+          </a:p>
+        </p:txBody>
+      </p:sp>
+      <p:pic>
+        <p:nvPicPr>
+          <p:cNvPr id="4" name="Picture 3" descr="s22_part1.png"/>
+          <p:cNvPicPr>
+            <a:picLocks noChangeAspect="1"/>
+          </p:cNvPicPr>
+          <p:nvPr/>
+        </p:nvPicPr>
+        <p:blipFill>
+          <a:blip r:embed="rId2"/>
+          <a:stretch>
+            <a:fillRect/>
+          </a:stretch>
+        </p:blipFill>
+        <p:spPr>
+          <a:xfrm>
+            <a:off x="1798167" y="1463040"/>
+            <a:ext cx="8595360" cy="4457308"/>
+          </a:xfrm>
+          <a:prstGeom prst="rect">
+            <a:avLst/>
+          </a:prstGeom>
+          <a:ln w="12700">
+            <a:solidFill>
+              <a:srgbClr val="C8C8C8"/>
+            </a:solidFill>
+          </a:ln>
+        </p:spPr>
+      </p:pic>
+      <p:sp>
+        <p:nvSpPr>
+          <p:cNvPr id="5" name="TextBox 4"/>
+          <p:cNvSpPr txBox="1"/>
+          <p:nvPr/>
+        </p:nvSpPr>
+        <p:spPr>
+          <a:xfrm>
+            <a:off x="822960" y="6355080"/>
+            <a:ext cx="10515600" cy="411480"/>
+          </a:xfrm>
+          <a:prstGeom prst="rect">
+            <a:avLst/>
+          </a:prstGeom>
+          <a:noFill/>
+        </p:spPr>
+        <p:txBody>
+          <a:bodyPr wrap="square">
+            <a:spAutoFit/>
+          </a:bodyPr>
+          <a:lstStyle/>
+          <a:p>
+            <a:r>
+              <a:rPr sz="1400" i="1">
+                <a:solidFill>
+                  <a:srgbClr val="595959"/>
+                </a:solidFill>
+                <a:latin typeface="Calibri"/>
+              </a:rPr>
+              <a:t>Handed out now — this is the sheet in your hands.</a:t>
+            </a:r>
+          </a:p>
+        </p:txBody>
+      </p:sp>
+      <p:sp>
+        <p:nvSpPr>
+          <p:cNvPr id="90" name="SlideNum"/>
+          <p:cNvSpPr txBox="1"/>
+          <p:nvPr/>
+        </p:nvSpPr>
+        <p:spPr>
+          <a:xfrm>
+            <a:off x="11384280" y="6446520"/>
+            <a:ext cx="640080" cy="292608"/>
+          </a:xfrm>
+          <a:prstGeom prst="rect">
+            <a:avLst/>
+          </a:prstGeom>
+          <a:noFill/>
+        </p:spPr>
+        <p:txBody>
+          <a:bodyPr wrap="none" lIns="0" tIns="0" rIns="45720" bIns="0" anchor="ctr"/>
+          <a:lstStyle/>
+          <a:p>
+            <a:pPr algn="r"/>
+            <a:r>
+              <a:t>275</a:t>
+            </a:r>
+            <a:endParaRPr sz="1000" b="1">
+              <a:solidFill>
+                <a:srgbClr val="7A8A6E"/>
+              </a:solidFill>
+              <a:latin typeface="Calibri"/>
+            </a:endParaRPr>
+          </a:p>
+        </p:txBody>
+      </p:sp>
+    </p:spTree>
+  </p:cSld>
+  <p:clrMapOvr>
+    <a:masterClrMapping/>
+  </p:clrMapOvr>
+</p:sld>
+</file>
+
+<file path=ppt/slides/slide16.xml><?xml version="1.0" encoding="utf-8"?>
+<p:sld xmlns:a="http://schemas.openxmlformats.org/drawingml/2006/main" xmlns:p="http://schemas.openxmlformats.org/presentationml/2006/main" xmlns:r="http://schemas.openxmlformats.org/officeDocument/2006/relationships">
+  <p:cSld>
+    <p:spTree>
+      <p:nvGrpSpPr>
+        <p:cNvPr id="1" name=""/>
+        <p:cNvGrpSpPr/>
+        <p:nvPr/>
+      </p:nvGrpSpPr>
+      <p:grpSpPr/>
+      <p:sp>
+        <p:nvSpPr>
+          <p:cNvPr id="2" name="Rectangle 1"/>
+          <p:cNvSpPr/>
+          <p:nvPr/>
+        </p:nvSpPr>
+        <p:spPr>
+          <a:xfrm>
+            <a:off x="0" y="0"/>
+            <a:ext cx="12192000" cy="6858000"/>
+          </a:xfrm>
+          <a:prstGeom prst="rect">
+            <a:avLst/>
+          </a:prstGeom>
+          <a:solidFill>
+            <a:srgbClr val="FFFFFF"/>
+          </a:solidFill>
+          <a:ln>
+            <a:noFill/>
+          </a:ln>
+          <a:effectLst/>
+        </p:spPr>
+        <p:style>
+          <a:lnRef idx="1">
+            <a:schemeClr val="accent1"/>
+          </a:lnRef>
+          <a:fillRef idx="3">
+            <a:schemeClr val="accent1"/>
+          </a:fillRef>
+          <a:effectRef idx="2">
+            <a:schemeClr val="accent1"/>
+          </a:effectRef>
+          <a:fontRef idx="minor">
+            <a:schemeClr val="lt1"/>
+          </a:fontRef>
+        </p:style>
+        <p:txBody>
+          <a:bodyPr rtlCol="0" anchor="ctr"/>
+          <a:lstStyle/>
+          <a:p>
+            <a:pPr algn="ctr"/>
+          </a:p>
+        </p:txBody>
+      </p:sp>
+      <p:sp>
+        <p:nvSpPr>
+          <p:cNvPr id="3" name="TextBox 2"/>
+          <p:cNvSpPr txBox="1"/>
+          <p:nvPr/>
+        </p:nvSpPr>
+        <p:spPr>
+          <a:xfrm>
+            <a:off x="822960" y="502920"/>
+            <a:ext cx="10515600" cy="822960"/>
+          </a:xfrm>
+          <a:prstGeom prst="rect">
+            <a:avLst/>
+          </a:prstGeom>
+          <a:noFill/>
+        </p:spPr>
+        <p:txBody>
+          <a:bodyPr wrap="square">
+            <a:spAutoFit/>
+          </a:bodyPr>
+          <a:lstStyle/>
+          <a:p>
+            <a:r>
+              <a:rPr sz="2800" b="1">
+                <a:solidFill>
+                  <a:srgbClr val="2C5F2D"/>
+                </a:solidFill>
+                <a:latin typeface="Cambria"/>
+              </a:rPr>
+              <a:t>The Take-Home Sheet — the Four Parts</a:t>
+            </a:r>
+          </a:p>
+        </p:txBody>
+      </p:sp>
+      <p:pic>
+        <p:nvPicPr>
+          <p:cNvPr id="4" name="Picture 3" descr="s22_part2.png"/>
+          <p:cNvPicPr>
+            <a:picLocks noChangeAspect="1"/>
+          </p:cNvPicPr>
+          <p:nvPr/>
+        </p:nvPicPr>
+        <p:blipFill>
+          <a:blip r:embed="rId2"/>
+          <a:stretch>
+            <a:fillRect/>
+          </a:stretch>
+        </p:blipFill>
+        <p:spPr>
+          <a:xfrm>
+            <a:off x="2262810" y="1463040"/>
+            <a:ext cx="7666074" cy="4709160"/>
+          </a:xfrm>
+          <a:prstGeom prst="rect">
+            <a:avLst/>
+          </a:prstGeom>
+          <a:ln w="12700">
+            <a:solidFill>
+              <a:srgbClr val="C8C8C8"/>
+            </a:solidFill>
+          </a:ln>
+        </p:spPr>
+      </p:pic>
+      <p:sp>
+        <p:nvSpPr>
+          <p:cNvPr id="5" name="TextBox 4"/>
+          <p:cNvSpPr txBox="1"/>
+          <p:nvPr/>
+        </p:nvSpPr>
+        <p:spPr>
+          <a:xfrm>
+            <a:off x="822960" y="6355080"/>
+            <a:ext cx="10515600" cy="411480"/>
+          </a:xfrm>
+          <a:prstGeom prst="rect">
+            <a:avLst/>
+          </a:prstGeom>
+          <a:noFill/>
+        </p:spPr>
+        <p:txBody>
+          <a:bodyPr wrap="square">
+            <a:spAutoFit/>
+          </a:bodyPr>
+          <a:lstStyle/>
+          <a:p>
+            <a:r>
+              <a:rPr sz="1400" i="1">
+                <a:solidFill>
+                  <a:srgbClr val="595959"/>
+                </a:solidFill>
+                <a:latin typeface="Calibri"/>
+              </a:rPr>
+              <a:t>One practice at a time — and a partner expecting you at the end of week one.</a:t>
+            </a:r>
+          </a:p>
+        </p:txBody>
+      </p:sp>
+      <p:sp>
+        <p:nvSpPr>
+          <p:cNvPr id="90" name="SlideNum"/>
+          <p:cNvSpPr txBox="1"/>
+          <p:nvPr/>
+        </p:nvSpPr>
+        <p:spPr>
+          <a:xfrm>
+            <a:off x="11384280" y="6446520"/>
+            <a:ext cx="640080" cy="292608"/>
+          </a:xfrm>
+          <a:prstGeom prst="rect">
+            <a:avLst/>
+          </a:prstGeom>
+          <a:noFill/>
+        </p:spPr>
+        <p:txBody>
+          <a:bodyPr wrap="none" lIns="0" tIns="0" rIns="45720" bIns="0" anchor="ctr"/>
+          <a:lstStyle/>
+          <a:p>
+            <a:pPr algn="r"/>
+            <a:r>
+              <a:t>275a</a:t>
+            </a:r>
+            <a:endParaRPr sz="1000" b="1">
+              <a:solidFill>
+                <a:srgbClr val="7A8A6E"/>
+              </a:solidFill>
+              <a:latin typeface="Calibri"/>
+            </a:endParaRPr>
+          </a:p>
+        </p:txBody>
+      </p:sp>
+    </p:spTree>
+  </p:cSld>
+  <p:clrMapOvr>
+    <a:masterClrMapping/>
+  </p:clrMapOvr>
+</p:sld>
+</file>
+
+<file path=ppt/slides/slide2.xml><?xml version="1.0" encoding="utf-8"?>
 <p:sld xmlns:a="http://schemas.openxmlformats.org/drawingml/2006/main" xmlns:r="http://schemas.openxmlformats.org/officeDocument/2006/relationships" xmlns:p="http://schemas.openxmlformats.org/presentationml/2006/main">
   <p:cSld>
     <p:spTree>
@@ -5104,7 +6658,7 @@
 </p:sld>
 </file>
 
-<file path=ppt/slides/slide267.xml><?xml version="1.0" encoding="utf-8"?>
+<file path=ppt/slides/slide3.xml><?xml version="1.0" encoding="utf-8"?>
 <p:sld xmlns:a="http://schemas.openxmlformats.org/drawingml/2006/main" xmlns:r="http://schemas.openxmlformats.org/officeDocument/2006/relationships" xmlns:p="http://schemas.openxmlformats.org/presentationml/2006/main">
   <p:cSld>
     <p:spTree>
@@ -5530,7 +7084,7 @@
 </p:sld>
 </file>
 
-<file path=ppt/slides/slide268.xml><?xml version="1.0" encoding="utf-8"?>
+<file path=ppt/slides/slide4.xml><?xml version="1.0" encoding="utf-8"?>
 <p:sld xmlns:a="http://schemas.openxmlformats.org/drawingml/2006/main" xmlns:r="http://schemas.openxmlformats.org/officeDocument/2006/relationships" xmlns:p="http://schemas.openxmlformats.org/presentationml/2006/main">
   <p:cSld>
     <p:spTree>
@@ -5863,7 +7417,7 @@
 </p:sld>
 </file>
 
-<file path=ppt/slides/slide269.xml><?xml version="1.0" encoding="utf-8"?>
+<file path=ppt/slides/slide5.xml><?xml version="1.0" encoding="utf-8"?>
 <p:sld xmlns:a="http://schemas.openxmlformats.org/drawingml/2006/main" xmlns:r="http://schemas.openxmlformats.org/officeDocument/2006/relationships" xmlns:p="http://schemas.openxmlformats.org/presentationml/2006/main">
   <p:cSld>
     <p:spTree>
@@ -6160,7 +7714,7 @@
 </p:sld>
 </file>
 
-<file path=ppt/slides/slide270.xml><?xml version="1.0" encoding="utf-8"?>
+<file path=ppt/slides/slide6.xml><?xml version="1.0" encoding="utf-8"?>
 <p:sld xmlns:a="http://schemas.openxmlformats.org/drawingml/2006/main" xmlns:r="http://schemas.openxmlformats.org/officeDocument/2006/relationships" xmlns:p="http://schemas.openxmlformats.org/presentationml/2006/main">
   <p:cSld>
     <p:spTree>
@@ -6462,7 +8016,7 @@
 </p:sld>
 </file>
 
-<file path=ppt/slides/slide271.xml><?xml version="1.0" encoding="utf-8"?>
+<file path=ppt/slides/slide7.xml><?xml version="1.0" encoding="utf-8"?>
 <p:sld xmlns:a="http://schemas.openxmlformats.org/drawingml/2006/main" xmlns:r="http://schemas.openxmlformats.org/officeDocument/2006/relationships" xmlns:p="http://schemas.openxmlformats.org/presentationml/2006/main">
   <p:cSld>
     <p:spTree>
@@ -6734,7 +8288,7 @@
 </p:sld>
 </file>
 
-<file path=ppt/slides/slide272.xml><?xml version="1.0" encoding="utf-8"?>
+<file path=ppt/slides/slide8.xml><?xml version="1.0" encoding="utf-8"?>
 <p:sld xmlns:a="http://schemas.openxmlformats.org/drawingml/2006/main" xmlns:r="http://schemas.openxmlformats.org/officeDocument/2006/relationships" xmlns:p="http://schemas.openxmlformats.org/presentationml/2006/main">
   <p:cSld>
     <p:spTree>
@@ -7006,7 +8560,7 @@
 </p:sld>
 </file>
 
-<file path=ppt/slides/slide273.xml><?xml version="1.0" encoding="utf-8"?>
+<file path=ppt/slides/slide9.xml><?xml version="1.0" encoding="utf-8"?>
 <p:sld xmlns:a="http://schemas.openxmlformats.org/drawingml/2006/main" xmlns:r="http://schemas.openxmlformats.org/officeDocument/2006/relationships" xmlns:p="http://schemas.openxmlformats.org/presentationml/2006/main">
   <p:cSld>
     <p:spTree>
@@ -7285,1028 +8839,6 @@
             <a:pPr algn="r"/>
             <a:r>
               <a:t>273</a:t>
-            </a:r>
-            <a:endParaRPr sz="1000" b="1">
-              <a:solidFill>
-                <a:srgbClr val="7A8A6E"/>
-              </a:solidFill>
-              <a:latin typeface="Calibri"/>
-            </a:endParaRPr>
-          </a:p>
-        </p:txBody>
-      </p:sp>
-    </p:spTree>
-  </p:cSld>
-  <p:clrMapOvr>
-    <a:masterClrMapping/>
-  </p:clrMapOvr>
-</p:sld>
-</file>
-
-<file path=ppt/slides/slide274.xml><?xml version="1.0" encoding="utf-8"?>
-<p:sld xmlns:a="http://schemas.openxmlformats.org/drawingml/2006/main" xmlns:r="http://schemas.openxmlformats.org/officeDocument/2006/relationships" xmlns:p="http://schemas.openxmlformats.org/presentationml/2006/main">
-  <p:cSld>
-    <p:spTree>
-      <p:nvGrpSpPr>
-        <p:cNvPr id="1" name=""/>
-        <p:cNvGrpSpPr/>
-        <p:nvPr/>
-      </p:nvGrpSpPr>
-      <p:grpSpPr>
-        <a:xfrm>
-          <a:off x="0" y="0"/>
-          <a:ext cx="0" cy="0"/>
-          <a:chOff x="0" y="0"/>
-          <a:chExt cx="0" cy="0"/>
-        </a:xfrm>
-      </p:grpSpPr>
-      <p:sp>
-        <p:nvSpPr>
-          <p:cNvPr id="2" name="Rectangle 1"/>
-          <p:cNvSpPr/>
-          <p:nvPr/>
-        </p:nvSpPr>
-        <p:spPr>
-          <a:xfrm>
-            <a:off x="0" y="0"/>
-            <a:ext cx="12191695" cy="6858000"/>
-          </a:xfrm>
-          <a:prstGeom prst="rect">
-            <a:avLst/>
-          </a:prstGeom>
-          <a:solidFill>
-            <a:srgbClr val="FFFFFF"/>
-          </a:solidFill>
-          <a:ln>
-            <a:noFill/>
-          </a:ln>
-        </p:spPr>
-        <p:txBody>
-          <a:bodyPr/>
-          <a:lstStyle/>
-          <a:p>
-            <a:endParaRPr/>
-          </a:p>
-        </p:txBody>
-      </p:sp>
-      <p:sp>
-        <p:nvSpPr>
-          <p:cNvPr id="3" name="TextBox 2"/>
-          <p:cNvSpPr txBox="1"/>
-          <p:nvPr/>
-        </p:nvSpPr>
-        <p:spPr>
-          <a:xfrm>
-            <a:off x="822960" y="502920"/>
-            <a:ext cx="10515600" cy="822960"/>
-          </a:xfrm>
-          <a:prstGeom prst="rect">
-            <a:avLst/>
-          </a:prstGeom>
-          <a:noFill/>
-        </p:spPr>
-        <p:txBody>
-          <a:bodyPr wrap="square">
-            <a:spAutoFit/>
-          </a:bodyPr>
-          <a:lstStyle/>
-          <a:p>
-            <a:pPr algn="l">
-              <a:spcAft>
-                <a:spcPts val="600"/>
-              </a:spcAft>
-            </a:pPr>
-            <a:r>
-              <a:rPr sz="2800" b="1" i="0">
-                <a:solidFill>
-                  <a:srgbClr val="2C5F2D"/>
-                </a:solidFill>
-                <a:latin typeface="Cambria"/>
-              </a:rPr>
-              <a:t>The First Lab Scheduled</a:t>
-            </a:r>
-          </a:p>
-        </p:txBody>
-      </p:sp>
-      <p:sp>
-        <p:nvSpPr>
-          <p:cNvPr id="4" name="TextBox 4"/>
-          <p:cNvSpPr txBox="1"/>
-          <p:nvPr/>
-        </p:nvSpPr>
-        <p:spPr>
-          <a:xfrm>
-            <a:off x="822960" y="1554480"/>
-            <a:ext cx="10515600" cy="4892040"/>
-          </a:xfrm>
-          <a:prstGeom prst="rect">
-            <a:avLst/>
-          </a:prstGeom>
-          <a:noFill/>
-        </p:spPr>
-        <p:txBody>
-          <a:bodyPr wrap="square" lIns="91440" tIns="91440" rIns="91440" bIns="91440"/>
-          <a:lstStyle/>
-          <a:p>
-            <a:pPr marL="274320" indent="-274320">
-              <a:spcAft>
-                <a:spcPts val="900"/>
-              </a:spcAft>
-            </a:pPr>
-            <a:r>
-              <a:rPr sz="2800" b="1" i="0">
-                <a:solidFill>
-                  <a:srgbClr val="97BC62"/>
-                </a:solidFill>
-                <a:latin typeface="Calibri"/>
-              </a:rPr>
-              <a:t>•  </a:t>
-            </a:r>
-            <a:r>
-              <a:rPr sz="2800" b="0" i="0">
-                <a:solidFill>
-                  <a:srgbClr val="222B22"/>
-                </a:solidFill>
-                <a:latin typeface="Calibri"/>
-              </a:rPr>
-              <a:t>Before anyone reaches for a coat — one piece of business, on purpose, in front of everyone</a:t>
-            </a:r>
-          </a:p>
-          <a:p>
-            <a:pPr marL="274320" indent="-274320">
-              <a:spcAft>
-                <a:spcPts val="900"/>
-              </a:spcAft>
-            </a:pPr>
-            <a:r>
-              <a:rPr sz="2800" b="1" i="0">
-                <a:solidFill>
-                  <a:srgbClr val="97BC62"/>
-                </a:solidFill>
-                <a:latin typeface="Calibri"/>
-              </a:rPr>
-              <a:t>•  </a:t>
-            </a:r>
-            <a:r>
-              <a:rPr sz="2800" b="0" i="0">
-                <a:solidFill>
-                  <a:srgbClr val="222B22"/>
-                </a:solidFill>
-                <a:latin typeface="Calibri"/>
-              </a:rPr>
-              <a:t>The first Leader Lab of the spring serving cycle: [day], [date], [time], [place]. Write it down now.</a:t>
-            </a:r>
-          </a:p>
-          <a:p>
-            <a:pPr marL="274320" indent="-274320">
-              <a:spcAft>
-                <a:spcPts val="900"/>
-              </a:spcAft>
-            </a:pPr>
-            <a:r>
-              <a:rPr sz="2800" b="1" i="0">
-                <a:solidFill>
-                  <a:srgbClr val="97BC62"/>
-                </a:solidFill>
-                <a:latin typeface="Calibri"/>
-              </a:rPr>
-              <a:t>•  </a:t>
-            </a:r>
-            <a:r>
-              <a:rPr sz="2800" b="0" i="0">
-                <a:solidFill>
-                  <a:srgbClr val="222B22"/>
-                </a:solidFill>
-                <a:latin typeface="Calibri"/>
-              </a:rPr>
-              <a:t>The Lab 1 assignment is already set: bring one vital-signs observation from this room, tonight</a:t>
-            </a:r>
-          </a:p>
-          <a:p>
-            <a:pPr marL="274320" indent="-274320">
-              <a:spcAft>
-                <a:spcPts val="900"/>
-              </a:spcAft>
-            </a:pPr>
-            <a:r>
-              <a:rPr sz="2800" b="1" i="0">
-                <a:solidFill>
-                  <a:srgbClr val="97BC62"/>
-                </a:solidFill>
-                <a:latin typeface="Calibri"/>
-              </a:rPr>
-              <a:t>•  </a:t>
-            </a:r>
-            <a:r>
-              <a:rPr sz="2800" b="0" i="0">
-                <a:solidFill>
-                  <a:srgbClr val="222B22"/>
-                </a:solidFill>
-                <a:latin typeface="Calibri"/>
-              </a:rPr>
-              <a:t>“Anyone can hold a beautiful ceremony. The proof that tonight was a gate and not a ceremony is a date on a calendar.” The exit is an entrance.</a:t>
-            </a:r>
-          </a:p>
-        </p:txBody>
-      </p:sp>
-      <p:sp>
-        <p:nvSpPr>
-          <p:cNvPr id="90" name="SlideNum"/>
-          <p:cNvSpPr txBox="1"/>
-          <p:nvPr/>
-        </p:nvSpPr>
-        <p:spPr>
-          <a:xfrm>
-            <a:off x="11384280" y="6446520"/>
-            <a:ext cx="640080" cy="292608"/>
-          </a:xfrm>
-          <a:prstGeom prst="rect">
-            <a:avLst/>
-          </a:prstGeom>
-          <a:noFill/>
-        </p:spPr>
-        <p:txBody>
-          <a:bodyPr wrap="none" lIns="0" tIns="0" rIns="45720" bIns="0" anchor="ctr"/>
-          <a:lstStyle/>
-          <a:p>
-            <a:pPr algn="r"/>
-            <a:r>
-              <a:t>274</a:t>
-            </a:r>
-            <a:endParaRPr sz="1000" b="1">
-              <a:solidFill>
-                <a:srgbClr val="7A8A6E"/>
-              </a:solidFill>
-              <a:latin typeface="Calibri"/>
-            </a:endParaRPr>
-          </a:p>
-        </p:txBody>
-      </p:sp>
-    </p:spTree>
-  </p:cSld>
-  <p:clrMapOvr>
-    <a:masterClrMapping/>
-  </p:clrMapOvr>
-</p:sld>
-</file>
-
-<file path=ppt/slides/slide275.xml><?xml version="1.0" encoding="utf-8"?>
-<p:sld xmlns:a="http://schemas.openxmlformats.org/drawingml/2006/main" xmlns:r="http://schemas.openxmlformats.org/officeDocument/2006/relationships" xmlns:p="http://schemas.openxmlformats.org/presentationml/2006/main">
-  <p:cSld>
-    <p:spTree>
-      <p:nvGrpSpPr>
-        <p:cNvPr id="1" name=""/>
-        <p:cNvGrpSpPr/>
-        <p:nvPr/>
-      </p:nvGrpSpPr>
-      <p:grpSpPr>
-        <a:xfrm>
-          <a:off x="0" y="0"/>
-          <a:ext cx="0" cy="0"/>
-          <a:chOff x="0" y="0"/>
-          <a:chExt cx="0" cy="0"/>
-        </a:xfrm>
-      </p:grpSpPr>
-      <p:sp>
-        <p:nvSpPr>
-          <p:cNvPr id="2" name="Rectangle 1"/>
-          <p:cNvSpPr/>
-          <p:nvPr/>
-        </p:nvSpPr>
-        <p:spPr>
-          <a:xfrm>
-            <a:off x="0" y="0"/>
-            <a:ext cx="12191695" cy="6858000"/>
-          </a:xfrm>
-          <a:prstGeom prst="rect">
-            <a:avLst/>
-          </a:prstGeom>
-          <a:solidFill>
-            <a:srgbClr val="FFFFFF"/>
-          </a:solidFill>
-          <a:ln>
-            <a:noFill/>
-          </a:ln>
-        </p:spPr>
-        <p:txBody>
-          <a:bodyPr/>
-          <a:lstStyle/>
-          <a:p>
-            <a:endParaRPr/>
-          </a:p>
-        </p:txBody>
-      </p:sp>
-      <p:sp>
-        <p:nvSpPr>
-          <p:cNvPr id="3" name="TextBox 2"/>
-          <p:cNvSpPr txBox="1"/>
-          <p:nvPr/>
-        </p:nvSpPr>
-        <p:spPr>
-          <a:xfrm>
-            <a:off x="822960" y="502920"/>
-            <a:ext cx="10515600" cy="822960"/>
-          </a:xfrm>
-          <a:prstGeom prst="rect">
-            <a:avLst/>
-          </a:prstGeom>
-          <a:noFill/>
-        </p:spPr>
-        <p:txBody>
-          <a:bodyPr wrap="square">
-            <a:spAutoFit/>
-          </a:bodyPr>
-          <a:lstStyle/>
-          <a:p>
-            <a:pPr algn="l">
-              <a:spcAft>
-                <a:spcPts val="600"/>
-              </a:spcAft>
-            </a:pPr>
-            <a:r>
-              <a:rPr sz="2800" b="1" i="0">
-                <a:solidFill>
-                  <a:srgbClr val="2C5F2D"/>
-                </a:solidFill>
-                <a:latin typeface="Cambria"/>
-              </a:rPr>
-              <a:t>Your Take-Home Card — This Session’s Practice</a:t>
-            </a:r>
-          </a:p>
-        </p:txBody>
-      </p:sp>
-      <p:sp>
-        <p:nvSpPr>
-          <p:cNvPr id="90" name="SlideNum"/>
-          <p:cNvSpPr txBox="1"/>
-          <p:nvPr/>
-        </p:nvSpPr>
-        <p:spPr>
-          <a:xfrm>
-            <a:off x="11384280" y="6446520"/>
-            <a:ext cx="640080" cy="292608"/>
-          </a:xfrm>
-          <a:prstGeom prst="rect">
-            <a:avLst/>
-          </a:prstGeom>
-          <a:noFill/>
-        </p:spPr>
-        <p:txBody>
-          <a:bodyPr wrap="none" lIns="0" tIns="0" rIns="45720" bIns="0" anchor="ctr"/>
-          <a:lstStyle/>
-          <a:p>
-            <a:pPr algn="r"/>
-            <a:r>
-              <a:t>275</a:t>
-            </a:r>
-            <a:endParaRPr sz="1000" b="1">
-              <a:solidFill>
-                <a:srgbClr val="7A8A6E"/>
-              </a:solidFill>
-              <a:latin typeface="Calibri"/>
-            </a:endParaRPr>
-          </a:p>
-        </p:txBody>
-      </p:sp>
-      <p:pic>
-        <p:nvPicPr>
-          <p:cNvPr id="270" name="CardImage" descr="the Week 22 check-off card, as handed out"/>
-          <p:cNvPicPr>
-            <a:picLocks noChangeAspect="1"/>
-          </p:cNvPicPr>
-          <p:nvPr/>
-        </p:nvPicPr>
-        <p:blipFill>
-          <a:blip r:embed="rId3"/>
-          <a:stretch>
-            <a:fillRect/>
-          </a:stretch>
-        </p:blipFill>
-        <p:spPr>
-          <a:xfrm>
-            <a:off x="1849930" y="1554480"/>
-            <a:ext cx="8491834" cy="4480560"/>
-          </a:xfrm>
-          <a:prstGeom prst="rect">
-            <a:avLst/>
-          </a:prstGeom>
-          <a:ln w="76200">
-            <a:solidFill>
-              <a:srgbClr val="FFFFFF"/>
-            </a:solidFill>
-          </a:ln>
-          <a:effectLst>
-            <a:outerShdw blurRad="63500" dist="25400" dir="5400000" rotWithShape="0">
-              <a:srgbClr val="000000">
-                <a:alpha val="35000"/>
-              </a:srgbClr>
-            </a:outerShdw>
-          </a:effectLst>
-        </p:spPr>
-      </p:pic>
-      <p:sp>
-        <p:nvSpPr>
-          <p:cNvPr id="271" name="Caption"/>
-          <p:cNvSpPr txBox="1"/>
-          <p:nvPr/>
-        </p:nvSpPr>
-        <p:spPr>
-          <a:xfrm>
-            <a:off x="822960" y="6217920"/>
-            <a:ext cx="10515600" cy="457200"/>
-          </a:xfrm>
-          <a:prstGeom prst="rect">
-            <a:avLst/>
-          </a:prstGeom>
-          <a:noFill/>
-        </p:spPr>
-        <p:txBody>
-          <a:bodyPr wrap="square"/>
-          <a:lstStyle/>
-          <a:p>
-            <a:pPr algn="ctr"/>
-            <a:r>
-              <a:rPr sz="1800" b="0" i="1">
-                <a:solidFill>
-                  <a:srgbClr val="222B22"/>
-                </a:solidFill>
-                <a:latin typeface="Calibri"/>
-              </a:rPr>
-              <a:t>Handed out now — fridge, mirror, journal pocket.</a:t>
-            </a:r>
-          </a:p>
-        </p:txBody>
-      </p:sp>
-    </p:spTree>
-  </p:cSld>
-  <p:clrMapOvr>
-    <a:masterClrMapping/>
-  </p:clrMapOvr>
-</p:sld>
-</file>
-
-<file path=ppt/slides/slide276.xml><?xml version="1.0" encoding="utf-8"?>
-<p:sld xmlns:a="http://schemas.openxmlformats.org/drawingml/2006/main" xmlns:r="http://schemas.openxmlformats.org/officeDocument/2006/relationships" xmlns:p="http://schemas.openxmlformats.org/presentationml/2006/main">
-  <p:cSld>
-    <p:spTree>
-      <p:nvGrpSpPr>
-        <p:cNvPr id="1" name=""/>
-        <p:cNvGrpSpPr/>
-        <p:nvPr/>
-      </p:nvGrpSpPr>
-      <p:grpSpPr>
-        <a:xfrm>
-          <a:off x="0" y="0"/>
-          <a:ext cx="0" cy="0"/>
-          <a:chOff x="0" y="0"/>
-          <a:chExt cx="0" cy="0"/>
-        </a:xfrm>
-      </p:grpSpPr>
-      <p:sp>
-        <p:nvSpPr>
-          <p:cNvPr id="2" name="Rectangle 1"/>
-          <p:cNvSpPr/>
-          <p:nvPr/>
-        </p:nvSpPr>
-        <p:spPr>
-          <a:xfrm>
-            <a:off x="0" y="0"/>
-            <a:ext cx="12191695" cy="6858000"/>
-          </a:xfrm>
-          <a:prstGeom prst="rect">
-            <a:avLst/>
-          </a:prstGeom>
-          <a:solidFill>
-            <a:srgbClr val="FFFFFF"/>
-          </a:solidFill>
-          <a:ln>
-            <a:noFill/>
-          </a:ln>
-        </p:spPr>
-        <p:txBody>
-          <a:bodyPr/>
-          <a:lstStyle/>
-          <a:p>
-            <a:endParaRPr/>
-          </a:p>
-        </p:txBody>
-      </p:sp>
-      <p:sp>
-        <p:nvSpPr>
-          <p:cNvPr id="3" name="TextBox 2"/>
-          <p:cNvSpPr txBox="1"/>
-          <p:nvPr/>
-        </p:nvSpPr>
-        <p:spPr>
-          <a:xfrm>
-            <a:off x="822960" y="502920"/>
-            <a:ext cx="10515600" cy="822960"/>
-          </a:xfrm>
-          <a:prstGeom prst="rect">
-            <a:avLst/>
-          </a:prstGeom>
-          <a:noFill/>
-        </p:spPr>
-        <p:txBody>
-          <a:bodyPr wrap="square">
-            <a:spAutoFit/>
-          </a:bodyPr>
-          <a:lstStyle/>
-          <a:p>
-            <a:pPr algn="l">
-              <a:spcAft>
-                <a:spcPts val="600"/>
-              </a:spcAft>
-            </a:pPr>
-            <a:r>
-              <a:rPr sz="2800" b="1" i="0">
-                <a:solidFill>
-                  <a:srgbClr val="2C5F2D"/>
-                </a:solidFill>
-                <a:latin typeface="Cambria"/>
-              </a:rPr>
-              <a:t>The Leader Feedback Round</a:t>
-            </a:r>
-          </a:p>
-        </p:txBody>
-      </p:sp>
-      <p:sp>
-        <p:nvSpPr>
-          <p:cNvPr id="4" name="TextBox 4"/>
-          <p:cNvSpPr txBox="1"/>
-          <p:nvPr/>
-        </p:nvSpPr>
-        <p:spPr>
-          <a:xfrm>
-            <a:off x="822960" y="1554480"/>
-            <a:ext cx="6675120" cy="4892040"/>
-          </a:xfrm>
-          <a:prstGeom prst="rect">
-            <a:avLst/>
-          </a:prstGeom>
-          <a:noFill/>
-        </p:spPr>
-        <p:txBody>
-          <a:bodyPr wrap="square" lIns="91440" tIns="91440" rIns="91440" bIns="91440"/>
-          <a:lstStyle/>
-          <a:p>
-            <a:pPr marL="274320" indent="-274320">
-              <a:spcAft>
-                <a:spcPts val="900"/>
-              </a:spcAft>
-            </a:pPr>
-            <a:r>
-              <a:rPr sz="2800" b="1" i="0">
-                <a:solidFill>
-                  <a:srgbClr val="97BC62"/>
-                </a:solidFill>
-                <a:latin typeface="Calibri"/>
-              </a:rPr>
-              <a:t>•  </a:t>
-            </a:r>
-            <a:r>
-              <a:rPr sz="2800" b="0" i="0">
-                <a:solidFill>
-                  <a:srgbClr val="222B22"/>
-                </a:solidFill>
-                <a:latin typeface="Calibri"/>
-              </a:rPr>
-              <a:t>Two rounds, same as every session — the container holder first, then the content presenter: three things each</a:t>
-            </a:r>
-          </a:p>
-          <a:p>
-            <a:pPr marL="685800" indent="-274320">
-              <a:spcAft>
-                <a:spcPts val="700"/>
-              </a:spcAft>
-            </a:pPr>
-            <a:r>
-              <a:rPr sz="2000" b="1" i="0">
-                <a:solidFill>
-                  <a:srgbClr val="97BC62"/>
-                </a:solidFill>
-                <a:latin typeface="Calibri"/>
-              </a:rPr>
-              <a:t>–  </a:t>
-            </a:r>
-            <a:r>
-              <a:rPr sz="2000" b="0" i="1">
-                <a:solidFill>
-                  <a:srgbClr val="222B22"/>
-                </a:solidFill>
-                <a:latin typeface="Calibri"/>
-              </a:rPr>
-              <a:t>“What I think went well tonight: ______”</a:t>
-            </a:r>
-          </a:p>
-          <a:p>
-            <a:pPr marL="685800" indent="-274320">
-              <a:spcAft>
-                <a:spcPts val="700"/>
-              </a:spcAft>
-            </a:pPr>
-            <a:r>
-              <a:rPr sz="2000" b="1" i="0">
-                <a:solidFill>
-                  <a:srgbClr val="97BC62"/>
-                </a:solidFill>
-                <a:latin typeface="Calibri"/>
-              </a:rPr>
-              <a:t>–  </a:t>
-            </a:r>
-            <a:r>
-              <a:rPr sz="2000" b="0" i="1">
-                <a:solidFill>
-                  <a:srgbClr val="222B22"/>
-                </a:solidFill>
-                <a:latin typeface="Calibri"/>
-              </a:rPr>
-              <a:t>“What I’d do differently next time: ______”</a:t>
-            </a:r>
-          </a:p>
-          <a:p>
-            <a:pPr marL="685800" indent="-274320">
-              <a:spcAft>
-                <a:spcPts val="700"/>
-              </a:spcAft>
-            </a:pPr>
-            <a:r>
-              <a:rPr sz="2000" b="1" i="0">
-                <a:solidFill>
-                  <a:srgbClr val="97BC62"/>
-                </a:solidFill>
-                <a:latin typeface="Calibri"/>
-              </a:rPr>
-              <a:t>–  </a:t>
-            </a:r>
-            <a:r>
-              <a:rPr sz="2000" b="0" i="1">
-                <a:solidFill>
-                  <a:srgbClr val="222B22"/>
-                </a:solidFill>
-                <a:latin typeface="Calibri"/>
-              </a:rPr>
-              <a:t>“If I were to teach tonight’s process to someone, I would tell them: ______”</a:t>
-            </a:r>
-          </a:p>
-          <a:p>
-            <a:pPr marL="274320" indent="-274320">
-              <a:spcAft>
-                <a:spcPts val="900"/>
-              </a:spcAft>
-            </a:pPr>
-            <a:r>
-              <a:rPr sz="2800" b="1" i="0">
-                <a:solidFill>
-                  <a:srgbClr val="97BC62"/>
-                </a:solidFill>
-                <a:latin typeface="Calibri"/>
-              </a:rPr>
-              <a:t>•  </a:t>
-            </a:r>
-            <a:r>
-              <a:rPr sz="2800" b="0" i="0">
-                <a:solidFill>
-                  <a:srgbClr val="222B22"/>
-                </a:solidFill>
-                <a:latin typeface="Calibri"/>
-              </a:rPr>
-              <a:t>Then the room — the same two questions about tonight</a:t>
-            </a:r>
-          </a:p>
-          <a:p>
-            <a:pPr marL="274320" indent="-274320">
-              <a:spcAft>
-                <a:spcPts val="900"/>
-              </a:spcAft>
-            </a:pPr>
-            <a:r>
-              <a:rPr sz="2800" b="1" i="0">
-                <a:solidFill>
-                  <a:srgbClr val="97BC62"/>
-                </a:solidFill>
-                <a:latin typeface="Calibri"/>
-              </a:rPr>
-              <a:t>•  </a:t>
-            </a:r>
-            <a:r>
-              <a:rPr sz="2800" b="0" i="0">
-                <a:solidFill>
-                  <a:srgbClr val="222B22"/>
-                </a:solidFill>
-                <a:latin typeface="Calibri"/>
-              </a:rPr>
-              <a:t>The leaders receive without defending — “thank you” is the whole response</a:t>
-            </a:r>
-          </a:p>
-        </p:txBody>
-      </p:sp>
-      <p:sp>
-        <p:nvSpPr>
-          <p:cNvPr id="90" name="SlideNum"/>
-          <p:cNvSpPr txBox="1"/>
-          <p:nvPr/>
-        </p:nvSpPr>
-        <p:spPr>
-          <a:xfrm>
-            <a:off x="11384280" y="6446520"/>
-            <a:ext cx="640080" cy="292608"/>
-          </a:xfrm>
-          <a:prstGeom prst="rect">
-            <a:avLst/>
-          </a:prstGeom>
-          <a:noFill/>
-        </p:spPr>
-        <p:txBody>
-          <a:bodyPr wrap="none" lIns="0" tIns="0" rIns="45720" bIns="0" anchor="ctr"/>
-          <a:lstStyle/>
-          <a:p>
-            <a:pPr algn="r"/>
-            <a:r>
-              <a:t>276</a:t>
-            </a:r>
-            <a:endParaRPr sz="1000" b="1">
-              <a:solidFill>
-                <a:srgbClr val="7A8A6E"/>
-              </a:solidFill>
-              <a:latin typeface="Calibri"/>
-            </a:endParaRPr>
-          </a:p>
-        </p:txBody>
-      </p:sp>
-      <p:pic>
-        <p:nvPicPr>
-          <p:cNvPr id="33" name="Picture 33" descr="compass on the trail - the weekly bearing check"/>
-          <p:cNvPicPr>
-            <a:picLocks noChangeAspect="1"/>
-          </p:cNvPicPr>
-          <p:nvPr/>
-        </p:nvPicPr>
-        <p:blipFill>
-          <a:blip r:embed="rId3"/>
-          <a:stretch>
-            <a:fillRect/>
-          </a:stretch>
-        </p:blipFill>
-        <p:spPr>
-          <a:xfrm>
-            <a:off x="8106160" y="1463040"/>
-            <a:ext cx="3259831" cy="4892040"/>
-          </a:xfrm>
-          <a:prstGeom prst="rect">
-            <a:avLst/>
-          </a:prstGeom>
-          <a:ln w="76200">
-            <a:solidFill>
-              <a:srgbClr val="FFFFFF"/>
-            </a:solidFill>
-          </a:ln>
-          <a:effectLst>
-            <a:outerShdw blurRad="63500" dist="25400" dir="5400000" rotWithShape="0">
-              <a:srgbClr val="000000">
-                <a:alpha val="35000"/>
-              </a:srgbClr>
-            </a:outerShdw>
-          </a:effectLst>
-        </p:spPr>
-      </p:pic>
-    </p:spTree>
-  </p:cSld>
-  <p:clrMapOvr>
-    <a:masterClrMapping/>
-  </p:clrMapOvr>
-</p:sld>
-</file>
-
-<file path=ppt/slides/slide277.xml><?xml version="1.0" encoding="utf-8"?>
-<p:sld xmlns:a="http://schemas.openxmlformats.org/drawingml/2006/main" xmlns:r="http://schemas.openxmlformats.org/officeDocument/2006/relationships" xmlns:p="http://schemas.openxmlformats.org/presentationml/2006/main">
-  <p:cSld>
-    <p:spTree>
-      <p:nvGrpSpPr>
-        <p:cNvPr id="1" name=""/>
-        <p:cNvGrpSpPr/>
-        <p:nvPr/>
-      </p:nvGrpSpPr>
-      <p:grpSpPr>
-        <a:xfrm>
-          <a:off x="0" y="0"/>
-          <a:ext cx="0" cy="0"/>
-          <a:chOff x="0" y="0"/>
-          <a:chExt cx="0" cy="0"/>
-        </a:xfrm>
-      </p:grpSpPr>
-      <p:sp>
-        <p:nvSpPr>
-          <p:cNvPr id="2" name="Rectangle 1"/>
-          <p:cNvSpPr/>
-          <p:nvPr/>
-        </p:nvSpPr>
-        <p:spPr>
-          <a:xfrm>
-            <a:off x="0" y="0"/>
-            <a:ext cx="12191695" cy="6858000"/>
-          </a:xfrm>
-          <a:prstGeom prst="rect">
-            <a:avLst/>
-          </a:prstGeom>
-          <a:solidFill>
-            <a:srgbClr val="FFFFFF"/>
-          </a:solidFill>
-          <a:ln>
-            <a:noFill/>
-          </a:ln>
-        </p:spPr>
-        <p:txBody>
-          <a:bodyPr/>
-          <a:lstStyle/>
-          <a:p>
-            <a:endParaRPr/>
-          </a:p>
-        </p:txBody>
-      </p:sp>
-      <p:sp>
-        <p:nvSpPr>
-          <p:cNvPr id="3" name="TextBox 2"/>
-          <p:cNvSpPr txBox="1"/>
-          <p:nvPr/>
-        </p:nvSpPr>
-        <p:spPr>
-          <a:xfrm>
-            <a:off x="822960" y="502920"/>
-            <a:ext cx="10515600" cy="822960"/>
-          </a:xfrm>
-          <a:prstGeom prst="rect">
-            <a:avLst/>
-          </a:prstGeom>
-          <a:noFill/>
-        </p:spPr>
-        <p:txBody>
-          <a:bodyPr wrap="square">
-            <a:spAutoFit/>
-          </a:bodyPr>
-          <a:lstStyle/>
-          <a:p>
-            <a:pPr algn="l">
-              <a:spcAft>
-                <a:spcPts val="600"/>
-              </a:spcAft>
-            </a:pPr>
-            <a:r>
-              <a:rPr sz="2800" b="1" i="0">
-                <a:solidFill>
-                  <a:srgbClr val="2C5F2D"/>
-                </a:solidFill>
-                <a:latin typeface="Cambria"/>
-              </a:rPr>
-              <a:t>The Final Rep — the Container Closed</a:t>
-            </a:r>
-          </a:p>
-        </p:txBody>
-      </p:sp>
-      <p:sp>
-        <p:nvSpPr>
-          <p:cNvPr id="4" name="TextBox 4"/>
-          <p:cNvSpPr txBox="1"/>
-          <p:nvPr/>
-        </p:nvSpPr>
-        <p:spPr>
-          <a:xfrm>
-            <a:off x="822960" y="1554480"/>
-            <a:ext cx="10515600" cy="4892040"/>
-          </a:xfrm>
-          <a:prstGeom prst="rect">
-            <a:avLst/>
-          </a:prstGeom>
-          <a:noFill/>
-        </p:spPr>
-        <p:txBody>
-          <a:bodyPr wrap="square" lIns="91440" tIns="91440" rIns="91440" bIns="91440"/>
-          <a:lstStyle/>
-          <a:p>
-            <a:pPr marL="274320" indent="-274320">
-              <a:spcAft>
-                <a:spcPts val="900"/>
-              </a:spcAft>
-            </a:pPr>
-            <a:r>
-              <a:rPr sz="2800" b="1" i="0">
-                <a:solidFill>
-                  <a:srgbClr val="97BC62"/>
-                </a:solidFill>
-                <a:latin typeface="Calibri"/>
-              </a:rPr>
-              <a:t>•  </a:t>
-            </a:r>
-            <a:r>
-              <a:rPr sz="2800" b="0" i="0">
-                <a:solidFill>
-                  <a:srgbClr val="222B22"/>
-                </a:solidFill>
-                <a:latin typeface="Calibri"/>
-              </a:rPr>
-              <a:t>The reserved senior closes the container from memory — the standing circle, the one-word landing, the one thing, the one practice, the blessing round, the closing prayer and sending</a:t>
-            </a:r>
-          </a:p>
-          <a:p>
-            <a:pPr marL="274320" indent="-274320">
-              <a:spcAft>
-                <a:spcPts val="900"/>
-              </a:spcAft>
-            </a:pPr>
-            <a:r>
-              <a:rPr sz="2800" b="1" i="0">
-                <a:solidFill>
-                  <a:srgbClr val="97BC62"/>
-                </a:solidFill>
-                <a:latin typeface="Calibri"/>
-              </a:rPr>
-              <a:t>•  </a:t>
-            </a:r>
-            <a:r>
-              <a:rPr sz="2800" b="0" i="0">
-                <a:solidFill>
-                  <a:srgbClr val="222B22"/>
-                </a:solidFill>
-                <a:latin typeface="Calibri"/>
-              </a:rPr>
-              <a:t>The rite that opened in a senior’s voice ends in a senior’s voice — the last words of Getting Started are spoken by the generation it raised</a:t>
-            </a:r>
-          </a:p>
-          <a:p>
-            <a:pPr marL="274320" indent="-274320">
-              <a:spcAft>
-                <a:spcPts val="900"/>
-              </a:spcAft>
-            </a:pPr>
-            <a:r>
-              <a:rPr sz="2800" b="1" i="0">
-                <a:solidFill>
-                  <a:srgbClr val="97BC62"/>
-                </a:solidFill>
-                <a:latin typeface="Calibri"/>
-              </a:rPr>
-              <a:t>•  </a:t>
-            </a:r>
-            <a:r>
-              <a:rPr sz="2800" b="0" i="0">
-                <a:solidFill>
-                  <a:srgbClr val="222B22"/>
-                </a:solidFill>
-                <a:latin typeface="Calibri"/>
-              </a:rPr>
-              <a:t>If the senior sends the room, the room is sent — nothing is added after</a:t>
-            </a:r>
-          </a:p>
-          <a:p>
-            <a:pPr marL="274320" indent="-274320">
-              <a:spcAft>
-                <a:spcPts val="900"/>
-              </a:spcAft>
-            </a:pPr>
-            <a:r>
-              <a:rPr sz="2800" b="1" i="0">
-                <a:solidFill>
-                  <a:srgbClr val="97BC62"/>
-                </a:solidFill>
-                <a:latin typeface="Calibri"/>
-              </a:rPr>
-              <a:t>•  </a:t>
-            </a:r>
-            <a:r>
-              <a:rPr sz="2800" b="0" i="0">
-                <a:solidFill>
-                  <a:srgbClr val="222B22"/>
-                </a:solidFill>
-                <a:latin typeface="Calibri"/>
-              </a:rPr>
-              <a:t>After: the signing — everyone signs each new FC1’s keepsake, the way you sign a Bible flyleaf. Then dessert. Stay.</a:t>
-            </a:r>
-          </a:p>
-        </p:txBody>
-      </p:sp>
-      <p:sp>
-        <p:nvSpPr>
-          <p:cNvPr id="90" name="SlideNum"/>
-          <p:cNvSpPr txBox="1"/>
-          <p:nvPr/>
-        </p:nvSpPr>
-        <p:spPr>
-          <a:xfrm>
-            <a:off x="11384280" y="6446520"/>
-            <a:ext cx="640080" cy="292608"/>
-          </a:xfrm>
-          <a:prstGeom prst="rect">
-            <a:avLst/>
-          </a:prstGeom>
-          <a:noFill/>
-        </p:spPr>
-        <p:txBody>
-          <a:bodyPr wrap="none" lIns="0" tIns="0" rIns="45720" bIns="0" anchor="ctr"/>
-          <a:lstStyle/>
-          <a:p>
-            <a:pPr algn="r"/>
-            <a:r>
-              <a:t>277</a:t>
             </a:r>
             <a:endParaRPr sz="1000" b="1">
               <a:solidFill>

--- a/_implementation-notes/evening-series/FotH Evening Session 22 Slides DRAFT v1.pptx
+++ b/_implementation-notes/evening-series/FotH Evening Session 22 Slides DRAFT v1.pptx
@@ -5073,7 +5073,7 @@
                 </a:solidFill>
                 <a:latin typeface="Cambria"/>
               </a:rPr>
-              <a:t>The First Lab Scheduled</a:t>
+              <a:t>The Commissioning</a:t>
             </a:r>
           </a:p>
         </p:txBody>
@@ -5098,13 +5098,138 @@
           <a:bodyPr wrap="square" lIns="91440" tIns="91440" rIns="91440" bIns="91440"/>
           <a:lstStyle/>
           <a:p>
+            <a:pPr marL="342900" indent="-342900">
+              <a:spcAft>
+                <a:spcPts val="750"/>
+              </a:spcAft>
+            </a:pPr>
+            <a:r>
+              <a:rPr sz="2200" b="1" i="0">
+                <a:solidFill>
+                  <a:srgbClr val="97BC62"/>
+                </a:solidFill>
+                <a:latin typeface="Calibri"/>
+              </a:rPr>
+              <a:t>1   </a:t>
+            </a:r>
+            <a:r>
+              <a:rPr sz="2200" b="0" i="0">
+                <a:solidFill>
+                  <a:srgbClr val="222B22"/>
+                </a:solidFill>
+                <a:latin typeface="Calibri"/>
+              </a:rPr>
+              <a:t>Each senior stands in the center; their family stands behind them</a:t>
+            </a:r>
+          </a:p>
+          <a:p>
+            <a:pPr marL="342900" indent="-342900">
+              <a:spcAft>
+                <a:spcPts val="750"/>
+              </a:spcAft>
+            </a:pPr>
+            <a:r>
+              <a:rPr sz="2200" b="1" i="0">
+                <a:solidFill>
+                  <a:srgbClr val="97BC62"/>
+                </a:solidFill>
+                <a:latin typeface="Calibri"/>
+              </a:rPr>
+              <a:t>2   </a:t>
+            </a:r>
+            <a:r>
+              <a:rPr sz="2200" b="0" i="0">
+                <a:solidFill>
+                  <a:srgbClr val="222B22"/>
+                </a:solidFill>
+                <a:latin typeface="Calibri"/>
+              </a:rPr>
+              <a:t>Two Companions speak their prepared blessings — drawn from specific moments of leading: what we saw, what we bless, what we see coming</a:t>
+            </a:r>
+          </a:p>
+          <a:p>
+            <a:pPr marL="342900" indent="-342900">
+              <a:spcAft>
+                <a:spcPts val="750"/>
+              </a:spcAft>
+            </a:pPr>
+            <a:r>
+              <a:rPr sz="2200" b="1" i="0">
+                <a:solidFill>
+                  <a:srgbClr val="97BC62"/>
+                </a:solidFill>
+                <a:latin typeface="Calibri"/>
+              </a:rPr>
+              <a:t>3   </a:t>
+            </a:r>
+            <a:r>
+              <a:rPr sz="2200" b="0" i="0">
+                <a:solidFill>
+                  <a:srgbClr val="222B22"/>
+                </a:solidFill>
+                <a:latin typeface="Calibri"/>
+              </a:rPr>
+              <a:t>The parent may add one sentence. One. It will be the one the teen remembers.</a:t>
+            </a:r>
+          </a:p>
+          <a:p>
+            <a:pPr marL="342900" indent="-342900">
+              <a:spcAft>
+                <a:spcPts val="750"/>
+              </a:spcAft>
+            </a:pPr>
+            <a:r>
+              <a:rPr sz="2200" b="1" i="0">
+                <a:solidFill>
+                  <a:srgbClr val="97BC62"/>
+                </a:solidFill>
+                <a:latin typeface="Calibri"/>
+              </a:rPr>
+              <a:t>4   </a:t>
+            </a:r>
+            <a:r>
+              <a:rPr sz="2200" b="0" i="0">
+                <a:solidFill>
+                  <a:srgbClr val="222B22"/>
+                </a:solidFill>
+                <a:latin typeface="Calibri"/>
+              </a:rPr>
+              <a:t>The cohort speaks the Aaronic blessing over the new FC1 — the whole room, slowly, hands extended</a:t>
+            </a:r>
+          </a:p>
+          <a:p>
+            <a:pPr marL="342900" indent="-342900">
+              <a:spcAft>
+                <a:spcPts val="750"/>
+              </a:spcAft>
+            </a:pPr>
+            <a:r>
+              <a:rPr sz="2200" b="1" i="0">
+                <a:solidFill>
+                  <a:srgbClr val="97BC62"/>
+                </a:solidFill>
+                <a:latin typeface="Calibri"/>
+              </a:rPr>
+              <a:t>5   </a:t>
+            </a:r>
+            <a:r>
+              <a:rPr sz="2200" b="0" i="0">
+                <a:solidFill>
+                  <a:srgbClr val="222B22"/>
+                </a:solidFill>
+                <a:latin typeface="Calibri"/>
+              </a:rPr>
+              <a:t>“[Name], the team commissions you as Formation Companion, Level One. Serve the body. Keep the rules. Call your covering. Watch the signs.”</a:t>
+            </a:r>
+          </a:p>
+          <a:p>
             <a:pPr marL="274320" indent="-274320">
               <a:spcAft>
-                <a:spcPts val="900"/>
+                <a:spcPts val="750"/>
               </a:spcAft>
             </a:pPr>
             <a:r>
-              <a:rPr sz="2800" b="1" i="0">
+              <a:rPr sz="2200" b="1" i="0">
                 <a:solidFill>
                   <a:srgbClr val="97BC62"/>
                 </a:solidFill>
@@ -5113,88 +5238,13 @@
               <a:t>•  </a:t>
             </a:r>
             <a:r>
-              <a:rPr sz="2800" b="0" i="0">
+              <a:rPr sz="2200" b="0" i="0">
                 <a:solidFill>
                   <a:srgbClr val="222B22"/>
                 </a:solidFill>
                 <a:latin typeface="Calibri"/>
               </a:rPr>
-              <a:t>Before anyone reaches for a coat — one piece of business, on purpose, in front of everyone</a:t>
-            </a:r>
-          </a:p>
-          <a:p>
-            <a:pPr marL="274320" indent="-274320">
-              <a:spcAft>
-                <a:spcPts val="900"/>
-              </a:spcAft>
-            </a:pPr>
-            <a:r>
-              <a:rPr sz="2800" b="1" i="0">
-                <a:solidFill>
-                  <a:srgbClr val="97BC62"/>
-                </a:solidFill>
-                <a:latin typeface="Calibri"/>
-              </a:rPr>
-              <a:t>•  </a:t>
-            </a:r>
-            <a:r>
-              <a:rPr sz="2800" b="0" i="0">
-                <a:solidFill>
-                  <a:srgbClr val="222B22"/>
-                </a:solidFill>
-                <a:latin typeface="Calibri"/>
-              </a:rPr>
-              <a:t>The first Leader Lab of the spring serving cycle: [day], [date], [time], [place]. Write it down now.</a:t>
-            </a:r>
-          </a:p>
-          <a:p>
-            <a:pPr marL="274320" indent="-274320">
-              <a:spcAft>
-                <a:spcPts val="900"/>
-              </a:spcAft>
-            </a:pPr>
-            <a:r>
-              <a:rPr sz="2800" b="1" i="0">
-                <a:solidFill>
-                  <a:srgbClr val="97BC62"/>
-                </a:solidFill>
-                <a:latin typeface="Calibri"/>
-              </a:rPr>
-              <a:t>•  </a:t>
-            </a:r>
-            <a:r>
-              <a:rPr sz="2800" b="0" i="0">
-                <a:solidFill>
-                  <a:srgbClr val="222B22"/>
-                </a:solidFill>
-                <a:latin typeface="Calibri"/>
-              </a:rPr>
-              <a:t>The Lab 1 assignment is already set: bring one vital-signs observation from this room, tonight</a:t>
-            </a:r>
-          </a:p>
-          <a:p>
-            <a:pPr marL="274320" indent="-274320">
-              <a:spcAft>
-                <a:spcPts val="900"/>
-              </a:spcAft>
-            </a:pPr>
-            <a:r>
-              <a:rPr sz="2800" b="1" i="0">
-                <a:solidFill>
-                  <a:srgbClr val="97BC62"/>
-                </a:solidFill>
-                <a:latin typeface="Calibri"/>
-              </a:rPr>
-              <a:t>•  </a:t>
-            </a:r>
-            <a:r>
-              <a:rPr sz="2800" b="0" i="0">
-                <a:solidFill>
-                  <a:srgbClr val="222B22"/>
-                </a:solidFill>
-                <a:latin typeface="Calibri"/>
-              </a:rPr>
-              <a:t>“Anyone can hold a beautiful ceremony. The proof that tonight was a gate and not a ceremony is a date on a calendar.” The exit is an entrance.</a:t>
+              <a:t>Then the charge, once, over all of them — keep your own walk first; keep the three rules when no one is checking; call your covering early, not late; watch the three signs. “FC1 is a real and honorable place to stand… Set the example. Begin.”</a:t>
             </a:r>
           </a:p>
         </p:txBody>
@@ -5221,6 +5271,253 @@
           <a:p>
             <a:pPr algn="r"/>
             <a:r>
+              <a:t>273</a:t>
+            </a:r>
+            <a:endParaRPr sz="1000" b="1">
+              <a:solidFill>
+                <a:srgbClr val="7A8A6E"/>
+              </a:solidFill>
+              <a:latin typeface="Calibri"/>
+            </a:endParaRPr>
+          </a:p>
+        </p:txBody>
+      </p:sp>
+    </p:spTree>
+  </p:cSld>
+  <p:clrMapOvr>
+    <a:masterClrMapping/>
+  </p:clrMapOvr>
+</p:sld>
+</file>
+
+<file path=ppt/slides/slide11.xml><?xml version="1.0" encoding="utf-8"?>
+<p:sld xmlns:a="http://schemas.openxmlformats.org/drawingml/2006/main" xmlns:r="http://schemas.openxmlformats.org/officeDocument/2006/relationships" xmlns:p="http://schemas.openxmlformats.org/presentationml/2006/main">
+  <p:cSld>
+    <p:spTree>
+      <p:nvGrpSpPr>
+        <p:cNvPr id="1" name=""/>
+        <p:cNvGrpSpPr/>
+        <p:nvPr/>
+      </p:nvGrpSpPr>
+      <p:grpSpPr>
+        <a:xfrm>
+          <a:off x="0" y="0"/>
+          <a:ext cx="0" cy="0"/>
+          <a:chOff x="0" y="0"/>
+          <a:chExt cx="0" cy="0"/>
+        </a:xfrm>
+      </p:grpSpPr>
+      <p:sp>
+        <p:nvSpPr>
+          <p:cNvPr id="2" name="Rectangle 1"/>
+          <p:cNvSpPr/>
+          <p:nvPr/>
+        </p:nvSpPr>
+        <p:spPr>
+          <a:xfrm>
+            <a:off x="0" y="0"/>
+            <a:ext cx="12191695" cy="6858000"/>
+          </a:xfrm>
+          <a:prstGeom prst="rect">
+            <a:avLst/>
+          </a:prstGeom>
+          <a:solidFill>
+            <a:srgbClr val="FFFFFF"/>
+          </a:solidFill>
+          <a:ln>
+            <a:noFill/>
+          </a:ln>
+        </p:spPr>
+        <p:txBody>
+          <a:bodyPr/>
+          <a:lstStyle/>
+          <a:p>
+            <a:endParaRPr/>
+          </a:p>
+        </p:txBody>
+      </p:sp>
+      <p:sp>
+        <p:nvSpPr>
+          <p:cNvPr id="3" name="TextBox 2"/>
+          <p:cNvSpPr txBox="1"/>
+          <p:nvPr/>
+        </p:nvSpPr>
+        <p:spPr>
+          <a:xfrm>
+            <a:off x="822960" y="502920"/>
+            <a:ext cx="10515600" cy="822960"/>
+          </a:xfrm>
+          <a:prstGeom prst="rect">
+            <a:avLst/>
+          </a:prstGeom>
+          <a:noFill/>
+        </p:spPr>
+        <p:txBody>
+          <a:bodyPr wrap="square">
+            <a:spAutoFit/>
+          </a:bodyPr>
+          <a:lstStyle/>
+          <a:p>
+            <a:pPr algn="l">
+              <a:spcAft>
+                <a:spcPts val="600"/>
+              </a:spcAft>
+            </a:pPr>
+            <a:r>
+              <a:rPr sz="2800" b="1" i="0">
+                <a:solidFill>
+                  <a:srgbClr val="2C5F2D"/>
+                </a:solidFill>
+                <a:latin typeface="Cambria"/>
+              </a:rPr>
+              <a:t>The First Lab Scheduled</a:t>
+            </a:r>
+          </a:p>
+        </p:txBody>
+      </p:sp>
+      <p:sp>
+        <p:nvSpPr>
+          <p:cNvPr id="4" name="TextBox 4"/>
+          <p:cNvSpPr txBox="1"/>
+          <p:nvPr/>
+        </p:nvSpPr>
+        <p:spPr>
+          <a:xfrm>
+            <a:off x="822960" y="1554480"/>
+            <a:ext cx="10515600" cy="4892040"/>
+          </a:xfrm>
+          <a:prstGeom prst="rect">
+            <a:avLst/>
+          </a:prstGeom>
+          <a:noFill/>
+        </p:spPr>
+        <p:txBody>
+          <a:bodyPr wrap="square" lIns="91440" tIns="91440" rIns="91440" bIns="91440"/>
+          <a:lstStyle/>
+          <a:p>
+            <a:pPr marL="274320" indent="-274320">
+              <a:spcAft>
+                <a:spcPts val="900"/>
+              </a:spcAft>
+            </a:pPr>
+            <a:r>
+              <a:rPr sz="2800" b="1" i="0">
+                <a:solidFill>
+                  <a:srgbClr val="97BC62"/>
+                </a:solidFill>
+                <a:latin typeface="Calibri"/>
+              </a:rPr>
+              <a:t>•  </a:t>
+            </a:r>
+            <a:r>
+              <a:rPr sz="2800" b="0" i="0">
+                <a:solidFill>
+                  <a:srgbClr val="222B22"/>
+                </a:solidFill>
+                <a:latin typeface="Calibri"/>
+              </a:rPr>
+              <a:t>Before anyone reaches for a coat — one piece of business, on purpose, in front of everyone</a:t>
+            </a:r>
+          </a:p>
+          <a:p>
+            <a:pPr marL="274320" indent="-274320">
+              <a:spcAft>
+                <a:spcPts val="900"/>
+              </a:spcAft>
+            </a:pPr>
+            <a:r>
+              <a:rPr sz="2800" b="1" i="0">
+                <a:solidFill>
+                  <a:srgbClr val="97BC62"/>
+                </a:solidFill>
+                <a:latin typeface="Calibri"/>
+              </a:rPr>
+              <a:t>•  </a:t>
+            </a:r>
+            <a:r>
+              <a:rPr sz="2800" b="0" i="0">
+                <a:solidFill>
+                  <a:srgbClr val="222B22"/>
+                </a:solidFill>
+                <a:latin typeface="Calibri"/>
+              </a:rPr>
+              <a:t>The first Leader Lab of the spring serving cycle: [day], [date], [time], [place]. Write it down now.</a:t>
+            </a:r>
+          </a:p>
+          <a:p>
+            <a:pPr marL="274320" indent="-274320">
+              <a:spcAft>
+                <a:spcPts val="900"/>
+              </a:spcAft>
+            </a:pPr>
+            <a:r>
+              <a:rPr sz="2800" b="1" i="0">
+                <a:solidFill>
+                  <a:srgbClr val="97BC62"/>
+                </a:solidFill>
+                <a:latin typeface="Calibri"/>
+              </a:rPr>
+              <a:t>•  </a:t>
+            </a:r>
+            <a:r>
+              <a:rPr sz="2800" b="0" i="0">
+                <a:solidFill>
+                  <a:srgbClr val="222B22"/>
+                </a:solidFill>
+                <a:latin typeface="Calibri"/>
+              </a:rPr>
+              <a:t>The Lab 1 assignment is already set: bring one vital-signs observation from this room, tonight</a:t>
+            </a:r>
+          </a:p>
+          <a:p>
+            <a:pPr marL="274320" indent="-274320">
+              <a:spcAft>
+                <a:spcPts val="900"/>
+              </a:spcAft>
+            </a:pPr>
+            <a:r>
+              <a:rPr sz="2800" b="1" i="0">
+                <a:solidFill>
+                  <a:srgbClr val="97BC62"/>
+                </a:solidFill>
+                <a:latin typeface="Calibri"/>
+              </a:rPr>
+              <a:t>•  </a:t>
+            </a:r>
+            <a:r>
+              <a:rPr sz="2800" b="0" i="0">
+                <a:solidFill>
+                  <a:srgbClr val="222B22"/>
+                </a:solidFill>
+                <a:latin typeface="Calibri"/>
+              </a:rPr>
+              <a:t>“Anyone can hold a beautiful ceremony. The proof that tonight was a gate and not a ceremony is a date on a calendar.” The exit is an entrance.</a:t>
+            </a:r>
+          </a:p>
+        </p:txBody>
+      </p:sp>
+      <p:sp>
+        <p:nvSpPr>
+          <p:cNvPr id="90" name="SlideNum"/>
+          <p:cNvSpPr txBox="1"/>
+          <p:nvPr/>
+        </p:nvSpPr>
+        <p:spPr>
+          <a:xfrm>
+            <a:off x="11384280" y="6446520"/>
+            <a:ext cx="640080" cy="292608"/>
+          </a:xfrm>
+          <a:prstGeom prst="rect">
+            <a:avLst/>
+          </a:prstGeom>
+          <a:noFill/>
+        </p:spPr>
+        <p:txBody>
+          <a:bodyPr wrap="none" lIns="0" tIns="0" rIns="45720" bIns="0" anchor="ctr"/>
+          <a:lstStyle/>
+          <a:p>
+            <a:pPr algn="r"/>
+            <a:r>
               <a:t>274</a:t>
             </a:r>
             <a:endParaRPr sz="1000" b="1">
@@ -5241,6 +5538,390 @@
 </file>
 
 <file path=ppt/slides/slide12.xml><?xml version="1.0" encoding="utf-8"?>
+<p:sld xmlns:a="http://schemas.openxmlformats.org/drawingml/2006/main" xmlns:p="http://schemas.openxmlformats.org/presentationml/2006/main" xmlns:r="http://schemas.openxmlformats.org/officeDocument/2006/relationships">
+  <p:cSld>
+    <p:spTree>
+      <p:nvGrpSpPr>
+        <p:cNvPr id="1" name=""/>
+        <p:cNvGrpSpPr/>
+        <p:nvPr/>
+      </p:nvGrpSpPr>
+      <p:grpSpPr/>
+      <p:sp>
+        <p:nvSpPr>
+          <p:cNvPr id="2" name="Rectangle 1"/>
+          <p:cNvSpPr/>
+          <p:nvPr/>
+        </p:nvSpPr>
+        <p:spPr>
+          <a:xfrm>
+            <a:off x="0" y="0"/>
+            <a:ext cx="12192000" cy="6858000"/>
+          </a:xfrm>
+          <a:prstGeom prst="rect">
+            <a:avLst/>
+          </a:prstGeom>
+          <a:solidFill>
+            <a:srgbClr val="FFFFFF"/>
+          </a:solidFill>
+          <a:ln>
+            <a:noFill/>
+          </a:ln>
+          <a:effectLst/>
+        </p:spPr>
+        <p:style>
+          <a:lnRef idx="1">
+            <a:schemeClr val="accent1"/>
+          </a:lnRef>
+          <a:fillRef idx="3">
+            <a:schemeClr val="accent1"/>
+          </a:fillRef>
+          <a:effectRef idx="2">
+            <a:schemeClr val="accent1"/>
+          </a:effectRef>
+          <a:fontRef idx="minor">
+            <a:schemeClr val="lt1"/>
+          </a:fontRef>
+        </p:style>
+        <p:txBody>
+          <a:bodyPr rtlCol="0" anchor="ctr"/>
+          <a:lstStyle/>
+          <a:p>
+            <a:pPr algn="ctr"/>
+          </a:p>
+        </p:txBody>
+      </p:sp>
+      <p:sp>
+        <p:nvSpPr>
+          <p:cNvPr id="3" name="TextBox 2"/>
+          <p:cNvSpPr txBox="1"/>
+          <p:nvPr/>
+        </p:nvSpPr>
+        <p:spPr>
+          <a:xfrm>
+            <a:off x="822960" y="502920"/>
+            <a:ext cx="10515600" cy="822960"/>
+          </a:xfrm>
+          <a:prstGeom prst="rect">
+            <a:avLst/>
+          </a:prstGeom>
+          <a:noFill/>
+        </p:spPr>
+        <p:txBody>
+          <a:bodyPr wrap="square">
+            <a:spAutoFit/>
+          </a:bodyPr>
+          <a:lstStyle/>
+          <a:p>
+            <a:r>
+              <a:rPr sz="2800" b="1">
+                <a:solidFill>
+                  <a:srgbClr val="2C5F2D"/>
+                </a:solidFill>
+                <a:latin typeface="Cambria"/>
+              </a:rPr>
+              <a:t>The Take-Home Sheet — the Daily Rhythm</a:t>
+            </a:r>
+          </a:p>
+        </p:txBody>
+      </p:sp>
+      <p:pic>
+        <p:nvPicPr>
+          <p:cNvPr id="4" name="Picture 3" descr="s22_part1.png"/>
+          <p:cNvPicPr>
+            <a:picLocks noChangeAspect="1"/>
+          </p:cNvPicPr>
+          <p:nvPr/>
+        </p:nvPicPr>
+        <p:blipFill>
+          <a:blip r:embed="rId2"/>
+          <a:stretch>
+            <a:fillRect/>
+          </a:stretch>
+        </p:blipFill>
+        <p:spPr>
+          <a:xfrm>
+            <a:off x="1798167" y="1463040"/>
+            <a:ext cx="8595360" cy="4457308"/>
+          </a:xfrm>
+          <a:prstGeom prst="rect">
+            <a:avLst/>
+          </a:prstGeom>
+          <a:ln w="12700">
+            <a:solidFill>
+              <a:srgbClr val="C8C8C8"/>
+            </a:solidFill>
+          </a:ln>
+        </p:spPr>
+      </p:pic>
+      <p:sp>
+        <p:nvSpPr>
+          <p:cNvPr id="5" name="TextBox 4"/>
+          <p:cNvSpPr txBox="1"/>
+          <p:nvPr/>
+        </p:nvSpPr>
+        <p:spPr>
+          <a:xfrm>
+            <a:off x="822960" y="6355080"/>
+            <a:ext cx="10515600" cy="411480"/>
+          </a:xfrm>
+          <a:prstGeom prst="rect">
+            <a:avLst/>
+          </a:prstGeom>
+          <a:noFill/>
+        </p:spPr>
+        <p:txBody>
+          <a:bodyPr wrap="square">
+            <a:spAutoFit/>
+          </a:bodyPr>
+          <a:lstStyle/>
+          <a:p>
+            <a:r>
+              <a:rPr sz="1400" i="1">
+                <a:solidFill>
+                  <a:srgbClr val="595959"/>
+                </a:solidFill>
+                <a:latin typeface="Calibri"/>
+              </a:rPr>
+              <a:t>Handed out now — this is the sheet in your hands.</a:t>
+            </a:r>
+          </a:p>
+        </p:txBody>
+      </p:sp>
+      <p:sp>
+        <p:nvSpPr>
+          <p:cNvPr id="90" name="SlideNum"/>
+          <p:cNvSpPr txBox="1"/>
+          <p:nvPr/>
+        </p:nvSpPr>
+        <p:spPr>
+          <a:xfrm>
+            <a:off x="11384280" y="6446520"/>
+            <a:ext cx="640080" cy="292608"/>
+          </a:xfrm>
+          <a:prstGeom prst="rect">
+            <a:avLst/>
+          </a:prstGeom>
+          <a:noFill/>
+        </p:spPr>
+        <p:txBody>
+          <a:bodyPr wrap="none" lIns="0" tIns="0" rIns="45720" bIns="0" anchor="ctr"/>
+          <a:lstStyle/>
+          <a:p>
+            <a:pPr algn="r"/>
+            <a:r>
+              <a:t>275</a:t>
+            </a:r>
+            <a:endParaRPr sz="1000" b="1">
+              <a:solidFill>
+                <a:srgbClr val="7A8A6E"/>
+              </a:solidFill>
+              <a:latin typeface="Calibri"/>
+            </a:endParaRPr>
+          </a:p>
+        </p:txBody>
+      </p:sp>
+    </p:spTree>
+  </p:cSld>
+  <p:clrMapOvr>
+    <a:masterClrMapping/>
+  </p:clrMapOvr>
+</p:sld>
+</file>
+
+<file path=ppt/slides/slide13.xml><?xml version="1.0" encoding="utf-8"?>
+<p:sld xmlns:a="http://schemas.openxmlformats.org/drawingml/2006/main" xmlns:p="http://schemas.openxmlformats.org/presentationml/2006/main" xmlns:r="http://schemas.openxmlformats.org/officeDocument/2006/relationships">
+  <p:cSld>
+    <p:spTree>
+      <p:nvGrpSpPr>
+        <p:cNvPr id="1" name=""/>
+        <p:cNvGrpSpPr/>
+        <p:nvPr/>
+      </p:nvGrpSpPr>
+      <p:grpSpPr/>
+      <p:sp>
+        <p:nvSpPr>
+          <p:cNvPr id="2" name="Rectangle 1"/>
+          <p:cNvSpPr/>
+          <p:nvPr/>
+        </p:nvSpPr>
+        <p:spPr>
+          <a:xfrm>
+            <a:off x="0" y="0"/>
+            <a:ext cx="12192000" cy="6858000"/>
+          </a:xfrm>
+          <a:prstGeom prst="rect">
+            <a:avLst/>
+          </a:prstGeom>
+          <a:solidFill>
+            <a:srgbClr val="FFFFFF"/>
+          </a:solidFill>
+          <a:ln>
+            <a:noFill/>
+          </a:ln>
+          <a:effectLst/>
+        </p:spPr>
+        <p:style>
+          <a:lnRef idx="1">
+            <a:schemeClr val="accent1"/>
+          </a:lnRef>
+          <a:fillRef idx="3">
+            <a:schemeClr val="accent1"/>
+          </a:fillRef>
+          <a:effectRef idx="2">
+            <a:schemeClr val="accent1"/>
+          </a:effectRef>
+          <a:fontRef idx="minor">
+            <a:schemeClr val="lt1"/>
+          </a:fontRef>
+        </p:style>
+        <p:txBody>
+          <a:bodyPr rtlCol="0" anchor="ctr"/>
+          <a:lstStyle/>
+          <a:p>
+            <a:pPr algn="ctr"/>
+          </a:p>
+        </p:txBody>
+      </p:sp>
+      <p:sp>
+        <p:nvSpPr>
+          <p:cNvPr id="3" name="TextBox 2"/>
+          <p:cNvSpPr txBox="1"/>
+          <p:nvPr/>
+        </p:nvSpPr>
+        <p:spPr>
+          <a:xfrm>
+            <a:off x="822960" y="502920"/>
+            <a:ext cx="10515600" cy="822960"/>
+          </a:xfrm>
+          <a:prstGeom prst="rect">
+            <a:avLst/>
+          </a:prstGeom>
+          <a:noFill/>
+        </p:spPr>
+        <p:txBody>
+          <a:bodyPr wrap="square">
+            <a:spAutoFit/>
+          </a:bodyPr>
+          <a:lstStyle/>
+          <a:p>
+            <a:r>
+              <a:rPr sz="2800" b="1">
+                <a:solidFill>
+                  <a:srgbClr val="2C5F2D"/>
+                </a:solidFill>
+                <a:latin typeface="Cambria"/>
+              </a:rPr>
+              <a:t>The Take-Home Sheet — the Four Parts</a:t>
+            </a:r>
+          </a:p>
+        </p:txBody>
+      </p:sp>
+      <p:pic>
+        <p:nvPicPr>
+          <p:cNvPr id="4" name="Picture 3" descr="s22_part2.png"/>
+          <p:cNvPicPr>
+            <a:picLocks noChangeAspect="1"/>
+          </p:cNvPicPr>
+          <p:nvPr/>
+        </p:nvPicPr>
+        <p:blipFill>
+          <a:blip r:embed="rId2"/>
+          <a:stretch>
+            <a:fillRect/>
+          </a:stretch>
+        </p:blipFill>
+        <p:spPr>
+          <a:xfrm>
+            <a:off x="2262810" y="1463040"/>
+            <a:ext cx="7666074" cy="4709160"/>
+          </a:xfrm>
+          <a:prstGeom prst="rect">
+            <a:avLst/>
+          </a:prstGeom>
+          <a:ln w="12700">
+            <a:solidFill>
+              <a:srgbClr val="C8C8C8"/>
+            </a:solidFill>
+          </a:ln>
+        </p:spPr>
+      </p:pic>
+      <p:sp>
+        <p:nvSpPr>
+          <p:cNvPr id="5" name="TextBox 4"/>
+          <p:cNvSpPr txBox="1"/>
+          <p:nvPr/>
+        </p:nvSpPr>
+        <p:spPr>
+          <a:xfrm>
+            <a:off x="822960" y="6355080"/>
+            <a:ext cx="10515600" cy="411480"/>
+          </a:xfrm>
+          <a:prstGeom prst="rect">
+            <a:avLst/>
+          </a:prstGeom>
+          <a:noFill/>
+        </p:spPr>
+        <p:txBody>
+          <a:bodyPr wrap="square">
+            <a:spAutoFit/>
+          </a:bodyPr>
+          <a:lstStyle/>
+          <a:p>
+            <a:r>
+              <a:rPr sz="1400" i="1">
+                <a:solidFill>
+                  <a:srgbClr val="595959"/>
+                </a:solidFill>
+                <a:latin typeface="Calibri"/>
+              </a:rPr>
+              <a:t>One practice at a time — and a partner expecting you at the end of week one.</a:t>
+            </a:r>
+          </a:p>
+        </p:txBody>
+      </p:sp>
+      <p:sp>
+        <p:nvSpPr>
+          <p:cNvPr id="90" name="SlideNum"/>
+          <p:cNvSpPr txBox="1"/>
+          <p:nvPr/>
+        </p:nvSpPr>
+        <p:spPr>
+          <a:xfrm>
+            <a:off x="11384280" y="6446520"/>
+            <a:ext cx="640080" cy="292608"/>
+          </a:xfrm>
+          <a:prstGeom prst="rect">
+            <a:avLst/>
+          </a:prstGeom>
+          <a:noFill/>
+        </p:spPr>
+        <p:txBody>
+          <a:bodyPr wrap="none" lIns="0" tIns="0" rIns="45720" bIns="0" anchor="ctr"/>
+          <a:lstStyle/>
+          <a:p>
+            <a:pPr algn="r"/>
+            <a:r>
+              <a:t>275a</a:t>
+            </a:r>
+            <a:endParaRPr sz="1000" b="1">
+              <a:solidFill>
+                <a:srgbClr val="7A8A6E"/>
+              </a:solidFill>
+              <a:latin typeface="Calibri"/>
+            </a:endParaRPr>
+          </a:p>
+        </p:txBody>
+      </p:sp>
+    </p:spTree>
+  </p:cSld>
+  <p:clrMapOvr>
+    <a:masterClrMapping/>
+  </p:clrMapOvr>
+</p:sld>
+</file>
+
+<file path=ppt/slides/slide14.xml><?xml version="1.0" encoding="utf-8"?>
 <p:sld xmlns:a="http://schemas.openxmlformats.org/drawingml/2006/main" xmlns:r="http://schemas.openxmlformats.org/officeDocument/2006/relationships" xmlns:p="http://schemas.openxmlformats.org/presentationml/2006/main">
   <p:cSld>
     <p:spTree>
@@ -5573,7 +6254,7 @@
 </p:sld>
 </file>
 
-<file path=ppt/slides/slide13.xml><?xml version="1.0" encoding="utf-8"?>
+<file path=ppt/slides/slide15.xml><?xml version="1.0" encoding="utf-8"?>
 <p:sld xmlns:a="http://schemas.openxmlformats.org/drawingml/2006/main" xmlns:r="http://schemas.openxmlformats.org/officeDocument/2006/relationships" xmlns:p="http://schemas.openxmlformats.org/presentationml/2006/main">
   <p:cSld>
     <p:spTree>
@@ -5802,595 +6483,6 @@
             <a:pPr algn="r"/>
             <a:r>
               <a:t>277</a:t>
-            </a:r>
-            <a:endParaRPr sz="1000" b="1">
-              <a:solidFill>
-                <a:srgbClr val="7A8A6E"/>
-              </a:solidFill>
-              <a:latin typeface="Calibri"/>
-            </a:endParaRPr>
-          </a:p>
-        </p:txBody>
-      </p:sp>
-    </p:spTree>
-  </p:cSld>
-  <p:clrMapOvr>
-    <a:masterClrMapping/>
-  </p:clrMapOvr>
-</p:sld>
-</file>
-
-<file path=ppt/slides/slide14.xml><?xml version="1.0" encoding="utf-8"?>
-<p:sld xmlns:a="http://schemas.openxmlformats.org/drawingml/2006/main" xmlns:p="http://schemas.openxmlformats.org/presentationml/2006/main" xmlns:r="http://schemas.openxmlformats.org/officeDocument/2006/relationships">
-  <p:cSld>
-    <p:spTree>
-      <p:nvGrpSpPr>
-        <p:cNvPr id="1" name=""/>
-        <p:cNvGrpSpPr/>
-        <p:nvPr/>
-      </p:nvGrpSpPr>
-      <p:grpSpPr/>
-      <p:sp>
-        <p:nvSpPr>
-          <p:cNvPr id="2" name="Rectangle 1"/>
-          <p:cNvSpPr/>
-          <p:nvPr/>
-        </p:nvSpPr>
-        <p:spPr>
-          <a:xfrm>
-            <a:off x="0" y="0"/>
-            <a:ext cx="12192000" cy="6858000"/>
-          </a:xfrm>
-          <a:prstGeom prst="rect">
-            <a:avLst/>
-          </a:prstGeom>
-          <a:solidFill>
-            <a:srgbClr val="FFFFFF"/>
-          </a:solidFill>
-          <a:ln>
-            <a:noFill/>
-          </a:ln>
-          <a:effectLst/>
-        </p:spPr>
-        <p:style>
-          <a:lnRef idx="1">
-            <a:schemeClr val="accent1"/>
-          </a:lnRef>
-          <a:fillRef idx="3">
-            <a:schemeClr val="accent1"/>
-          </a:fillRef>
-          <a:effectRef idx="2">
-            <a:schemeClr val="accent1"/>
-          </a:effectRef>
-          <a:fontRef idx="minor">
-            <a:schemeClr val="lt1"/>
-          </a:fontRef>
-        </p:style>
-        <p:txBody>
-          <a:bodyPr rtlCol="0" anchor="ctr"/>
-          <a:lstStyle/>
-          <a:p>
-            <a:pPr algn="ctr"/>
-          </a:p>
-        </p:txBody>
-      </p:sp>
-      <p:sp>
-        <p:nvSpPr>
-          <p:cNvPr id="3" name="TextBox 2"/>
-          <p:cNvSpPr txBox="1"/>
-          <p:nvPr/>
-        </p:nvSpPr>
-        <p:spPr>
-          <a:xfrm>
-            <a:off x="822960" y="502920"/>
-            <a:ext cx="10515600" cy="822960"/>
-          </a:xfrm>
-          <a:prstGeom prst="rect">
-            <a:avLst/>
-          </a:prstGeom>
-          <a:noFill/>
-        </p:spPr>
-        <p:txBody>
-          <a:bodyPr wrap="square">
-            <a:spAutoFit/>
-          </a:bodyPr>
-          <a:lstStyle/>
-          <a:p>
-            <a:r>
-              <a:rPr sz="2800" b="1">
-                <a:solidFill>
-                  <a:srgbClr val="2C5F2D"/>
-                </a:solidFill>
-                <a:latin typeface="Cambria"/>
-              </a:rPr>
-              <a:t>Where We Are — the Four Connects</a:t>
-            </a:r>
-          </a:p>
-        </p:txBody>
-      </p:sp>
-      <p:pic>
-        <p:nvPicPr>
-          <p:cNvPr id="4" name="Picture 3" descr="four-connects.png"/>
-          <p:cNvPicPr>
-            <a:picLocks noChangeAspect="1"/>
-          </p:cNvPicPr>
-          <p:nvPr/>
-        </p:nvPicPr>
-        <p:blipFill>
-          <a:blip r:embed="rId2"/>
-          <a:stretch>
-            <a:fillRect/>
-          </a:stretch>
-        </p:blipFill>
-        <p:spPr>
-          <a:xfrm>
-            <a:off x="932688" y="1645920"/>
-            <a:ext cx="10332720" cy="3708663"/>
-          </a:xfrm>
-          <a:prstGeom prst="rect">
-            <a:avLst/>
-          </a:prstGeom>
-        </p:spPr>
-      </p:pic>
-      <p:sp>
-        <p:nvSpPr>
-          <p:cNvPr id="5" name="TextBox 4"/>
-          <p:cNvSpPr txBox="1"/>
-          <p:nvPr/>
-        </p:nvSpPr>
-        <p:spPr>
-          <a:xfrm>
-            <a:off x="822960" y="5623560"/>
-            <a:ext cx="10515600" cy="914400"/>
-          </a:xfrm>
-          <a:prstGeom prst="rect">
-            <a:avLst/>
-          </a:prstGeom>
-          <a:noFill/>
-        </p:spPr>
-        <p:txBody>
-          <a:bodyPr wrap="square">
-            <a:spAutoFit/>
-          </a:bodyPr>
-          <a:lstStyle/>
-          <a:p>
-            <a:r>
-              <a:rPr sz="1800" b="0">
-                <a:solidFill>
-                  <a:srgbClr val="222B22"/>
-                </a:solidFill>
-                <a:latin typeface="Calibri"/>
-              </a:rPr>
-              <a:t>Session 22 commissions what the map has built — </a:t>
-            </a:r>
-            <a:r>
-              <a:rPr sz="1800" b="1">
-                <a:solidFill>
-                  <a:srgbClr val="2C5F2D"/>
-                </a:solidFill>
-                <a:latin typeface="Calibri"/>
-              </a:rPr>
-              <a:t>all four Connects</a:t>
-            </a:r>
-            <a:r>
-              <a:rPr sz="1800" b="0">
-                <a:solidFill>
-                  <a:srgbClr val="222B22"/>
-                </a:solidFill>
-                <a:latin typeface="Calibri"/>
-              </a:rPr>
-              <a:t>, carried by the Companions. Each connection makes the next one real (Matt. 22:37–40).</a:t>
-            </a:r>
-          </a:p>
-        </p:txBody>
-      </p:sp>
-      <p:sp>
-        <p:nvSpPr>
-          <p:cNvPr id="90" name="SlideNum"/>
-          <p:cNvSpPr txBox="1"/>
-          <p:nvPr/>
-        </p:nvSpPr>
-        <p:spPr>
-          <a:xfrm>
-            <a:off x="11384280" y="6446520"/>
-            <a:ext cx="640080" cy="292608"/>
-          </a:xfrm>
-          <a:prstGeom prst="rect">
-            <a:avLst/>
-          </a:prstGeom>
-          <a:noFill/>
-        </p:spPr>
-        <p:txBody>
-          <a:bodyPr wrap="none" lIns="0" tIns="0" rIns="45720" bIns="0" anchor="ctr"/>
-          <a:lstStyle/>
-          <a:p>
-            <a:pPr algn="r"/>
-            <a:r>
-              <a:t>266a</a:t>
-            </a:r>
-            <a:endParaRPr sz="1000" b="1">
-              <a:solidFill>
-                <a:srgbClr val="7A8A6E"/>
-              </a:solidFill>
-              <a:latin typeface="Calibri"/>
-            </a:endParaRPr>
-          </a:p>
-        </p:txBody>
-      </p:sp>
-    </p:spTree>
-  </p:cSld>
-  <p:clrMapOvr>
-    <a:masterClrMapping/>
-  </p:clrMapOvr>
-</p:sld>
-</file>
-
-<file path=ppt/slides/slide15.xml><?xml version="1.0" encoding="utf-8"?>
-<p:sld xmlns:a="http://schemas.openxmlformats.org/drawingml/2006/main" xmlns:p="http://schemas.openxmlformats.org/presentationml/2006/main" xmlns:r="http://schemas.openxmlformats.org/officeDocument/2006/relationships">
-  <p:cSld>
-    <p:spTree>
-      <p:nvGrpSpPr>
-        <p:cNvPr id="1" name=""/>
-        <p:cNvGrpSpPr/>
-        <p:nvPr/>
-      </p:nvGrpSpPr>
-      <p:grpSpPr/>
-      <p:sp>
-        <p:nvSpPr>
-          <p:cNvPr id="2" name="Rectangle 1"/>
-          <p:cNvSpPr/>
-          <p:nvPr/>
-        </p:nvSpPr>
-        <p:spPr>
-          <a:xfrm>
-            <a:off x="0" y="0"/>
-            <a:ext cx="12192000" cy="6858000"/>
-          </a:xfrm>
-          <a:prstGeom prst="rect">
-            <a:avLst/>
-          </a:prstGeom>
-          <a:solidFill>
-            <a:srgbClr val="FFFFFF"/>
-          </a:solidFill>
-          <a:ln>
-            <a:noFill/>
-          </a:ln>
-          <a:effectLst/>
-        </p:spPr>
-        <p:style>
-          <a:lnRef idx="1">
-            <a:schemeClr val="accent1"/>
-          </a:lnRef>
-          <a:fillRef idx="3">
-            <a:schemeClr val="accent1"/>
-          </a:fillRef>
-          <a:effectRef idx="2">
-            <a:schemeClr val="accent1"/>
-          </a:effectRef>
-          <a:fontRef idx="minor">
-            <a:schemeClr val="lt1"/>
-          </a:fontRef>
-        </p:style>
-        <p:txBody>
-          <a:bodyPr rtlCol="0" anchor="ctr"/>
-          <a:lstStyle/>
-          <a:p>
-            <a:pPr algn="ctr"/>
-          </a:p>
-        </p:txBody>
-      </p:sp>
-      <p:sp>
-        <p:nvSpPr>
-          <p:cNvPr id="3" name="TextBox 2"/>
-          <p:cNvSpPr txBox="1"/>
-          <p:nvPr/>
-        </p:nvSpPr>
-        <p:spPr>
-          <a:xfrm>
-            <a:off x="822960" y="502920"/>
-            <a:ext cx="10515600" cy="822960"/>
-          </a:xfrm>
-          <a:prstGeom prst="rect">
-            <a:avLst/>
-          </a:prstGeom>
-          <a:noFill/>
-        </p:spPr>
-        <p:txBody>
-          <a:bodyPr wrap="square">
-            <a:spAutoFit/>
-          </a:bodyPr>
-          <a:lstStyle/>
-          <a:p>
-            <a:r>
-              <a:rPr sz="2800" b="1">
-                <a:solidFill>
-                  <a:srgbClr val="2C5F2D"/>
-                </a:solidFill>
-                <a:latin typeface="Cambria"/>
-              </a:rPr>
-              <a:t>The Take-Home Sheet — the Daily Rhythm</a:t>
-            </a:r>
-          </a:p>
-        </p:txBody>
-      </p:sp>
-      <p:pic>
-        <p:nvPicPr>
-          <p:cNvPr id="4" name="Picture 3" descr="s22_part1.png"/>
-          <p:cNvPicPr>
-            <a:picLocks noChangeAspect="1"/>
-          </p:cNvPicPr>
-          <p:nvPr/>
-        </p:nvPicPr>
-        <p:blipFill>
-          <a:blip r:embed="rId2"/>
-          <a:stretch>
-            <a:fillRect/>
-          </a:stretch>
-        </p:blipFill>
-        <p:spPr>
-          <a:xfrm>
-            <a:off x="1798167" y="1463040"/>
-            <a:ext cx="8595360" cy="4457308"/>
-          </a:xfrm>
-          <a:prstGeom prst="rect">
-            <a:avLst/>
-          </a:prstGeom>
-          <a:ln w="12700">
-            <a:solidFill>
-              <a:srgbClr val="C8C8C8"/>
-            </a:solidFill>
-          </a:ln>
-        </p:spPr>
-      </p:pic>
-      <p:sp>
-        <p:nvSpPr>
-          <p:cNvPr id="5" name="TextBox 4"/>
-          <p:cNvSpPr txBox="1"/>
-          <p:nvPr/>
-        </p:nvSpPr>
-        <p:spPr>
-          <a:xfrm>
-            <a:off x="822960" y="6355080"/>
-            <a:ext cx="10515600" cy="411480"/>
-          </a:xfrm>
-          <a:prstGeom prst="rect">
-            <a:avLst/>
-          </a:prstGeom>
-          <a:noFill/>
-        </p:spPr>
-        <p:txBody>
-          <a:bodyPr wrap="square">
-            <a:spAutoFit/>
-          </a:bodyPr>
-          <a:lstStyle/>
-          <a:p>
-            <a:r>
-              <a:rPr sz="1400" i="1">
-                <a:solidFill>
-                  <a:srgbClr val="595959"/>
-                </a:solidFill>
-                <a:latin typeface="Calibri"/>
-              </a:rPr>
-              <a:t>Handed out now — this is the sheet in your hands.</a:t>
-            </a:r>
-          </a:p>
-        </p:txBody>
-      </p:sp>
-      <p:sp>
-        <p:nvSpPr>
-          <p:cNvPr id="90" name="SlideNum"/>
-          <p:cNvSpPr txBox="1"/>
-          <p:nvPr/>
-        </p:nvSpPr>
-        <p:spPr>
-          <a:xfrm>
-            <a:off x="11384280" y="6446520"/>
-            <a:ext cx="640080" cy="292608"/>
-          </a:xfrm>
-          <a:prstGeom prst="rect">
-            <a:avLst/>
-          </a:prstGeom>
-          <a:noFill/>
-        </p:spPr>
-        <p:txBody>
-          <a:bodyPr wrap="none" lIns="0" tIns="0" rIns="45720" bIns="0" anchor="ctr"/>
-          <a:lstStyle/>
-          <a:p>
-            <a:pPr algn="r"/>
-            <a:r>
-              <a:t>275</a:t>
-            </a:r>
-            <a:endParaRPr sz="1000" b="1">
-              <a:solidFill>
-                <a:srgbClr val="7A8A6E"/>
-              </a:solidFill>
-              <a:latin typeface="Calibri"/>
-            </a:endParaRPr>
-          </a:p>
-        </p:txBody>
-      </p:sp>
-    </p:spTree>
-  </p:cSld>
-  <p:clrMapOvr>
-    <a:masterClrMapping/>
-  </p:clrMapOvr>
-</p:sld>
-</file>
-
-<file path=ppt/slides/slide16.xml><?xml version="1.0" encoding="utf-8"?>
-<p:sld xmlns:a="http://schemas.openxmlformats.org/drawingml/2006/main" xmlns:p="http://schemas.openxmlformats.org/presentationml/2006/main" xmlns:r="http://schemas.openxmlformats.org/officeDocument/2006/relationships">
-  <p:cSld>
-    <p:spTree>
-      <p:nvGrpSpPr>
-        <p:cNvPr id="1" name=""/>
-        <p:cNvGrpSpPr/>
-        <p:nvPr/>
-      </p:nvGrpSpPr>
-      <p:grpSpPr/>
-      <p:sp>
-        <p:nvSpPr>
-          <p:cNvPr id="2" name="Rectangle 1"/>
-          <p:cNvSpPr/>
-          <p:nvPr/>
-        </p:nvSpPr>
-        <p:spPr>
-          <a:xfrm>
-            <a:off x="0" y="0"/>
-            <a:ext cx="12192000" cy="6858000"/>
-          </a:xfrm>
-          <a:prstGeom prst="rect">
-            <a:avLst/>
-          </a:prstGeom>
-          <a:solidFill>
-            <a:srgbClr val="FFFFFF"/>
-          </a:solidFill>
-          <a:ln>
-            <a:noFill/>
-          </a:ln>
-          <a:effectLst/>
-        </p:spPr>
-        <p:style>
-          <a:lnRef idx="1">
-            <a:schemeClr val="accent1"/>
-          </a:lnRef>
-          <a:fillRef idx="3">
-            <a:schemeClr val="accent1"/>
-          </a:fillRef>
-          <a:effectRef idx="2">
-            <a:schemeClr val="accent1"/>
-          </a:effectRef>
-          <a:fontRef idx="minor">
-            <a:schemeClr val="lt1"/>
-          </a:fontRef>
-        </p:style>
-        <p:txBody>
-          <a:bodyPr rtlCol="0" anchor="ctr"/>
-          <a:lstStyle/>
-          <a:p>
-            <a:pPr algn="ctr"/>
-          </a:p>
-        </p:txBody>
-      </p:sp>
-      <p:sp>
-        <p:nvSpPr>
-          <p:cNvPr id="3" name="TextBox 2"/>
-          <p:cNvSpPr txBox="1"/>
-          <p:nvPr/>
-        </p:nvSpPr>
-        <p:spPr>
-          <a:xfrm>
-            <a:off x="822960" y="502920"/>
-            <a:ext cx="10515600" cy="822960"/>
-          </a:xfrm>
-          <a:prstGeom prst="rect">
-            <a:avLst/>
-          </a:prstGeom>
-          <a:noFill/>
-        </p:spPr>
-        <p:txBody>
-          <a:bodyPr wrap="square">
-            <a:spAutoFit/>
-          </a:bodyPr>
-          <a:lstStyle/>
-          <a:p>
-            <a:r>
-              <a:rPr sz="2800" b="1">
-                <a:solidFill>
-                  <a:srgbClr val="2C5F2D"/>
-                </a:solidFill>
-                <a:latin typeface="Cambria"/>
-              </a:rPr>
-              <a:t>The Take-Home Sheet — the Four Parts</a:t>
-            </a:r>
-          </a:p>
-        </p:txBody>
-      </p:sp>
-      <p:pic>
-        <p:nvPicPr>
-          <p:cNvPr id="4" name="Picture 3" descr="s22_part2.png"/>
-          <p:cNvPicPr>
-            <a:picLocks noChangeAspect="1"/>
-          </p:cNvPicPr>
-          <p:nvPr/>
-        </p:nvPicPr>
-        <p:blipFill>
-          <a:blip r:embed="rId2"/>
-          <a:stretch>
-            <a:fillRect/>
-          </a:stretch>
-        </p:blipFill>
-        <p:spPr>
-          <a:xfrm>
-            <a:off x="2262810" y="1463040"/>
-            <a:ext cx="7666074" cy="4709160"/>
-          </a:xfrm>
-          <a:prstGeom prst="rect">
-            <a:avLst/>
-          </a:prstGeom>
-          <a:ln w="12700">
-            <a:solidFill>
-              <a:srgbClr val="C8C8C8"/>
-            </a:solidFill>
-          </a:ln>
-        </p:spPr>
-      </p:pic>
-      <p:sp>
-        <p:nvSpPr>
-          <p:cNvPr id="5" name="TextBox 4"/>
-          <p:cNvSpPr txBox="1"/>
-          <p:nvPr/>
-        </p:nvSpPr>
-        <p:spPr>
-          <a:xfrm>
-            <a:off x="822960" y="6355080"/>
-            <a:ext cx="10515600" cy="411480"/>
-          </a:xfrm>
-          <a:prstGeom prst="rect">
-            <a:avLst/>
-          </a:prstGeom>
-          <a:noFill/>
-        </p:spPr>
-        <p:txBody>
-          <a:bodyPr wrap="square">
-            <a:spAutoFit/>
-          </a:bodyPr>
-          <a:lstStyle/>
-          <a:p>
-            <a:r>
-              <a:rPr sz="1400" i="1">
-                <a:solidFill>
-                  <a:srgbClr val="595959"/>
-                </a:solidFill>
-                <a:latin typeface="Calibri"/>
-              </a:rPr>
-              <a:t>One practice at a time — and a partner expecting you at the end of week one.</a:t>
-            </a:r>
-          </a:p>
-        </p:txBody>
-      </p:sp>
-      <p:sp>
-        <p:nvSpPr>
-          <p:cNvPr id="90" name="SlideNum"/>
-          <p:cNvSpPr txBox="1"/>
-          <p:nvPr/>
-        </p:nvSpPr>
-        <p:spPr>
-          <a:xfrm>
-            <a:off x="11384280" y="6446520"/>
-            <a:ext cx="640080" cy="292608"/>
-          </a:xfrm>
-          <a:prstGeom prst="rect">
-            <a:avLst/>
-          </a:prstGeom>
-          <a:noFill/>
-        </p:spPr>
-        <p:txBody>
-          <a:bodyPr wrap="none" lIns="0" tIns="0" rIns="45720" bIns="0" anchor="ctr"/>
-          <a:lstStyle/>
-          <a:p>
-            <a:pPr algn="r"/>
-            <a:r>
-              <a:t>275a</a:t>
             </a:r>
             <a:endParaRPr sz="1000" b="1">
               <a:solidFill>
@@ -6659,6 +6751,211 @@
 </file>
 
 <file path=ppt/slides/slide3.xml><?xml version="1.0" encoding="utf-8"?>
+<p:sld xmlns:a="http://schemas.openxmlformats.org/drawingml/2006/main" xmlns:p="http://schemas.openxmlformats.org/presentationml/2006/main" xmlns:r="http://schemas.openxmlformats.org/officeDocument/2006/relationships">
+  <p:cSld>
+    <p:spTree>
+      <p:nvGrpSpPr>
+        <p:cNvPr id="1" name=""/>
+        <p:cNvGrpSpPr/>
+        <p:nvPr/>
+      </p:nvGrpSpPr>
+      <p:grpSpPr/>
+      <p:sp>
+        <p:nvSpPr>
+          <p:cNvPr id="2" name="Rectangle 1"/>
+          <p:cNvSpPr/>
+          <p:nvPr/>
+        </p:nvSpPr>
+        <p:spPr>
+          <a:xfrm>
+            <a:off x="0" y="0"/>
+            <a:ext cx="12192000" cy="6858000"/>
+          </a:xfrm>
+          <a:prstGeom prst="rect">
+            <a:avLst/>
+          </a:prstGeom>
+          <a:solidFill>
+            <a:srgbClr val="FFFFFF"/>
+          </a:solidFill>
+          <a:ln>
+            <a:noFill/>
+          </a:ln>
+          <a:effectLst/>
+        </p:spPr>
+        <p:style>
+          <a:lnRef idx="1">
+            <a:schemeClr val="accent1"/>
+          </a:lnRef>
+          <a:fillRef idx="3">
+            <a:schemeClr val="accent1"/>
+          </a:fillRef>
+          <a:effectRef idx="2">
+            <a:schemeClr val="accent1"/>
+          </a:effectRef>
+          <a:fontRef idx="minor">
+            <a:schemeClr val="lt1"/>
+          </a:fontRef>
+        </p:style>
+        <p:txBody>
+          <a:bodyPr rtlCol="0" anchor="ctr"/>
+          <a:lstStyle/>
+          <a:p>
+            <a:pPr algn="ctr"/>
+          </a:p>
+        </p:txBody>
+      </p:sp>
+      <p:sp>
+        <p:nvSpPr>
+          <p:cNvPr id="3" name="TextBox 2"/>
+          <p:cNvSpPr txBox="1"/>
+          <p:nvPr/>
+        </p:nvSpPr>
+        <p:spPr>
+          <a:xfrm>
+            <a:off x="822960" y="502920"/>
+            <a:ext cx="10515600" cy="822960"/>
+          </a:xfrm>
+          <a:prstGeom prst="rect">
+            <a:avLst/>
+          </a:prstGeom>
+          <a:noFill/>
+        </p:spPr>
+        <p:txBody>
+          <a:bodyPr wrap="square">
+            <a:spAutoFit/>
+          </a:bodyPr>
+          <a:lstStyle/>
+          <a:p>
+            <a:r>
+              <a:rPr sz="2800" b="1">
+                <a:solidFill>
+                  <a:srgbClr val="2C5F2D"/>
+                </a:solidFill>
+                <a:latin typeface="Cambria"/>
+              </a:rPr>
+              <a:t>Where We Are — the Four Connects</a:t>
+            </a:r>
+          </a:p>
+        </p:txBody>
+      </p:sp>
+      <p:sp>
+        <p:nvSpPr>
+          <p:cNvPr id="5" name="TextBox 4"/>
+          <p:cNvSpPr txBox="1"/>
+          <p:nvPr/>
+        </p:nvSpPr>
+        <p:spPr>
+          <a:xfrm>
+            <a:off x="822960" y="5623560"/>
+            <a:ext cx="10515600" cy="914400"/>
+          </a:xfrm>
+          <a:prstGeom prst="rect">
+            <a:avLst/>
+          </a:prstGeom>
+          <a:noFill/>
+        </p:spPr>
+        <p:txBody>
+          <a:bodyPr wrap="square">
+            <a:spAutoFit/>
+          </a:bodyPr>
+          <a:lstStyle/>
+          <a:p>
+            <a:r>
+              <a:rPr sz="1800" b="0">
+                <a:solidFill>
+                  <a:srgbClr val="222B22"/>
+                </a:solidFill>
+                <a:latin typeface="Calibri"/>
+              </a:rPr>
+              <a:t>Session 22 commissions what the map has built — </a:t>
+            </a:r>
+            <a:r>
+              <a:rPr sz="1800" b="1">
+                <a:solidFill>
+                  <a:srgbClr val="2C5F2D"/>
+                </a:solidFill>
+                <a:latin typeface="Calibri"/>
+              </a:rPr>
+              <a:t>all four Connects</a:t>
+            </a:r>
+            <a:r>
+              <a:rPr sz="1800" b="0">
+                <a:solidFill>
+                  <a:srgbClr val="222B22"/>
+                </a:solidFill>
+                <a:latin typeface="Calibri"/>
+              </a:rPr>
+              <a:t>, carried by the Companions. Each connection makes the next one real (Matt. 22:37–40).</a:t>
+            </a:r>
+          </a:p>
+        </p:txBody>
+      </p:sp>
+      <p:sp>
+        <p:nvSpPr>
+          <p:cNvPr id="90" name="SlideNum"/>
+          <p:cNvSpPr txBox="1"/>
+          <p:nvPr/>
+        </p:nvSpPr>
+        <p:spPr>
+          <a:xfrm>
+            <a:off x="11384280" y="6446520"/>
+            <a:ext cx="640080" cy="292608"/>
+          </a:xfrm>
+          <a:prstGeom prst="rect">
+            <a:avLst/>
+          </a:prstGeom>
+          <a:noFill/>
+        </p:spPr>
+        <p:txBody>
+          <a:bodyPr wrap="none" lIns="0" tIns="0" rIns="45720" bIns="0" anchor="ctr"/>
+          <a:lstStyle/>
+          <a:p>
+            <a:pPr algn="r"/>
+            <a:r>
+              <a:t>266a</a:t>
+            </a:r>
+            <a:endParaRPr sz="1000" b="1">
+              <a:solidFill>
+                <a:srgbClr val="7A8A6E"/>
+              </a:solidFill>
+              <a:latin typeface="Calibri"/>
+            </a:endParaRPr>
+          </a:p>
+        </p:txBody>
+      </p:sp>
+      <p:pic>
+        <p:nvPicPr>
+          <p:cNvPr id="91" name="Picture 90" descr="four-connects.png"/>
+          <p:cNvPicPr>
+            <a:picLocks noChangeAspect="1"/>
+          </p:cNvPicPr>
+          <p:nvPr/>
+        </p:nvPicPr>
+        <p:blipFill>
+          <a:blip r:embed="rId4"/>
+          <a:stretch>
+            <a:fillRect/>
+          </a:stretch>
+        </p:blipFill>
+        <p:spPr>
+          <a:xfrm>
+            <a:off x="932688" y="1645920"/>
+            <a:ext cx="10332720" cy="3708663"/>
+          </a:xfrm>
+          <a:prstGeom prst="rect">
+            <a:avLst/>
+          </a:prstGeom>
+        </p:spPr>
+      </p:pic>
+    </p:spTree>
+  </p:cSld>
+  <p:clrMapOvr>
+    <a:masterClrMapping/>
+  </p:clrMapOvr>
+</p:sld>
+</file>
+
+<file path=ppt/slides/slide4.xml><?xml version="1.0" encoding="utf-8"?>
 <p:sld xmlns:a="http://schemas.openxmlformats.org/drawingml/2006/main" xmlns:r="http://schemas.openxmlformats.org/officeDocument/2006/relationships" xmlns:p="http://schemas.openxmlformats.org/presentationml/2006/main">
   <p:cSld>
     <p:spTree>
@@ -7084,7 +7381,7 @@
 </p:sld>
 </file>
 
-<file path=ppt/slides/slide4.xml><?xml version="1.0" encoding="utf-8"?>
+<file path=ppt/slides/slide5.xml><?xml version="1.0" encoding="utf-8"?>
 <p:sld xmlns:a="http://schemas.openxmlformats.org/drawingml/2006/main" xmlns:r="http://schemas.openxmlformats.org/officeDocument/2006/relationships" xmlns:p="http://schemas.openxmlformats.org/presentationml/2006/main">
   <p:cSld>
     <p:spTree>
@@ -7417,303 +7714,6 @@
 </p:sld>
 </file>
 
-<file path=ppt/slides/slide5.xml><?xml version="1.0" encoding="utf-8"?>
-<p:sld xmlns:a="http://schemas.openxmlformats.org/drawingml/2006/main" xmlns:r="http://schemas.openxmlformats.org/officeDocument/2006/relationships" xmlns:p="http://schemas.openxmlformats.org/presentationml/2006/main">
-  <p:cSld>
-    <p:spTree>
-      <p:nvGrpSpPr>
-        <p:cNvPr id="1" name=""/>
-        <p:cNvGrpSpPr/>
-        <p:nvPr/>
-      </p:nvGrpSpPr>
-      <p:grpSpPr>
-        <a:xfrm>
-          <a:off x="0" y="0"/>
-          <a:ext cx="0" cy="0"/>
-          <a:chOff x="0" y="0"/>
-          <a:chExt cx="0" cy="0"/>
-        </a:xfrm>
-      </p:grpSpPr>
-      <p:sp>
-        <p:nvSpPr>
-          <p:cNvPr id="2" name="Rectangle 1"/>
-          <p:cNvSpPr/>
-          <p:nvPr/>
-        </p:nvSpPr>
-        <p:spPr>
-          <a:xfrm>
-            <a:off x="0" y="0"/>
-            <a:ext cx="12191695" cy="6858000"/>
-          </a:xfrm>
-          <a:prstGeom prst="rect">
-            <a:avLst/>
-          </a:prstGeom>
-          <a:solidFill>
-            <a:srgbClr val="FFFFFF"/>
-          </a:solidFill>
-          <a:ln>
-            <a:noFill/>
-          </a:ln>
-        </p:spPr>
-        <p:txBody>
-          <a:bodyPr/>
-          <a:lstStyle/>
-          <a:p>
-            <a:endParaRPr/>
-          </a:p>
-        </p:txBody>
-      </p:sp>
-      <p:sp>
-        <p:nvSpPr>
-          <p:cNvPr id="3" name="TextBox 2"/>
-          <p:cNvSpPr txBox="1"/>
-          <p:nvPr/>
-        </p:nvSpPr>
-        <p:spPr>
-          <a:xfrm>
-            <a:off x="822960" y="502920"/>
-            <a:ext cx="10515600" cy="822960"/>
-          </a:xfrm>
-          <a:prstGeom prst="rect">
-            <a:avLst/>
-          </a:prstGeom>
-          <a:noFill/>
-        </p:spPr>
-        <p:txBody>
-          <a:bodyPr wrap="square">
-            <a:spAutoFit/>
-          </a:bodyPr>
-          <a:lstStyle/>
-          <a:p>
-            <a:pPr algn="l">
-              <a:spcAft>
-                <a:spcPts val="600"/>
-              </a:spcAft>
-            </a:pPr>
-            <a:r>
-              <a:rPr sz="2800" b="1" i="0">
-                <a:solidFill>
-                  <a:srgbClr val="2C5F2D"/>
-                </a:solidFill>
-                <a:latin typeface="Cambria"/>
-              </a:rPr>
-              <a:t>The Final Rep — the Container Opened</a:t>
-            </a:r>
-          </a:p>
-        </p:txBody>
-      </p:sp>
-      <p:sp>
-        <p:nvSpPr>
-          <p:cNvPr id="4" name="TextBox 4"/>
-          <p:cNvSpPr txBox="1"/>
-          <p:nvPr/>
-        </p:nvSpPr>
-        <p:spPr>
-          <a:xfrm>
-            <a:off x="822960" y="1554480"/>
-            <a:ext cx="10515600" cy="4892040"/>
-          </a:xfrm>
-          <a:prstGeom prst="rect">
-            <a:avLst/>
-          </a:prstGeom>
-          <a:noFill/>
-        </p:spPr>
-        <p:txBody>
-          <a:bodyPr wrap="square" lIns="91440" tIns="91440" rIns="91440" bIns="91440"/>
-          <a:lstStyle/>
-          <a:p>
-            <a:pPr marL="274320" indent="-274320">
-              <a:spcAft>
-                <a:spcPts val="750"/>
-              </a:spcAft>
-            </a:pPr>
-            <a:r>
-              <a:rPr sz="2200" b="1" i="0">
-                <a:solidFill>
-                  <a:srgbClr val="97BC62"/>
-                </a:solidFill>
-                <a:latin typeface="Calibri"/>
-              </a:rPr>
-              <a:t>•  </a:t>
-            </a:r>
-            <a:r>
-              <a:rPr sz="2200" b="0" i="0">
-                <a:solidFill>
-                  <a:srgbClr val="222B22"/>
-                </a:solidFill>
-                <a:latin typeface="Calibri"/>
-              </a:rPr>
-              <a:t>Container fluency is FC1’s spine competency — Safe, Present, Clear, Intentional, from memory, without a script. Tonight is the witness of it, not the exam.</a:t>
-            </a:r>
-          </a:p>
-          <a:p>
-            <a:pPr marL="274320" indent="-274320">
-              <a:spcAft>
-                <a:spcPts val="750"/>
-              </a:spcAft>
-            </a:pPr>
-            <a:r>
-              <a:rPr sz="2200" b="1" i="0">
-                <a:solidFill>
-                  <a:srgbClr val="97BC62"/>
-                </a:solidFill>
-                <a:latin typeface="Calibri"/>
-              </a:rPr>
-              <a:t>•  </a:t>
-            </a:r>
-            <a:r>
-              <a:rPr sz="2200" b="0" i="0">
-                <a:solidFill>
-                  <a:srgbClr val="222B22"/>
-                </a:solidFill>
-                <a:latin typeface="Calibri"/>
-              </a:rPr>
-              <a:t>One senior opens the container whole — welcome, phones, the standing circle, one-word check-in, put out / bring in, the spoken commitment, opening prayer</a:t>
-            </a:r>
-          </a:p>
-          <a:p>
-            <a:pPr marL="685800" indent="-274320">
-              <a:spcAft>
-                <a:spcPts val="550"/>
-              </a:spcAft>
-            </a:pPr>
-            <a:r>
-              <a:rPr sz="1800" b="1" i="0">
-                <a:solidFill>
-                  <a:srgbClr val="97BC62"/>
-                </a:solidFill>
-                <a:latin typeface="Calibri"/>
-              </a:rPr>
-              <a:t>–  </a:t>
-            </a:r>
-            <a:r>
-              <a:rPr sz="1800" b="0" i="1">
-                <a:solidFill>
-                  <a:srgbClr val="222B22"/>
-                </a:solidFill>
-                <a:latin typeface="Calibri"/>
-              </a:rPr>
-              <a:t>“I am here. I am paying attention. I am willing to be moved.”</a:t>
-            </a:r>
-          </a:p>
-          <a:p>
-            <a:pPr marL="274320" indent="-274320">
-              <a:spcAft>
-                <a:spcPts val="750"/>
-              </a:spcAft>
-            </a:pPr>
-            <a:r>
-              <a:rPr sz="2200" b="1" i="0">
-                <a:solidFill>
-                  <a:srgbClr val="97BC62"/>
-                </a:solidFill>
-                <a:latin typeface="Calibri"/>
-              </a:rPr>
-              <a:t>•  </a:t>
-            </a:r>
-            <a:r>
-              <a:rPr sz="2200" b="0" i="0">
-                <a:solidFill>
-                  <a:srgbClr val="222B22"/>
-                </a:solidFill>
-                <a:latin typeface="Calibri"/>
-              </a:rPr>
-              <a:t>Every other senior speaks one condition from memory — in their own words, with one short true story of holding it while leading this year</a:t>
-            </a:r>
-          </a:p>
-          <a:p>
-            <a:pPr marL="274320" indent="-274320">
-              <a:spcAft>
-                <a:spcPts val="750"/>
-              </a:spcAft>
-            </a:pPr>
-            <a:r>
-              <a:rPr sz="2200" b="1" i="0">
-                <a:solidFill>
-                  <a:srgbClr val="97BC62"/>
-                </a:solidFill>
-                <a:latin typeface="Calibri"/>
-              </a:rPr>
-              <a:t>•  </a:t>
-            </a:r>
-            <a:r>
-              <a:rPr sz="2200" b="0" i="0">
-                <a:solidFill>
-                  <a:srgbClr val="222B22"/>
-                </a:solidFill>
-                <a:latin typeface="Calibri"/>
-              </a:rPr>
-              <a:t>One senior is held in reserve — tonight’s close is theirs</a:t>
-            </a:r>
-          </a:p>
-          <a:p>
-            <a:pPr marL="274320" indent="-274320">
-              <a:spcAft>
-                <a:spcPts val="750"/>
-              </a:spcAft>
-            </a:pPr>
-            <a:r>
-              <a:rPr sz="2200" b="1" i="0">
-                <a:solidFill>
-                  <a:srgbClr val="97BC62"/>
-                </a:solidFill>
-                <a:latin typeface="Calibri"/>
-              </a:rPr>
-              <a:t>•  </a:t>
-            </a:r>
-            <a:r>
-              <a:rPr sz="2200" b="0" i="0">
-                <a:solidFill>
-                  <a:srgbClr val="222B22"/>
-                </a:solidFill>
-                <a:latin typeface="Calibri"/>
-              </a:rPr>
-              <a:t>The gate is fluency across the arc, not perfection tonight. A stumble is not a fail.</a:t>
-            </a:r>
-          </a:p>
-        </p:txBody>
-      </p:sp>
-      <p:sp>
-        <p:nvSpPr>
-          <p:cNvPr id="90" name="SlideNum"/>
-          <p:cNvSpPr txBox="1"/>
-          <p:nvPr/>
-        </p:nvSpPr>
-        <p:spPr>
-          <a:xfrm>
-            <a:off x="11384280" y="6446520"/>
-            <a:ext cx="640080" cy="292608"/>
-          </a:xfrm>
-          <a:prstGeom prst="rect">
-            <a:avLst/>
-          </a:prstGeom>
-          <a:noFill/>
-        </p:spPr>
-        <p:txBody>
-          <a:bodyPr wrap="none" lIns="0" tIns="0" rIns="45720" bIns="0" anchor="ctr"/>
-          <a:lstStyle/>
-          <a:p>
-            <a:pPr algn="r"/>
-            <a:r>
-              <a:t>269</a:t>
-            </a:r>
-            <a:endParaRPr sz="1000" b="1">
-              <a:solidFill>
-                <a:srgbClr val="7A8A6E"/>
-              </a:solidFill>
-              <a:latin typeface="Calibri"/>
-            </a:endParaRPr>
-          </a:p>
-        </p:txBody>
-      </p:sp>
-    </p:spTree>
-  </p:cSld>
-  <p:clrMapOvr>
-    <a:masterClrMapping/>
-  </p:clrMapOvr>
-</p:sld>
-</file>
-
 <file path=ppt/slides/slide6.xml><?xml version="1.0" encoding="utf-8"?>
 <p:sld xmlns:a="http://schemas.openxmlformats.org/drawingml/2006/main" xmlns:r="http://schemas.openxmlformats.org/officeDocument/2006/relationships" xmlns:p="http://schemas.openxmlformats.org/presentationml/2006/main">
   <p:cSld>
@@ -7794,7 +7794,7 @@
                 </a:solidFill>
                 <a:latin typeface="Cambria"/>
               </a:rPr>
-              <a:t>The Word Over the Night</a:t>
+              <a:t>The Final Rep — the Container Opened</a:t>
             </a:r>
           </a:p>
         </p:txBody>
@@ -7807,8 +7807,8 @@
         </p:nvSpPr>
         <p:spPr>
           <a:xfrm>
-            <a:off x="822960" y="1600200"/>
-            <a:ext cx="5669280" cy="4572000"/>
+            <a:off x="822960" y="1554480"/>
+            <a:ext cx="10515600" cy="4892040"/>
           </a:xfrm>
           <a:prstGeom prst="rect">
             <a:avLst/>
@@ -7821,11 +7821,11 @@
           <a:p>
             <a:pPr marL="274320" indent="-274320">
               <a:spcAft>
-                <a:spcPts val="800"/>
+                <a:spcPts val="750"/>
               </a:spcAft>
             </a:pPr>
             <a:r>
-              <a:rPr sz="2000" b="1" i="0">
+              <a:rPr sz="2200" b="1" i="0">
                 <a:solidFill>
                   <a:srgbClr val="97BC62"/>
                 </a:solidFill>
@@ -7834,23 +7834,23 @@
               <a:t>•  </a:t>
             </a:r>
             <a:r>
-              <a:rPr sz="2000" b="0" i="0">
+              <a:rPr sz="2200" b="0" i="0">
                 <a:solidFill>
                   <a:srgbClr val="222B22"/>
                 </a:solidFill>
                 <a:latin typeface="Calibri"/>
               </a:rPr>
-              <a:t>Count the generations: Paul. Timothy. Faithful ones. Others also. Four generations in a single sentence — and the handing happens “in the presence of many witnesses.” In a room like this one.</a:t>
+              <a:t>Container fluency is FC1’s spine competency — Safe, Present, Clear, Intentional, from memory, without a script. Tonight is the witness of it, not the exam.</a:t>
             </a:r>
           </a:p>
           <a:p>
             <a:pPr marL="274320" indent="-274320">
               <a:spcAft>
-                <a:spcPts val="800"/>
+                <a:spcPts val="750"/>
               </a:spcAft>
             </a:pPr>
             <a:r>
-              <a:rPr sz="2000" b="1" i="0">
+              <a:rPr sz="2200" b="1" i="0">
                 <a:solidFill>
                   <a:srgbClr val="97BC62"/>
                 </a:solidFill>
@@ -7859,23 +7859,48 @@
               <a:t>•  </a:t>
             </a:r>
             <a:r>
-              <a:rPr sz="2000" b="0" i="0">
+              <a:rPr sz="2200" b="0" i="0">
                 <a:solidFill>
                   <a:srgbClr val="222B22"/>
                 </a:solidFill>
                 <a:latin typeface="Calibri"/>
               </a:rPr>
-              <a:t>Tonight the third generation stands up in front of the second — and the fourth is already sitting in the room</a:t>
+              <a:t>One senior opens the container whole — welcome, phones, the standing circle, one-word check-in, put out / bring in, the spoken commitment, opening prayer</a:t>
+            </a:r>
+          </a:p>
+          <a:p>
+            <a:pPr marL="685800" indent="-274320">
+              <a:spcAft>
+                <a:spcPts val="550"/>
+              </a:spcAft>
+            </a:pPr>
+            <a:r>
+              <a:rPr sz="1800" b="1" i="0">
+                <a:solidFill>
+                  <a:srgbClr val="97BC62"/>
+                </a:solidFill>
+                <a:latin typeface="Calibri"/>
+              </a:rPr>
+              <a:t>–  </a:t>
+            </a:r>
+            <a:r>
+              <a:rPr sz="1800" b="0" i="1">
+                <a:solidFill>
+                  <a:srgbClr val="222B22"/>
+                </a:solidFill>
+                <a:latin typeface="Calibri"/>
+              </a:rPr>
+              <a:t>“I am here. I am paying attention. I am willing to be moved.”</a:t>
             </a:r>
           </a:p>
           <a:p>
             <a:pPr marL="274320" indent="-274320">
               <a:spcAft>
-                <a:spcPts val="800"/>
+                <a:spcPts val="750"/>
               </a:spcAft>
             </a:pPr>
             <a:r>
-              <a:rPr sz="2000" b="1" i="0">
+              <a:rPr sz="2200" b="1" i="0">
                 <a:solidFill>
                   <a:srgbClr val="97BC62"/>
                 </a:solidFill>
@@ -7884,23 +7909,23 @@
               <a:t>•  </a:t>
             </a:r>
             <a:r>
-              <a:rPr sz="2000" b="0" i="0">
+              <a:rPr sz="2200" b="0" i="0">
                 <a:solidFill>
                   <a:srgbClr val="222B22"/>
                 </a:solidFill>
                 <a:latin typeface="Calibri"/>
               </a:rPr>
-              <a:t>1 Timothy 4:12 — “Let no one despise you for your youth, but set the believers an example in speech, in conduct, in love, in faith, in purity.”</a:t>
+              <a:t>Every other senior speaks one condition from memory — in their own words, with one short true story of holding it while leading this year</a:t>
             </a:r>
           </a:p>
           <a:p>
             <a:pPr marL="274320" indent="-274320">
               <a:spcAft>
-                <a:spcPts val="800"/>
+                <a:spcPts val="750"/>
               </a:spcAft>
             </a:pPr>
             <a:r>
-              <a:rPr sz="2000" b="1" i="0">
+              <a:rPr sz="2200" b="1" i="0">
                 <a:solidFill>
                   <a:srgbClr val="97BC62"/>
                 </a:solidFill>
@@ -7909,68 +7934,38 @@
               <a:t>•  </a:t>
             </a:r>
             <a:r>
-              <a:rPr sz="2000" b="0" i="0">
+              <a:rPr sz="2200" b="0" i="0">
                 <a:solidFill>
                   <a:srgbClr val="222B22"/>
                 </a:solidFill>
                 <a:latin typeface="Calibri"/>
               </a:rPr>
-              <a:t>Tonight this room does the opposite of despising. Then prayer over the seniors.</a:t>
-            </a:r>
-          </a:p>
-        </p:txBody>
-      </p:sp>
-      <p:sp>
-        <p:nvSpPr>
-          <p:cNvPr id="6" name="TextBox 6"/>
-          <p:cNvSpPr txBox="1"/>
-          <p:nvPr/>
-        </p:nvSpPr>
-        <p:spPr>
-          <a:xfrm>
-            <a:off x="6766560" y="1737360"/>
-            <a:ext cx="4663440" cy="2194560"/>
-          </a:xfrm>
-          <a:prstGeom prst="rect">
-            <a:avLst/>
-          </a:prstGeom>
-          <a:solidFill>
-            <a:srgbClr val="F1F6EC"/>
-          </a:solidFill>
-        </p:spPr>
-        <p:txBody>
-          <a:bodyPr wrap="square" lIns="91440" tIns="91440" rIns="91440" bIns="91440" anchor="ctr"/>
-          <a:lstStyle/>
-          <a:p>
-            <a:pPr>
+              <a:t>One senior is held in reserve — tonight’s close is theirs</a:t>
+            </a:r>
+          </a:p>
+          <a:p>
+            <a:pPr marL="274320" indent="-274320">
               <a:spcAft>
-                <a:spcPts val="900"/>
+                <a:spcPts val="750"/>
               </a:spcAft>
             </a:pPr>
             <a:r>
-              <a:rPr sz="1200" b="1" i="0">
+              <a:rPr sz="2200" b="1" i="0">
                 <a:solidFill>
                   <a:srgbClr val="97BC62"/>
                 </a:solidFill>
                 <a:latin typeface="Calibri"/>
               </a:rPr>
-              <a:t>2 TIMOTHY 2:2</a:t>
-            </a:r>
-          </a:p>
-          <a:p>
-            <a:pPr>
-              <a:spcAft>
-                <a:spcPts val="600"/>
-              </a:spcAft>
-            </a:pPr>
-            <a:r>
-              <a:rPr sz="2400" b="0" i="1">
+              <a:t>•  </a:t>
+            </a:r>
+            <a:r>
+              <a:rPr sz="2200" b="0" i="0">
                 <a:solidFill>
                   <a:srgbClr val="222B22"/>
                 </a:solidFill>
-                <a:latin typeface="Cambria"/>
-              </a:rPr>
-              <a:t>“and what you have heard from me in the presence of many witnesses entrust to faithful men, who will be able to teach others also.”</a:t>
+                <a:latin typeface="Calibri"/>
+              </a:rPr>
+              <a:t>The gate is fluency across the arc, not perfection tonight. A stumble is not a fail.</a:t>
             </a:r>
           </a:p>
         </p:txBody>
@@ -7997,7 +7992,7 @@
           <a:p>
             <a:pPr algn="r"/>
             <a:r>
-              <a:t>270</a:t>
+              <a:t>269</a:t>
             </a:r>
             <a:endParaRPr sz="1000" b="1">
               <a:solidFill>
@@ -8096,7 +8091,7 @@
                 </a:solidFill>
                 <a:latin typeface="Cambria"/>
               </a:rPr>
-              <a:t>The Three Rules Read Aloud</a:t>
+              <a:t>The Word Over the Night</a:t>
             </a:r>
           </a:p>
         </p:txBody>
@@ -8109,8 +8104,8 @@
         </p:nvSpPr>
         <p:spPr>
           <a:xfrm>
-            <a:off x="822960" y="1554480"/>
-            <a:ext cx="10515600" cy="4892040"/>
+            <a:off x="822960" y="1600200"/>
+            <a:ext cx="5669280" cy="4572000"/>
           </a:xfrm>
           <a:prstGeom prst="rect">
             <a:avLst/>
@@ -8123,11 +8118,11 @@
           <a:p>
             <a:pPr marL="274320" indent="-274320">
               <a:spcAft>
-                <a:spcPts val="900"/>
+                <a:spcPts val="800"/>
               </a:spcAft>
             </a:pPr>
             <a:r>
-              <a:rPr sz="2200" b="1" i="0">
+              <a:rPr sz="2000" b="1" i="0">
                 <a:solidFill>
                   <a:srgbClr val="97BC62"/>
                 </a:solidFill>
@@ -8136,113 +8131,143 @@
               <a:t>•  </a:t>
             </a:r>
             <a:r>
-              <a:rPr sz="2200" b="0" i="0">
+              <a:rPr sz="2000" b="0" i="0">
                 <a:solidFill>
                   <a:srgbClr val="222B22"/>
                 </a:solidFill>
                 <a:latin typeface="Calibri"/>
               </a:rPr>
-              <a:t>The bright line made public — the whole room hears the boundaries its young leaders keep. These rules protect you and your kids as much as they protect the leaders.</a:t>
-            </a:r>
-          </a:p>
-          <a:p>
-            <a:pPr marL="342900" indent="-342900">
+              <a:t>Count the generations: Paul. Timothy. Faithful ones. Others also. Four generations in a single sentence — and the handing happens “in the presence of many witnesses.” In a room like this one.</a:t>
+            </a:r>
+          </a:p>
+          <a:p>
+            <a:pPr marL="274320" indent="-274320">
+              <a:spcAft>
+                <a:spcPts val="800"/>
+              </a:spcAft>
+            </a:pPr>
+            <a:r>
+              <a:rPr sz="2000" b="1" i="0">
+                <a:solidFill>
+                  <a:srgbClr val="97BC62"/>
+                </a:solidFill>
+                <a:latin typeface="Calibri"/>
+              </a:rPr>
+              <a:t>•  </a:t>
+            </a:r>
+            <a:r>
+              <a:rPr sz="2000" b="0" i="0">
+                <a:solidFill>
+                  <a:srgbClr val="222B22"/>
+                </a:solidFill>
+                <a:latin typeface="Calibri"/>
+              </a:rPr>
+              <a:t>Tonight the third generation stands up in front of the second — and the fourth is already sitting in the room</a:t>
+            </a:r>
+          </a:p>
+          <a:p>
+            <a:pPr marL="274320" indent="-274320">
+              <a:spcAft>
+                <a:spcPts val="800"/>
+              </a:spcAft>
+            </a:pPr>
+            <a:r>
+              <a:rPr sz="2000" b="1" i="0">
+                <a:solidFill>
+                  <a:srgbClr val="97BC62"/>
+                </a:solidFill>
+                <a:latin typeface="Calibri"/>
+              </a:rPr>
+              <a:t>•  </a:t>
+            </a:r>
+            <a:r>
+              <a:rPr sz="2000" b="0" i="0">
+                <a:solidFill>
+                  <a:srgbClr val="222B22"/>
+                </a:solidFill>
+                <a:latin typeface="Calibri"/>
+              </a:rPr>
+              <a:t>1 Timothy 4:12 — “Let no one despise you for your youth, but set the believers an example in speech, in conduct, in love, in faith, in purity.”</a:t>
+            </a:r>
+          </a:p>
+          <a:p>
+            <a:pPr marL="274320" indent="-274320">
+              <a:spcAft>
+                <a:spcPts val="800"/>
+              </a:spcAft>
+            </a:pPr>
+            <a:r>
+              <a:rPr sz="2000" b="1" i="0">
+                <a:solidFill>
+                  <a:srgbClr val="97BC62"/>
+                </a:solidFill>
+                <a:latin typeface="Calibri"/>
+              </a:rPr>
+              <a:t>•  </a:t>
+            </a:r>
+            <a:r>
+              <a:rPr sz="2000" b="0" i="0">
+                <a:solidFill>
+                  <a:srgbClr val="222B22"/>
+                </a:solidFill>
+                <a:latin typeface="Calibri"/>
+              </a:rPr>
+              <a:t>Tonight this room does the opposite of despising. Then prayer over the seniors.</a:t>
+            </a:r>
+          </a:p>
+        </p:txBody>
+      </p:sp>
+      <p:sp>
+        <p:nvSpPr>
+          <p:cNvPr id="6" name="TextBox 6"/>
+          <p:cNvSpPr txBox="1"/>
+          <p:nvPr/>
+        </p:nvSpPr>
+        <p:spPr>
+          <a:xfrm>
+            <a:off x="6766560" y="1737360"/>
+            <a:ext cx="4663440" cy="2194560"/>
+          </a:xfrm>
+          <a:prstGeom prst="rect">
+            <a:avLst/>
+          </a:prstGeom>
+          <a:solidFill>
+            <a:srgbClr val="F1F6EC"/>
+          </a:solidFill>
+        </p:spPr>
+        <p:txBody>
+          <a:bodyPr wrap="square" lIns="91440" tIns="91440" rIns="91440" bIns="91440" anchor="ctr"/>
+          <a:lstStyle/>
+          <a:p>
+            <a:pPr>
               <a:spcAft>
                 <a:spcPts val="900"/>
               </a:spcAft>
             </a:pPr>
             <a:r>
-              <a:rPr sz="2200" b="1" i="0">
+              <a:rPr sz="1200" b="1" i="0">
                 <a:solidFill>
                   <a:srgbClr val="97BC62"/>
                 </a:solidFill>
                 <a:latin typeface="Calibri"/>
               </a:rPr>
-              <a:t>1   </a:t>
-            </a:r>
-            <a:r>
-              <a:rPr sz="2200" b="0" i="0">
-                <a:solidFill>
-                  <a:srgbClr val="222B22"/>
-                </a:solidFill>
-                <a:latin typeface="Calibri"/>
-              </a:rPr>
-              <a:t>A Companion-in-Formation never counts as one of the two adults. “Co-lead” means an adult Companion in the room — not nearby, in the room.</a:t>
-            </a:r>
-          </a:p>
-          <a:p>
-            <a:pPr marL="342900" indent="-342900">
+              <a:t>2 TIMOTHY 2:2</a:t>
+            </a:r>
+          </a:p>
+          <a:p>
+            <a:pPr>
               <a:spcAft>
-                <a:spcPts val="900"/>
+                <a:spcPts val="600"/>
               </a:spcAft>
             </a:pPr>
             <a:r>
-              <a:rPr sz="2200" b="1" i="0">
-                <a:solidFill>
-                  <a:srgbClr val="97BC62"/>
-                </a:solidFill>
-                <a:latin typeface="Calibri"/>
-              </a:rPr>
-              <a:t>2   </a:t>
-            </a:r>
-            <a:r>
-              <a:rPr sz="2200" b="0" i="0">
+              <a:rPr sz="2400" b="0" i="1">
                 <a:solidFill>
                   <a:srgbClr val="222B22"/>
                 </a:solidFill>
-                <a:latin typeface="Calibri"/>
-              </a:rPr>
-              <a:t>A Companion-in-Formation never takes a disclosure. If something heavy surfaces, their only job is to hand it to the adult immediately. They are not a junior counselor.</a:t>
-            </a:r>
-          </a:p>
-          <a:p>
-            <a:pPr marL="342900" indent="-342900">
-              <a:spcAft>
-                <a:spcPts val="900"/>
-              </a:spcAft>
-            </a:pPr>
-            <a:r>
-              <a:rPr sz="2200" b="1" i="0">
-                <a:solidFill>
-                  <a:srgbClr val="97BC62"/>
-                </a:solidFill>
-                <a:latin typeface="Calibri"/>
-              </a:rPr>
-              <a:t>3   </a:t>
-            </a:r>
-            <a:r>
-              <a:rPr sz="2200" b="0" i="0">
-                <a:solidFill>
-                  <a:srgbClr val="222B22"/>
-                </a:solidFill>
-                <a:latin typeface="Calibri"/>
-              </a:rPr>
-              <a:t>Lead only a block you have first received. See it, then lead it.</a:t>
-            </a:r>
-          </a:p>
-          <a:p>
-            <a:pPr marL="274320" indent="-274320">
-              <a:spcAft>
-                <a:spcPts val="900"/>
-              </a:spcAft>
-            </a:pPr>
-            <a:r>
-              <a:rPr sz="2200" b="1" i="0">
-                <a:solidFill>
-                  <a:srgbClr val="97BC62"/>
-                </a:solidFill>
-                <a:latin typeface="Calibri"/>
-              </a:rPr>
-              <a:t>•  </a:t>
-            </a:r>
-            <a:r>
-              <a:rPr sz="2200" b="0" i="0">
-                <a:solidFill>
-                  <a:srgbClr val="222B22"/>
-                </a:solidFill>
-                <a:latin typeface="Calibri"/>
-              </a:rPr>
-              <a:t>These rules never bend — not for talent, not for maturity, not for a short-handed night. Handing the heavy thing to your adult is the strong, faithful move — never a failure.</a:t>
+                <a:latin typeface="Cambria"/>
+              </a:rPr>
+              <a:t>“and what you have heard from me in the presence of many witnesses entrust to faithful men, who will be able to teach others also.”</a:t>
             </a:r>
           </a:p>
         </p:txBody>
@@ -8269,7 +8294,7 @@
           <a:p>
             <a:pPr algn="r"/>
             <a:r>
-              <a:t>271</a:t>
+              <a:t>270</a:t>
             </a:r>
             <a:endParaRPr sz="1000" b="1">
               <a:solidFill>
@@ -8368,7 +8393,7 @@
                 </a:solidFill>
                 <a:latin typeface="Cambria"/>
               </a:rPr>
-              <a:t>The Covering Named</a:t>
+              <a:t>The Three Rules Read Aloud</a:t>
             </a:r>
           </a:p>
         </p:txBody>
@@ -8399,7 +8424,7 @@
               </a:spcAft>
             </a:pPr>
             <a:r>
-              <a:rPr sz="2800" b="1" i="0">
+              <a:rPr sz="2200" b="1" i="0">
                 <a:solidFill>
                   <a:srgbClr val="97BC62"/>
                 </a:solidFill>
@@ -8408,13 +8433,88 @@
               <a:t>•  </a:t>
             </a:r>
             <a:r>
-              <a:rPr sz="2800" b="0" i="0">
+              <a:rPr sz="2200" b="0" i="0">
                 <a:solidFill>
                   <a:srgbClr val="222B22"/>
                 </a:solidFill>
                 <a:latin typeface="Calibri"/>
               </a:rPr>
-              <a:t>An FC1 never leads uncovered — an adult with a name and a phone number, who has said yes</a:t>
+              <a:t>The bright line made public — the whole room hears the boundaries its young leaders keep. These rules protect you and your kids as much as they protect the leaders.</a:t>
+            </a:r>
+          </a:p>
+          <a:p>
+            <a:pPr marL="342900" indent="-342900">
+              <a:spcAft>
+                <a:spcPts val="900"/>
+              </a:spcAft>
+            </a:pPr>
+            <a:r>
+              <a:rPr sz="2200" b="1" i="0">
+                <a:solidFill>
+                  <a:srgbClr val="97BC62"/>
+                </a:solidFill>
+                <a:latin typeface="Calibri"/>
+              </a:rPr>
+              <a:t>1   </a:t>
+            </a:r>
+            <a:r>
+              <a:rPr sz="2200" b="0" i="0">
+                <a:solidFill>
+                  <a:srgbClr val="222B22"/>
+                </a:solidFill>
+                <a:latin typeface="Calibri"/>
+              </a:rPr>
+              <a:t>A Companion-in-Formation never counts as one of the two adults. “Co-lead” means an adult Companion in the room — not nearby, in the room.</a:t>
+            </a:r>
+          </a:p>
+          <a:p>
+            <a:pPr marL="342900" indent="-342900">
+              <a:spcAft>
+                <a:spcPts val="900"/>
+              </a:spcAft>
+            </a:pPr>
+            <a:r>
+              <a:rPr sz="2200" b="1" i="0">
+                <a:solidFill>
+                  <a:srgbClr val="97BC62"/>
+                </a:solidFill>
+                <a:latin typeface="Calibri"/>
+              </a:rPr>
+              <a:t>2   </a:t>
+            </a:r>
+            <a:r>
+              <a:rPr sz="2200" b="0" i="0">
+                <a:solidFill>
+                  <a:srgbClr val="222B22"/>
+                </a:solidFill>
+                <a:latin typeface="Calibri"/>
+              </a:rPr>
+              <a:t>A Companion-in-Formation never takes a disclosure. If something heavy surfaces, their only job is to hand it to the adult immediately. They are not a junior counselor.</a:t>
+            </a:r>
+          </a:p>
+          <a:p>
+            <a:pPr marL="342900" indent="-342900">
+              <a:spcAft>
+                <a:spcPts val="900"/>
+              </a:spcAft>
+            </a:pPr>
+            <a:r>
+              <a:rPr sz="2200" b="1" i="0">
+                <a:solidFill>
+                  <a:srgbClr val="97BC62"/>
+                </a:solidFill>
+                <a:latin typeface="Calibri"/>
+              </a:rPr>
+              <a:t>3   </a:t>
+            </a:r>
+            <a:r>
+              <a:rPr sz="2200" b="0" i="0">
+                <a:solidFill>
+                  <a:srgbClr val="222B22"/>
+                </a:solidFill>
+                <a:latin typeface="Calibri"/>
+              </a:rPr>
+              <a:t>Lead only a block you have first received. See it, then lead it.</a:t>
             </a:r>
           </a:p>
           <a:p>
@@ -8424,7 +8524,7 @@
               </a:spcAft>
             </a:pPr>
             <a:r>
-              <a:rPr sz="2800" b="1" i="0">
+              <a:rPr sz="2200" b="1" i="0">
                 <a:solidFill>
                   <a:srgbClr val="97BC62"/>
                 </a:solidFill>
@@ -8433,88 +8533,13 @@
               <a:t>•  </a:t>
             </a:r>
             <a:r>
-              <a:rPr sz="2800" b="0" i="0">
+              <a:rPr sz="2200" b="0" i="0">
                 <a:solidFill>
                   <a:srgbClr val="222B22"/>
                 </a:solidFill>
                 <a:latin typeface="Calibri"/>
               </a:rPr>
-              <a:t>A covering that is public is a covering that holds</a:t>
-            </a:r>
-          </a:p>
-          <a:p>
-            <a:pPr marL="342900" indent="-342900">
-              <a:spcAft>
-                <a:spcPts val="900"/>
-              </a:spcAft>
-            </a:pPr>
-            <a:r>
-              <a:rPr sz="2800" b="1" i="0">
-                <a:solidFill>
-                  <a:srgbClr val="97BC62"/>
-                </a:solidFill>
-                <a:latin typeface="Calibri"/>
-              </a:rPr>
-              <a:t>1   </a:t>
-            </a:r>
-            <a:r>
-              <a:rPr sz="2800" b="0" i="0">
-                <a:solidFill>
-                  <a:srgbClr val="222B22"/>
-                </a:solidFill>
-                <a:latin typeface="Calibri"/>
-              </a:rPr>
-              <a:t>Each senior stands and says it plainly: “When I am over my head, I call _____.”</a:t>
-            </a:r>
-          </a:p>
-          <a:p>
-            <a:pPr marL="342900" indent="-342900">
-              <a:spcAft>
-                <a:spcPts val="900"/>
-              </a:spcAft>
-            </a:pPr>
-            <a:r>
-              <a:rPr sz="2800" b="1" i="0">
-                <a:solidFill>
-                  <a:srgbClr val="97BC62"/>
-                </a:solidFill>
-                <a:latin typeface="Calibri"/>
-              </a:rPr>
-              <a:t>2   </a:t>
-            </a:r>
-            <a:r>
-              <a:rPr sz="2800" b="0" i="0">
-                <a:solidFill>
-                  <a:srgbClr val="222B22"/>
-                </a:solidFill>
-                <a:latin typeface="Calibri"/>
-              </a:rPr>
-              <a:t>The sign-off confirmed publicly — the parent: “I confirm it.” The Lead Companion: “And I confirm it.”</a:t>
-            </a:r>
-          </a:p>
-          <a:p>
-            <a:pPr marL="342900" indent="-342900">
-              <a:spcAft>
-                <a:spcPts val="900"/>
-              </a:spcAft>
-            </a:pPr>
-            <a:r>
-              <a:rPr sz="2800" b="1" i="0">
-                <a:solidFill>
-                  <a:srgbClr val="97BC62"/>
-                </a:solidFill>
-                <a:latin typeface="Calibri"/>
-              </a:rPr>
-              <a:t>3   </a:t>
-            </a:r>
-            <a:r>
-              <a:rPr sz="2800" b="0" i="0">
-                <a:solidFill>
-                  <a:srgbClr val="222B22"/>
-                </a:solidFill>
-                <a:latin typeface="Calibri"/>
-              </a:rPr>
-              <a:t>The covering name goes onto the Commissioning Card, there in the circle — ink, not intention</a:t>
+              <a:t>These rules never bend — not for talent, not for maturity, not for a short-handed night. Handing the heavy thing to your adult is the strong, faithful move — never a failure.</a:t>
             </a:r>
           </a:p>
         </p:txBody>
@@ -8541,7 +8566,7 @@
           <a:p>
             <a:pPr algn="r"/>
             <a:r>
-              <a:t>272</a:t>
+              <a:t>271</a:t>
             </a:r>
             <a:endParaRPr sz="1000" b="1">
               <a:solidFill>
@@ -8640,7 +8665,7 @@
                 </a:solidFill>
                 <a:latin typeface="Cambria"/>
               </a:rPr>
-              <a:t>The Commissioning</a:t>
+              <a:t>The Covering Named</a:t>
             </a:r>
           </a:p>
         </p:txBody>
@@ -8665,13 +8690,63 @@
           <a:bodyPr wrap="square" lIns="91440" tIns="91440" rIns="91440" bIns="91440"/>
           <a:lstStyle/>
           <a:p>
+            <a:pPr marL="274320" indent="-274320">
+              <a:spcAft>
+                <a:spcPts val="900"/>
+              </a:spcAft>
+            </a:pPr>
+            <a:r>
+              <a:rPr sz="2800" b="1" i="0">
+                <a:solidFill>
+                  <a:srgbClr val="97BC62"/>
+                </a:solidFill>
+                <a:latin typeface="Calibri"/>
+              </a:rPr>
+              <a:t>•  </a:t>
+            </a:r>
+            <a:r>
+              <a:rPr sz="2800" b="0" i="0">
+                <a:solidFill>
+                  <a:srgbClr val="222B22"/>
+                </a:solidFill>
+                <a:latin typeface="Calibri"/>
+              </a:rPr>
+              <a:t>An FC1 never leads uncovered — an adult with a name and a phone number, who has said yes</a:t>
+            </a:r>
+          </a:p>
+          <a:p>
+            <a:pPr marL="274320" indent="-274320">
+              <a:spcAft>
+                <a:spcPts val="900"/>
+              </a:spcAft>
+            </a:pPr>
+            <a:r>
+              <a:rPr sz="2800" b="1" i="0">
+                <a:solidFill>
+                  <a:srgbClr val="97BC62"/>
+                </a:solidFill>
+                <a:latin typeface="Calibri"/>
+              </a:rPr>
+              <a:t>•  </a:t>
+            </a:r>
+            <a:r>
+              <a:rPr sz="2800" b="0" i="0">
+                <a:solidFill>
+                  <a:srgbClr val="222B22"/>
+                </a:solidFill>
+                <a:latin typeface="Calibri"/>
+              </a:rPr>
+              <a:t>A covering that is public is a covering that holds</a:t>
+            </a:r>
+          </a:p>
+          <a:p>
             <a:pPr marL="342900" indent="-342900">
               <a:spcAft>
-                <a:spcPts val="750"/>
+                <a:spcPts val="900"/>
               </a:spcAft>
             </a:pPr>
             <a:r>
-              <a:rPr sz="2200" b="1" i="0">
+              <a:rPr sz="2800" b="1" i="0">
                 <a:solidFill>
                   <a:srgbClr val="97BC62"/>
                 </a:solidFill>
@@ -8680,23 +8755,23 @@
               <a:t>1   </a:t>
             </a:r>
             <a:r>
-              <a:rPr sz="2200" b="0" i="0">
+              <a:rPr sz="2800" b="0" i="0">
                 <a:solidFill>
                   <a:srgbClr val="222B22"/>
                 </a:solidFill>
                 <a:latin typeface="Calibri"/>
               </a:rPr>
-              <a:t>Each senior stands in the center; their family stands behind them</a:t>
+              <a:t>Each senior stands and says it plainly: “When I am over my head, I call _____.”</a:t>
             </a:r>
           </a:p>
           <a:p>
             <a:pPr marL="342900" indent="-342900">
               <a:spcAft>
-                <a:spcPts val="750"/>
+                <a:spcPts val="900"/>
               </a:spcAft>
             </a:pPr>
             <a:r>
-              <a:rPr sz="2200" b="1" i="0">
+              <a:rPr sz="2800" b="1" i="0">
                 <a:solidFill>
                   <a:srgbClr val="97BC62"/>
                 </a:solidFill>
@@ -8705,23 +8780,23 @@
               <a:t>2   </a:t>
             </a:r>
             <a:r>
-              <a:rPr sz="2200" b="0" i="0">
+              <a:rPr sz="2800" b="0" i="0">
                 <a:solidFill>
                   <a:srgbClr val="222B22"/>
                 </a:solidFill>
                 <a:latin typeface="Calibri"/>
               </a:rPr>
-              <a:t>Two Companions speak their prepared blessings — drawn from specific moments of leading: what we saw, what we bless, what we see coming</a:t>
+              <a:t>The sign-off confirmed publicly — the parent: “I confirm it.” The Lead Companion: “And I confirm it.”</a:t>
             </a:r>
           </a:p>
           <a:p>
             <a:pPr marL="342900" indent="-342900">
               <a:spcAft>
-                <a:spcPts val="750"/>
+                <a:spcPts val="900"/>
               </a:spcAft>
             </a:pPr>
             <a:r>
-              <a:rPr sz="2200" b="1" i="0">
+              <a:rPr sz="2800" b="1" i="0">
                 <a:solidFill>
                   <a:srgbClr val="97BC62"/>
                 </a:solidFill>
@@ -8730,88 +8805,13 @@
               <a:t>3   </a:t>
             </a:r>
             <a:r>
-              <a:rPr sz="2200" b="0" i="0">
+              <a:rPr sz="2800" b="0" i="0">
                 <a:solidFill>
                   <a:srgbClr val="222B22"/>
                 </a:solidFill>
                 <a:latin typeface="Calibri"/>
               </a:rPr>
-              <a:t>The parent may add one sentence. One. It will be the one the teen remembers.</a:t>
-            </a:r>
-          </a:p>
-          <a:p>
-            <a:pPr marL="342900" indent="-342900">
-              <a:spcAft>
-                <a:spcPts val="750"/>
-              </a:spcAft>
-            </a:pPr>
-            <a:r>
-              <a:rPr sz="2200" b="1" i="0">
-                <a:solidFill>
-                  <a:srgbClr val="97BC62"/>
-                </a:solidFill>
-                <a:latin typeface="Calibri"/>
-              </a:rPr>
-              <a:t>4   </a:t>
-            </a:r>
-            <a:r>
-              <a:rPr sz="2200" b="0" i="0">
-                <a:solidFill>
-                  <a:srgbClr val="222B22"/>
-                </a:solidFill>
-                <a:latin typeface="Calibri"/>
-              </a:rPr>
-              <a:t>The cohort speaks the Aaronic blessing over the new FC1 — the whole room, slowly, hands extended</a:t>
-            </a:r>
-          </a:p>
-          <a:p>
-            <a:pPr marL="342900" indent="-342900">
-              <a:spcAft>
-                <a:spcPts val="750"/>
-              </a:spcAft>
-            </a:pPr>
-            <a:r>
-              <a:rPr sz="2200" b="1" i="0">
-                <a:solidFill>
-                  <a:srgbClr val="97BC62"/>
-                </a:solidFill>
-                <a:latin typeface="Calibri"/>
-              </a:rPr>
-              <a:t>5   </a:t>
-            </a:r>
-            <a:r>
-              <a:rPr sz="2200" b="0" i="0">
-                <a:solidFill>
-                  <a:srgbClr val="222B22"/>
-                </a:solidFill>
-                <a:latin typeface="Calibri"/>
-              </a:rPr>
-              <a:t>“[Name], the team commissions you as Formation Companion, Level One. Serve the body. Keep the rules. Call your covering. Watch the signs.”</a:t>
-            </a:r>
-          </a:p>
-          <a:p>
-            <a:pPr marL="274320" indent="-274320">
-              <a:spcAft>
-                <a:spcPts val="750"/>
-              </a:spcAft>
-            </a:pPr>
-            <a:r>
-              <a:rPr sz="2200" b="1" i="0">
-                <a:solidFill>
-                  <a:srgbClr val="97BC62"/>
-                </a:solidFill>
-                <a:latin typeface="Calibri"/>
-              </a:rPr>
-              <a:t>•  </a:t>
-            </a:r>
-            <a:r>
-              <a:rPr sz="2200" b="0" i="0">
-                <a:solidFill>
-                  <a:srgbClr val="222B22"/>
-                </a:solidFill>
-                <a:latin typeface="Calibri"/>
-              </a:rPr>
-              <a:t>Then the charge, once, over all of them — keep your own walk first; keep the three rules when no one is checking; call your covering early, not late; watch the three signs. “FC1 is a real and honorable place to stand… Set the example. Begin.”</a:t>
+              <a:t>The covering name goes onto the Commissioning Card, there in the circle — ink, not intention</a:t>
             </a:r>
           </a:p>
         </p:txBody>
@@ -8838,7 +8838,7 @@
           <a:p>
             <a:pPr algn="r"/>
             <a:r>
-              <a:t>273</a:t>
+              <a:t>272</a:t>
             </a:r>
             <a:endParaRPr sz="1000" b="1">
               <a:solidFill>

--- a/_implementation-notes/evening-series/FotH Evening Session 22 Slides DRAFT v1.pptx
+++ b/_implementation-notes/evening-series/FotH Evening Session 22 Slides DRAFT v1.pptx
@@ -6932,7 +6932,7 @@
           <p:nvPr/>
         </p:nvPicPr>
         <p:blipFill>
-          <a:blip r:embed="rId4"/>
+          <a:blip r:embed="rId5"/>
           <a:stretch>
             <a:fillRect/>
           </a:stretch>

--- a/_implementation-notes/evening-series/FotH Evening Session 22 Slides DRAFT v1.pptx
+++ b/_implementation-notes/evening-series/FotH Evening Session 22 Slides DRAFT v1.pptx
@@ -5271,7 +5271,7 @@
           <a:p>
             <a:pPr algn="r"/>
             <a:r>
-              <a:t>273</a:t>
+              <a:t>316</a:t>
             </a:r>
             <a:endParaRPr sz="1000" b="1">
               <a:solidFill>
@@ -5518,7 +5518,7 @@
           <a:p>
             <a:pPr algn="r"/>
             <a:r>
-              <a:t>274</a:t>
+              <a:t>317</a:t>
             </a:r>
             <a:endParaRPr sz="1000" b="1">
               <a:solidFill>
@@ -5710,7 +5710,7 @@
           <a:p>
             <a:pPr algn="r"/>
             <a:r>
-              <a:t>275</a:t>
+              <a:t>318</a:t>
             </a:r>
             <a:endParaRPr sz="1000" b="1">
               <a:solidFill>
@@ -5902,7 +5902,7 @@
           <a:p>
             <a:pPr algn="r"/>
             <a:r>
-              <a:t>275a</a:t>
+              <a:t>319</a:t>
             </a:r>
             <a:endParaRPr sz="1000" b="1">
               <a:solidFill>
@@ -6199,7 +6199,7 @@
           <a:p>
             <a:pPr algn="r"/>
             <a:r>
-              <a:t>276</a:t>
+              <a:t>320</a:t>
             </a:r>
             <a:endParaRPr sz="1000" b="1">
               <a:solidFill>
@@ -6482,7 +6482,7 @@
           <a:p>
             <a:pPr algn="r"/>
             <a:r>
-              <a:t>277</a:t>
+              <a:t>321</a:t>
             </a:r>
             <a:endParaRPr sz="1000" b="1">
               <a:solidFill>
@@ -6731,7 +6731,7 @@
           <a:p>
             <a:pPr algn="r"/>
             <a:r>
-              <a:t>266</a:t>
+              <a:t>308</a:t>
             </a:r>
             <a:endParaRPr sz="1000" b="1">
               <a:solidFill>
@@ -6912,7 +6912,7 @@
           <a:p>
             <a:pPr algn="r"/>
             <a:r>
-              <a:t>266a</a:t>
+              <a:t>309</a:t>
             </a:r>
             <a:endParaRPr sz="1000" b="1">
               <a:solidFill>
@@ -7326,7 +7326,7 @@
           <a:p>
             <a:pPr algn="r"/>
             <a:r>
-              <a:t>267</a:t>
+              <a:t>310</a:t>
             </a:r>
             <a:endParaRPr sz="1000" b="1">
               <a:solidFill>
@@ -7659,7 +7659,7 @@
           <a:p>
             <a:pPr algn="r"/>
             <a:r>
-              <a:t>268</a:t>
+              <a:t>311</a:t>
             </a:r>
             <a:endParaRPr sz="1000" b="1">
               <a:solidFill>
@@ -7992,7 +7992,7 @@
           <a:p>
             <a:pPr algn="r"/>
             <a:r>
-              <a:t>269</a:t>
+              <a:t>312</a:t>
             </a:r>
             <a:endParaRPr sz="1000" b="1">
               <a:solidFill>
@@ -8294,7 +8294,7 @@
           <a:p>
             <a:pPr algn="r"/>
             <a:r>
-              <a:t>270</a:t>
+              <a:t>313</a:t>
             </a:r>
             <a:endParaRPr sz="1000" b="1">
               <a:solidFill>
@@ -8566,7 +8566,7 @@
           <a:p>
             <a:pPr algn="r"/>
             <a:r>
-              <a:t>271</a:t>
+              <a:t>314</a:t>
             </a:r>
             <a:endParaRPr sz="1000" b="1">
               <a:solidFill>
@@ -8838,7 +8838,7 @@
           <a:p>
             <a:pPr algn="r"/>
             <a:r>
-              <a:t>272</a:t>
+              <a:t>315</a:t>
             </a:r>
             <a:endParaRPr sz="1000" b="1">
               <a:solidFill>

--- a/_implementation-notes/evening-series/FotH Evening Session 22 Slides DRAFT v1.pptx
+++ b/_implementation-notes/evening-series/FotH Evening Session 22 Slides DRAFT v1.pptx
@@ -6932,7 +6932,7 @@
           <p:nvPr/>
         </p:nvPicPr>
         <p:blipFill>
-          <a:blip r:embed="rId5"/>
+          <a:blip r:embed="rId6"/>
           <a:stretch>
             <a:fillRect/>
           </a:stretch>

--- a/_implementation-notes/evening-series/FotH Evening Session 22 Slides DRAFT v1.pptx
+++ b/_implementation-notes/evening-series/FotH Evening Session 22 Slides DRAFT v1.pptx
@@ -5271,7 +5271,7 @@
           <a:p>
             <a:pPr algn="r"/>
             <a:r>
-              <a:t>316</a:t>
+              <a:t>317</a:t>
             </a:r>
             <a:endParaRPr sz="1000" b="1">
               <a:solidFill>
@@ -5518,7 +5518,7 @@
           <a:p>
             <a:pPr algn="r"/>
             <a:r>
-              <a:t>317</a:t>
+              <a:t>318</a:t>
             </a:r>
             <a:endParaRPr sz="1000" b="1">
               <a:solidFill>
@@ -5710,7 +5710,7 @@
           <a:p>
             <a:pPr algn="r"/>
             <a:r>
-              <a:t>318</a:t>
+              <a:t>319</a:t>
             </a:r>
             <a:endParaRPr sz="1000" b="1">
               <a:solidFill>
@@ -5902,7 +5902,7 @@
           <a:p>
             <a:pPr algn="r"/>
             <a:r>
-              <a:t>319</a:t>
+              <a:t>320</a:t>
             </a:r>
             <a:endParaRPr sz="1000" b="1">
               <a:solidFill>
@@ -6199,7 +6199,7 @@
           <a:p>
             <a:pPr algn="r"/>
             <a:r>
-              <a:t>320</a:t>
+              <a:t>321</a:t>
             </a:r>
             <a:endParaRPr sz="1000" b="1">
               <a:solidFill>
@@ -6482,7 +6482,7 @@
           <a:p>
             <a:pPr algn="r"/>
             <a:r>
-              <a:t>321</a:t>
+              <a:t>322</a:t>
             </a:r>
             <a:endParaRPr sz="1000" b="1">
               <a:solidFill>
@@ -6731,7 +6731,7 @@
           <a:p>
             <a:pPr algn="r"/>
             <a:r>
-              <a:t>308</a:t>
+              <a:t>309</a:t>
             </a:r>
             <a:endParaRPr sz="1000" b="1">
               <a:solidFill>
@@ -6912,7 +6912,7 @@
           <a:p>
             <a:pPr algn="r"/>
             <a:r>
-              <a:t>309</a:t>
+              <a:t>310</a:t>
             </a:r>
             <a:endParaRPr sz="1000" b="1">
               <a:solidFill>
@@ -7326,7 +7326,7 @@
           <a:p>
             <a:pPr algn="r"/>
             <a:r>
-              <a:t>310</a:t>
+              <a:t>311</a:t>
             </a:r>
             <a:endParaRPr sz="1000" b="1">
               <a:solidFill>
@@ -7659,7 +7659,7 @@
           <a:p>
             <a:pPr algn="r"/>
             <a:r>
-              <a:t>311</a:t>
+              <a:t>312</a:t>
             </a:r>
             <a:endParaRPr sz="1000" b="1">
               <a:solidFill>
@@ -7992,7 +7992,7 @@
           <a:p>
             <a:pPr algn="r"/>
             <a:r>
-              <a:t>312</a:t>
+              <a:t>313</a:t>
             </a:r>
             <a:endParaRPr sz="1000" b="1">
               <a:solidFill>
@@ -8294,7 +8294,7 @@
           <a:p>
             <a:pPr algn="r"/>
             <a:r>
-              <a:t>313</a:t>
+              <a:t>314</a:t>
             </a:r>
             <a:endParaRPr sz="1000" b="1">
               <a:solidFill>
@@ -8566,7 +8566,7 @@
           <a:p>
             <a:pPr algn="r"/>
             <a:r>
-              <a:t>314</a:t>
+              <a:t>315</a:t>
             </a:r>
             <a:endParaRPr sz="1000" b="1">
               <a:solidFill>
@@ -8838,7 +8838,7 @@
           <a:p>
             <a:pPr algn="r"/>
             <a:r>
-              <a:t>315</a:t>
+              <a:t>316</a:t>
             </a:r>
             <a:endParaRPr sz="1000" b="1">
               <a:solidFill>

--- a/_implementation-notes/evening-series/FotH Evening Session 22 Slides DRAFT v1.pptx
+++ b/_implementation-notes/evening-series/FotH Evening Session 22 Slides DRAFT v1.pptx
@@ -5271,7 +5271,7 @@
           <a:p>
             <a:pPr algn="r"/>
             <a:r>
-              <a:t>317</a:t>
+              <a:t>318</a:t>
             </a:r>
             <a:endParaRPr sz="1000" b="1">
               <a:solidFill>
@@ -5518,7 +5518,7 @@
           <a:p>
             <a:pPr algn="r"/>
             <a:r>
-              <a:t>318</a:t>
+              <a:t>319</a:t>
             </a:r>
             <a:endParaRPr sz="1000" b="1">
               <a:solidFill>
@@ -5710,7 +5710,7 @@
           <a:p>
             <a:pPr algn="r"/>
             <a:r>
-              <a:t>319</a:t>
+              <a:t>320</a:t>
             </a:r>
             <a:endParaRPr sz="1000" b="1">
               <a:solidFill>
@@ -5902,7 +5902,7 @@
           <a:p>
             <a:pPr algn="r"/>
             <a:r>
-              <a:t>320</a:t>
+              <a:t>321</a:t>
             </a:r>
             <a:endParaRPr sz="1000" b="1">
               <a:solidFill>
@@ -6199,7 +6199,7 @@
           <a:p>
             <a:pPr algn="r"/>
             <a:r>
-              <a:t>321</a:t>
+              <a:t>322</a:t>
             </a:r>
             <a:endParaRPr sz="1000" b="1">
               <a:solidFill>
@@ -6482,7 +6482,7 @@
           <a:p>
             <a:pPr algn="r"/>
             <a:r>
-              <a:t>322</a:t>
+              <a:t>323</a:t>
             </a:r>
             <a:endParaRPr sz="1000" b="1">
               <a:solidFill>
@@ -6731,7 +6731,7 @@
           <a:p>
             <a:pPr algn="r"/>
             <a:r>
-              <a:t>309</a:t>
+              <a:t>310</a:t>
             </a:r>
             <a:endParaRPr sz="1000" b="1">
               <a:solidFill>
@@ -6912,7 +6912,7 @@
           <a:p>
             <a:pPr algn="r"/>
             <a:r>
-              <a:t>310</a:t>
+              <a:t>311</a:t>
             </a:r>
             <a:endParaRPr sz="1000" b="1">
               <a:solidFill>
@@ -7326,7 +7326,7 @@
           <a:p>
             <a:pPr algn="r"/>
             <a:r>
-              <a:t>311</a:t>
+              <a:t>312</a:t>
             </a:r>
             <a:endParaRPr sz="1000" b="1">
               <a:solidFill>
@@ -7659,7 +7659,7 @@
           <a:p>
             <a:pPr algn="r"/>
             <a:r>
-              <a:t>312</a:t>
+              <a:t>313</a:t>
             </a:r>
             <a:endParaRPr sz="1000" b="1">
               <a:solidFill>
@@ -7992,7 +7992,7 @@
           <a:p>
             <a:pPr algn="r"/>
             <a:r>
-              <a:t>313</a:t>
+              <a:t>314</a:t>
             </a:r>
             <a:endParaRPr sz="1000" b="1">
               <a:solidFill>
@@ -8294,7 +8294,7 @@
           <a:p>
             <a:pPr algn="r"/>
             <a:r>
-              <a:t>314</a:t>
+              <a:t>315</a:t>
             </a:r>
             <a:endParaRPr sz="1000" b="1">
               <a:solidFill>
@@ -8566,7 +8566,7 @@
           <a:p>
             <a:pPr algn="r"/>
             <a:r>
-              <a:t>315</a:t>
+              <a:t>316</a:t>
             </a:r>
             <a:endParaRPr sz="1000" b="1">
               <a:solidFill>
@@ -8838,7 +8838,7 @@
           <a:p>
             <a:pPr algn="r"/>
             <a:r>
-              <a:t>316</a:t>
+              <a:t>317</a:t>
             </a:r>
             <a:endParaRPr sz="1000" b="1">
               <a:solidFill>

--- a/_implementation-notes/evening-series/FotH Evening Session 22 Slides DRAFT v1.pptx
+++ b/_implementation-notes/evening-series/FotH Evening Session 22 Slides DRAFT v1.pptx
@@ -785,7 +785,7 @@
           <a:lstStyle/>
           <a:p>
             <a:r>
-              <a:t>S22 · WELCOME · LEAD: CONTAINER HOLDER · GROUNDING — every session opens on this map</a:t>
+              <a:t>E17 · WELCOME · LEAD: CONTAINER HOLDER · GROUNDING — every session opens on this map</a:t>
             </a:r>
           </a:p>
           <a:p>
@@ -795,7 +795,7 @@
           </a:p>
           <a:p>
             <a:r>
-              <a:t>1. Locate tonight on the map, plainly: Session 22 commissions what the map has built — all four Connects, carried by the Companions. Each connection makes the next one real (Matt. 22:37–40).</a:t>
+              <a:t>1. Locate tonight on the map, plainly: Evening 17 commissions what the map has built — all four Connects, carried by the Companions. Each connection makes the next one real (Matt. 22:37–40).</a:t>
             </a:r>
           </a:p>
           <a:p>
@@ -856,7 +856,7 @@
           <a:lstStyle/>
           <a:p>
             <a:r>
-              <a:t>S22 · COMMISSIONING · LEAD: CONTENT PRESENTER</a:t>
+              <a:t>E17 · COMMISSIONING · LEAD: CONTENT PRESENTER</a:t>
             </a:r>
           </a:p>
           <a:p>
@@ -927,7 +927,7 @@
           <a:lstStyle/>
           <a:p>
             <a:r>
-              <a:t>S22 · COMMISSIONING · LEAD: CONTENT PRESENTER</a:t>
+              <a:t>E17 · COMMISSIONING · LEAD: CONTENT PRESENTER</a:t>
             </a:r>
           </a:p>
           <a:p>
@@ -993,13 +993,11 @@
           <a:lstStyle/>
           <a:p>
             <a:r>
-              <a:rPr lang="en-US" sz="1200"/>
-              <a:t>S22 · pre-session · DIVIDER</a:t>
-            </a:r>
-          </a:p>
-          <a:p>
-            <a:r>
-              <a:rPr lang="en-US" sz="1200"/>
+              <a:t>E17 · pre-session · DIVIDER</a:t>
+            </a:r>
+          </a:p>
+          <a:p>
+            <a:r>
               <a:t>On screen through dinner and as the circle forms. Greet at the door — the slide holds the room. Tonight runs the standard evening clock; dessert after. Single wide circle, open center, no table; keepsake sheets and pens staged on the side table; the physical Lab-date card in the Lead's pocket.</a:t>
             </a:r>
           </a:p>
@@ -1046,37 +1044,31 @@
           <a:lstStyle/>
           <a:p>
             <a:r>
-              <a:rPr lang="en-US" sz="1200"/>
-              <a:t>S22 · 7:00–8:30 · LEAD: BOTH LEADERS CIRCLE</a:t>
-            </a:r>
-          </a:p>
-          <a:p>
-            <a:r>
-              <a:rPr lang="en-US" sz="1200"/>
+              <a:t>E17 · 7:00–8:30 · LEAD: BOTH LEADERS CIRCLE</a:t>
+            </a:r>
+          </a:p>
+          <a:p>
+            <a:r>
               <a:t>BEATS:</a:t>
             </a:r>
           </a:p>
           <a:p>
             <a:r>
-              <a:rPr lang="en-US" sz="1200"/>
               <a:t>1. Name the night: the seniors are commissioned FC1 — an exit gate run as a witnessed rite, not a graduation; nobody is leaving — the gate opens inward, onto a serving place in this body.</a:t>
             </a:r>
           </a:p>
           <a:p>
             <a:r>
-              <a:rPr lang="en-US" sz="1200"/>
               <a:t>2. Four movements: the final rep (container opened and closed from memory), the three rules read aloud, the covering named, the commissioning — with Lab 1 on the calendar before anyone leaves.</a:t>
             </a:r>
           </a:p>
           <a:p>
             <a:r>
-              <a:rPr lang="en-US" sz="1200"/>
               <a:t>3. The seniors lead; the adults confirm and bless; the cohort witnesses.</a:t>
             </a:r>
           </a:p>
           <a:p>
             <a:r>
-              <a:rPr lang="en-US" sz="1200"/>
               <a:t>GUARD: Any unconfirmed sign-off was settled privately weeks ago — NEVER discovered today. If the team somehow arrives unsettled, stop and settle before the session, even at the cost of a delay. Section 6 protocols stand.</a:t>
             </a:r>
           </a:p>
@@ -1123,7 +1115,7 @@
           <a:lstStyle/>
           <a:p>
             <a:r>
-              <a:t>S22 · 7:00–7:08 · LEAD: CONTAINER HOLDER CIRCLE</a:t>
+              <a:t>E17 · 7:00–7:08 · LEAD: CONTAINER HOLDER CIRCLE</a:t>
             </a:r>
           </a:p>
           <a:p>
@@ -1199,37 +1191,31 @@
           <a:lstStyle/>
           <a:p>
             <a:r>
-              <a:rPr lang="en-US" sz="1200"/>
-              <a:t>S22 · 7:25–7:35 · LEAD: CONTENT PRESENTER CIRCLE</a:t>
-            </a:r>
-          </a:p>
-          <a:p>
-            <a:r>
-              <a:rPr lang="en-US" sz="1200"/>
+              <a:t>E17 · 7:25–7:35 · LEAD: CONTENT PRESENTER CIRCLE</a:t>
+            </a:r>
+          </a:p>
+          <a:p>
+            <a:r>
               <a:t>BEATS:</a:t>
             </a:r>
           </a:p>
           <a:p>
             <a:r>
-              <a:rPr lang="en-US" sz="1200"/>
               <a:t>1. One senior opens the full protocol from memory — no script, no cards; the whole room participates as every week.</a:t>
             </a:r>
           </a:p>
           <a:p>
             <a:r>
-              <a:rPr lang="en-US" sz="1200"/>
               <a:t>2. Every other senior speaks one container condition — Safe, Present, Clear, Intentional — in their own words with one true story of holding it while leading, 60–90 seconds each. The closing senior is held in reserve for Block 9.</a:t>
             </a:r>
           </a:p>
           <a:p>
             <a:r>
-              <a:rPr lang="en-US" sz="1200"/>
               <a:t>3. Your whole job: sit still and let them.</a:t>
             </a:r>
           </a:p>
           <a:p>
             <a:r>
-              <a:rPr lang="en-US" sz="1200"/>
               <a:t>CUES: Grace protocol, decided in advance. A freeze: calm, from your seat — 'Take a breath. You have opened this container more times than anyone in this room but me. Start with Safe.' If they cannot continue: stand with them, hand on shoulder, tell the room the truth of their year, and finish it TOGETHER. The gate was passed weeks ago; today is the witness. A stumble is never the story of the night — never mentioned again in any tone but tenderness.</a:t>
             </a:r>
           </a:p>
@@ -1276,37 +1262,31 @@
           <a:lstStyle/>
           <a:p>
             <a:r>
-              <a:rPr lang="en-US" sz="1200"/>
-              <a:t>S22 · 7:35–7:41 · LEAD: CONTENT PRESENTER CIRCLE</a:t>
-            </a:r>
-          </a:p>
-          <a:p>
-            <a:r>
-              <a:rPr lang="en-US" sz="1200"/>
+              <a:t>E17 · 7:35–7:41 · LEAD: CONTENT PRESENTER CIRCLE</a:t>
+            </a:r>
+          </a:p>
+          <a:p>
+            <a:r>
               <a:t>BEATS:</a:t>
             </a:r>
           </a:p>
           <a:p>
             <a:r>
-              <a:rPr lang="en-US" sz="1200"/>
               <a:t>1. Read 2 Timothy 2:2 and 1 Timothy 4:12 from the physical Bible.</a:t>
             </a:r>
           </a:p>
           <a:p>
             <a:r>
-              <a:rPr lang="en-US" sz="1200"/>
               <a:t>2. Frame briefly: count the generations — Paul, Timothy, the faithful, the others also — and notice where the handing happens: in the presence of many witnesses, in a room like this one. Today the third generation stands up, and the fourth is already sitting here.</a:t>
             </a:r>
           </a:p>
           <a:p>
             <a:r>
-              <a:rPr lang="en-US" sz="1200"/>
               <a:t>3. 1 Timothy 4:12: written to a young leader wondering if he was too young — today this room does the opposite of despising.</a:t>
             </a:r>
           </a:p>
           <a:p>
             <a:r>
-              <a:rPr lang="en-US" sz="1200"/>
               <a:t>4. Pray, then move — the movements are waiting.</a:t>
             </a:r>
           </a:p>
@@ -1353,37 +1333,31 @@
           <a:lstStyle/>
           <a:p>
             <a:r>
-              <a:rPr lang="en-US" sz="1200"/>
-              <a:t>S22 · 7:41–7:47 · LEAD: CONTENT PRESENTER CIRCLE</a:t>
-            </a:r>
-          </a:p>
-          <a:p>
-            <a:r>
-              <a:rPr lang="en-US" sz="1200"/>
+              <a:t>E17 · 7:41–7:47 · LEAD: CONTENT PRESENTER CIRCLE</a:t>
+            </a:r>
+          </a:p>
+          <a:p>
+            <a:r>
               <a:t>BEATS:</a:t>
             </a:r>
           </a:p>
           <a:p>
             <a:r>
-              <a:rPr lang="en-US" sz="1200"/>
               <a:t>1. Frame: the whole room hears the boundaries its young leaders keep — not a leash, the frame that lets a sixteen-year-old lead this room and every parent sleep at night.</a:t>
             </a:r>
           </a:p>
           <a:p>
             <a:r>
-              <a:rPr lang="en-US" sz="1200"/>
               <a:t>2. Read the three rules VERBATIM from the handbook: a CiF never counts as one of the two adults; a CiF never takes a disclosure — hands it to the adult immediately; lead only a block you have first received.</a:t>
             </a:r>
           </a:p>
           <a:p>
             <a:r>
-              <a:rPr lang="en-US" sz="1200"/>
               <a:t>3. Optional (team's pre-decided call): the Lead reads each first line and the seniors read them back together.</a:t>
             </a:r>
           </a:p>
           <a:p>
             <a:r>
-              <a:rPr lang="en-US" sz="1200"/>
               <a:t>4. Close the movement: these rules never bend — not for talent, not for a short-handed night; handing the heavy thing over is the strong, faithful move, never a failure.</a:t>
             </a:r>
           </a:p>
@@ -1430,49 +1404,41 @@
           <a:lstStyle/>
           <a:p>
             <a:r>
-              <a:rPr lang="en-US" sz="1200"/>
-              <a:t>S22 · 7:47–7:54 · LEAD: CONTENT PRESENTER CIRCLE</a:t>
-            </a:r>
-          </a:p>
-          <a:p>
-            <a:r>
-              <a:rPr lang="en-US" sz="1200"/>
+              <a:t>E17 · 7:47–7:54 · LEAD: CONTENT PRESENTER CIRCLE</a:t>
+            </a:r>
+          </a:p>
+          <a:p>
+            <a:r>
               <a:t>BEATS:</a:t>
             </a:r>
           </a:p>
           <a:p>
             <a:r>
-              <a:rPr lang="en-US" sz="1200"/>
               <a:t>1. Frame: an FC1 never leads uncovered; a covering that is public is a covering that holds.</a:t>
             </a:r>
           </a:p>
           <a:p>
             <a:r>
-              <a:rPr lang="en-US" sz="1200"/>
               <a:t>2. Per senior (~90 sec): each stands and says plainly 'When I am over my head, I call ___' — name and relationship; a covering person present stands where they are.</a:t>
             </a:r>
           </a:p>
           <a:p>
             <a:r>
-              <a:rPr lang="en-US" sz="1200"/>
               <a:t>3. Confirm the sign-off aloud: the parent — 'I confirm it' — then the Lead Companion.</a:t>
             </a:r>
           </a:p>
           <a:p>
             <a:r>
-              <a:rPr lang="en-US" sz="1200"/>
               <a:t>4. The senior writes the covering name on their Commissioning Card in the circle — ink, not intention.</a:t>
             </a:r>
           </a:p>
           <a:p>
             <a:r>
-              <a:rPr lang="en-US" sz="1200"/>
-              <a:t>GUARD: A deferred sign-off was handled privately in Week 15's week, with a hopeful path — it NEVER surfaces as news today; that senior is honored by name in the blessing block, no explanation to the room.</a:t>
-            </a:r>
-          </a:p>
-          <a:p>
-            <a:r>
-              <a:rPr lang="en-US" sz="1200"/>
+              <a:t>GUARD: A deferred sign-off was handled privately in Evening 11's week, with a hopeful path — it NEVER surfaces as news today; that senior is honored by name in the blessing block, no explanation to the room.</a:t>
+            </a:r>
+          </a:p>
+          <a:p>
+            <a:r>
               <a:t>SUB: The confirmation belongs to those who did the discernment. Covering for the founder, relay his word by name — 'John confirmed it before today; I carry that confirmation' — never as your own judgment.</a:t>
             </a:r>
           </a:p>
@@ -1519,43 +1485,36 @@
           <a:lstStyle/>
           <a:p>
             <a:r>
-              <a:rPr lang="en-US" sz="1200"/>
-              <a:t>S22 · 7:54–8:10 · LEAD: CONTENT PRESENTER CIRCLE</a:t>
-            </a:r>
-          </a:p>
-          <a:p>
-            <a:r>
-              <a:rPr lang="en-US" sz="1200"/>
+              <a:t>E17 · 7:54–8:10 · LEAD: CONTENT PRESENTER CIRCLE</a:t>
+            </a:r>
+          </a:p>
+          <a:p>
+            <a:r>
               <a:t>BEATS:</a:t>
             </a:r>
           </a:p>
           <a:p>
             <a:r>
-              <a:rPr lang="en-US" sz="1200"/>
               <a:t>1. Per senior (~4–5 min): stand center, family behind; two Companions speak prepared blessings from specific leading moments, 1–3 sentences; the parent adds ONE; the cohort speaks the Aaronic; hand them the Commissioning and Limits Cards — serve the body, keep the rules, call your covering, watch the signs.</a:t>
             </a:r>
           </a:p>
           <a:p>
             <a:r>
-              <a:rPr lang="en-US" sz="1200"/>
               <a:t>2. The senior returns to the circle, not a seat apart.</a:t>
             </a:r>
           </a:p>
           <a:p>
             <a:r>
-              <a:rPr lang="en-US" sz="1200"/>
               <a:t>3. Then the charge over them all, brief: own walk first; the rules when no one is checking; covering early, not late; the three signs; FC1 is a real and honorable place to stand.</a:t>
             </a:r>
           </a:p>
           <a:p>
             <a:r>
-              <a:rPr lang="en-US" sz="1200"/>
               <a:t>CUES: Blessing form = one specific witnessed sentence, not a speech. Tears under blessing are the night working — do not rush or rescue.</a:t>
             </a:r>
           </a:p>
           <a:p>
             <a:r>
-              <a:rPr lang="en-US" sz="1200"/>
               <a:t>SUB: Blessings must be their authors' own; the charge is the founder's — read it named as his or speak your own. A covering leader never reads the founder's blessing as their own.</a:t>
             </a:r>
           </a:p>
@@ -1602,37 +1561,31 @@
           <a:lstStyle/>
           <a:p>
             <a:r>
-              <a:rPr lang="en-US" sz="1200"/>
-              <a:t>S22 · 8:10–8:13 · LEAD: CONTENT PRESENTER CIRCLE</a:t>
-            </a:r>
-          </a:p>
-          <a:p>
-            <a:r>
-              <a:rPr lang="en-US" sz="1200"/>
+              <a:t>E17 · 8:10–8:13 · LEAD: CONTENT PRESENTER CIRCLE</a:t>
+            </a:r>
+          </a:p>
+          <a:p>
+            <a:r>
               <a:t>BEATS:</a:t>
             </a:r>
           </a:p>
           <a:p>
             <a:r>
-              <a:rPr lang="en-US" sz="1200"/>
               <a:t>1. Before anyone reaches for a coat: hold up the physical date card and announce Lab 1 of the spring serving cycle — day, date, time, place; new FC1s write it down now.</a:t>
             </a:r>
           </a:p>
           <a:p>
             <a:r>
-              <a:rPr lang="en-US" sz="1200"/>
               <a:t>2. Name their Lab 1 assignment: bring one vital-signs observation from this room today, seen with the lens from the charge.</a:t>
             </a:r>
           </a:p>
           <a:p>
             <a:r>
-              <a:rPr lang="en-US" sz="1200"/>
               <a:t>3. Say the why out loud: anyone can hold a beautiful ceremony — a date on a calendar is the proof today was a gate. These leaders begin in days.</a:t>
             </a:r>
           </a:p>
           <a:p>
             <a:r>
-              <a:rPr lang="en-US" sz="1200"/>
               <a:t>4. One sentence to the younger teens: in a year or two, some of you will stand where these seniors stand — watch how they begin. No promises, no selection talk; just the door left visibly open.</a:t>
             </a:r>
           </a:p>
@@ -1679,31 +1632,26 @@
           <a:lstStyle/>
           <a:p>
             <a:r>
-              <a:rPr lang="en-US" sz="1200"/>
-              <a:t>S22 · 8:24–8:28 · LEAD: BOTH LEADERS CIRCLE</a:t>
-            </a:r>
-          </a:p>
-          <a:p>
-            <a:r>
-              <a:rPr lang="en-US" sz="1200"/>
+              <a:t>E17 · 8:24–8:28 · LEAD: BOTH LEADERS CIRCLE</a:t>
+            </a:r>
+          </a:p>
+          <a:p>
+            <a:r>
               <a:t>BEATS:</a:t>
             </a:r>
           </a:p>
           <a:p>
             <a:r>
-              <a:rPr lang="en-US" sz="1200"/>
               <a:t>1. The new FC1s answer first: what went well, what they'd do differently — and one last time before it becomes their question to carry: what would you tell whoever teaches this. A sentence or two each.</a:t>
             </a:r>
           </a:p>
           <a:p>
             <a:r>
-              <a:rPr lang="en-US" sz="1200"/>
               <a:t>2. The adult answers for the parts the adults carried; then the room, two or three voices; received undefended — 'thank you' is the whole response.</a:t>
             </a:r>
           </a:p>
           <a:p>
             <a:r>
-              <a:rPr lang="en-US" sz="1200"/>
               <a:t>3. May well be dropped today — the rite itself is often what the energy needs; dropping it twice running goes to the debrief.</a:t>
             </a:r>
           </a:p>
@@ -1750,37 +1698,31 @@
           <a:lstStyle/>
           <a:p>
             <a:r>
-              <a:rPr lang="en-US" sz="1200"/>
-              <a:t>S22 · 8:13–8:20 · LEAD: CONTENT PRESENTER CIRCLE</a:t>
-            </a:r>
-          </a:p>
-          <a:p>
-            <a:r>
-              <a:rPr lang="en-US" sz="1200"/>
+              <a:t>E17 · 8:13–8:20 · LEAD: CONTENT PRESENTER CIRCLE</a:t>
+            </a:r>
+          </a:p>
+          <a:p>
+            <a:r>
               <a:t>BEATS:</a:t>
             </a:r>
           </a:p>
           <a:p>
             <a:r>
-              <a:rPr lang="en-US" sz="1200"/>
               <a:t>1. The reserved senior closes the full protocol from memory: standing circle, one-word landing, the one thing, the one practice, the blessing round, closing prayer and sending.</a:t>
             </a:r>
           </a:p>
           <a:p>
             <a:r>
-              <a:rPr lang="en-US" sz="1200"/>
               <a:t>2. Expect the blessing round to lean hard toward the FC1s — give it room; the closing senior was told beforehand: receive it, then finish. Ending well under a full heart is the most FC1 thing they will do all night.</a:t>
             </a:r>
           </a:p>
           <a:p>
             <a:r>
-              <a:rPr lang="en-US" sz="1200"/>
               <a:t>3. Resist adding ANYTHING after the senior's sending — the last words of the series belong to the generation it raised; the team's silence is the loudest confirmation in the room.</a:t>
             </a:r>
           </a:p>
           <a:p>
             <a:r>
-              <a:rPr lang="en-US" sz="1200"/>
               <a:t>4. After: keepsake signing at the side table — names as witnesses; nobody leaves without signing. Dessert, lingering; stay — the younger teens near the seniors are the pipeline forming in real time.</a:t>
             </a:r>
           </a:p>
@@ -6633,7 +6575,7 @@
                 </a:solidFill>
                 <a:latin typeface="Calibri"/>
               </a:rPr>
-              <a:t>SESSION 22</a:t>
+              <a:t>EVENING 17</a:t>
             </a:r>
           </a:p>
           <a:p>
@@ -6867,7 +6809,7 @@
                 </a:solidFill>
                 <a:latin typeface="Calibri"/>
               </a:rPr>
-              <a:t>Session 22 commissions what the map has built — </a:t>
+              <a:t>Evening 17 commissions what the map has built — </a:t>
             </a:r>
             <a:r>
               <a:rPr sz="1800" b="1">
@@ -7051,7 +6993,7 @@
                 </a:solidFill>
                 <a:latin typeface="Cambria"/>
               </a:rPr>
-              <a:t>Session 22 — Tonight’s Road</a:t>
+              <a:t>Evening 17 — Tonight’s Road</a:t>
             </a:r>
           </a:p>
         </p:txBody>

--- a/_implementation-notes/evening-series/FotH Evening Session 22 Slides DRAFT v1.pptx
+++ b/_implementation-notes/evening-series/FotH Evening Session 22 Slides DRAFT v1.pptx
@@ -5213,7 +5213,7 @@
           <a:p>
             <a:pPr algn="r"/>
             <a:r>
-              <a:t>318</a:t>
+              <a:t>319</a:t>
             </a:r>
             <a:endParaRPr sz="1000" b="1">
               <a:solidFill>
@@ -5460,7 +5460,7 @@
           <a:p>
             <a:pPr algn="r"/>
             <a:r>
-              <a:t>319</a:t>
+              <a:t>320</a:t>
             </a:r>
             <a:endParaRPr sz="1000" b="1">
               <a:solidFill>
@@ -5652,7 +5652,7 @@
           <a:p>
             <a:pPr algn="r"/>
             <a:r>
-              <a:t>320</a:t>
+              <a:t>321</a:t>
             </a:r>
             <a:endParaRPr sz="1000" b="1">
               <a:solidFill>
@@ -5844,7 +5844,7 @@
           <a:p>
             <a:pPr algn="r"/>
             <a:r>
-              <a:t>321</a:t>
+              <a:t>322</a:t>
             </a:r>
             <a:endParaRPr sz="1000" b="1">
               <a:solidFill>
@@ -6141,7 +6141,7 @@
           <a:p>
             <a:pPr algn="r"/>
             <a:r>
-              <a:t>322</a:t>
+              <a:t>323</a:t>
             </a:r>
             <a:endParaRPr sz="1000" b="1">
               <a:solidFill>
@@ -6424,7 +6424,7 @@
           <a:p>
             <a:pPr algn="r"/>
             <a:r>
-              <a:t>323</a:t>
+              <a:t>324</a:t>
             </a:r>
             <a:endParaRPr sz="1000" b="1">
               <a:solidFill>
@@ -6673,7 +6673,7 @@
           <a:p>
             <a:pPr algn="r"/>
             <a:r>
-              <a:t>310</a:t>
+              <a:t>311</a:t>
             </a:r>
             <a:endParaRPr sz="1000" b="1">
               <a:solidFill>
@@ -6854,7 +6854,7 @@
           <a:p>
             <a:pPr algn="r"/>
             <a:r>
-              <a:t>311</a:t>
+              <a:t>312</a:t>
             </a:r>
             <a:endParaRPr sz="1000" b="1">
               <a:solidFill>
@@ -7268,7 +7268,7 @@
           <a:p>
             <a:pPr algn="r"/>
             <a:r>
-              <a:t>312</a:t>
+              <a:t>313</a:t>
             </a:r>
             <a:endParaRPr sz="1000" b="1">
               <a:solidFill>
@@ -7601,7 +7601,7 @@
           <a:p>
             <a:pPr algn="r"/>
             <a:r>
-              <a:t>313</a:t>
+              <a:t>314</a:t>
             </a:r>
             <a:endParaRPr sz="1000" b="1">
               <a:solidFill>
@@ -7934,7 +7934,7 @@
           <a:p>
             <a:pPr algn="r"/>
             <a:r>
-              <a:t>314</a:t>
+              <a:t>315</a:t>
             </a:r>
             <a:endParaRPr sz="1000" b="1">
               <a:solidFill>
@@ -8236,7 +8236,7 @@
           <a:p>
             <a:pPr algn="r"/>
             <a:r>
-              <a:t>315</a:t>
+              <a:t>316</a:t>
             </a:r>
             <a:endParaRPr sz="1000" b="1">
               <a:solidFill>
@@ -8508,7 +8508,7 @@
           <a:p>
             <a:pPr algn="r"/>
             <a:r>
-              <a:t>316</a:t>
+              <a:t>317</a:t>
             </a:r>
             <a:endParaRPr sz="1000" b="1">
               <a:solidFill>
@@ -8780,7 +8780,7 @@
           <a:p>
             <a:pPr algn="r"/>
             <a:r>
-              <a:t>317</a:t>
+              <a:t>318</a:t>
             </a:r>
             <a:endParaRPr sz="1000" b="1">
               <a:solidFill>
